--- a/Campus360_Genesis2.0_FE.pptx
+++ b/Campus360_Genesis2.0_FE.pptx
@@ -13,22 +13,19 @@
     <p:sldId id="258" r:id="rId8"/>
     <p:sldId id="259" r:id="rId9"/>
     <p:sldId id="260" r:id="rId10"/>
-    <p:sldId id="261" r:id="rId11"/>
   </p:sldIdLst>
   <p:sldSz cy="10287000" cx="18288000"/>
   <p:notesSz cx="6858000" cy="9144000"/>
   <p:embeddedFontLst>
     <p:embeddedFont>
       <p:font typeface="Libre Baskerville"/>
-      <p:regular r:id="rId12"/>
-      <p:bold r:id="rId13"/>
-      <p:italic r:id="rId14"/>
-      <p:boldItalic r:id="rId15"/>
+      <p:bold r:id="rId11"/>
+      <p:boldItalic r:id="rId12"/>
     </p:embeddedFont>
     <p:embeddedFont>
       <p:font typeface="IBM Plex Mono"/>
-      <p:bold r:id="rId16"/>
-      <p:boldItalic r:id="rId17"/>
+      <p:bold r:id="rId13"/>
+      <p:boldItalic r:id="rId14"/>
     </p:embeddedFont>
   </p:embeddedFontLst>
   <p:defaultTextStyle>
@@ -908,7 +905,7 @@
   <p:cSld>
     <p:spTree>
       <p:nvGrpSpPr>
-        <p:cNvPr id="119" name="Shape 119"/>
+        <p:cNvPr id="120" name="Shape 120"/>
         <p:cNvGrpSpPr/>
         <p:nvPr/>
       </p:nvGrpSpPr>
@@ -922,7 +919,7 @@
       </p:grpSpPr>
       <p:sp>
         <p:nvSpPr>
-          <p:cNvPr id="120" name="Google Shape;120;p3:notes"/>
+          <p:cNvPr id="121" name="Google Shape;121;h3e9dd792a08fb2a_4_0:notes"/>
           <p:cNvSpPr txBox="1"/>
           <p:nvPr>
             <p:ph idx="1" type="body"/>
@@ -961,7 +958,7 @@
       </p:sp>
       <p:sp>
         <p:nvSpPr>
-          <p:cNvPr id="121" name="Google Shape;121;p3:notes"/>
+          <p:cNvPr id="122" name="Google Shape;122;h3e9dd792a08fb2a_4_0:notes"/>
           <p:cNvSpPr/>
           <p:nvPr>
             <p:ph idx="2" type="sldImg"/>
@@ -970,7 +967,7 @@
         <p:spPr>
           <a:xfrm>
             <a:off x="1143225" y="685800"/>
-            <a:ext cx="4572225" cy="3429000"/>
+            <a:ext cx="4572300" cy="3429000"/>
           </a:xfrm>
           <a:custGeom>
             <a:rect b="b" l="l" r="r" t="t"/>
@@ -1007,7 +1004,7 @@
   <p:cSld>
     <p:spTree>
       <p:nvGrpSpPr>
-        <p:cNvPr id="135" name="Shape 135"/>
+        <p:cNvPr id="138" name="Shape 138"/>
         <p:cNvGrpSpPr/>
         <p:nvPr/>
       </p:nvGrpSpPr>
@@ -1021,7 +1018,7 @@
       </p:grpSpPr>
       <p:sp>
         <p:nvSpPr>
-          <p:cNvPr id="136" name="Google Shape;136;p4:notes"/>
+          <p:cNvPr id="139" name="Google Shape;139;p5:notes"/>
           <p:cNvSpPr txBox="1"/>
           <p:nvPr>
             <p:ph idx="1" type="body"/>
@@ -1060,7 +1057,7 @@
       </p:sp>
       <p:sp>
         <p:nvSpPr>
-          <p:cNvPr id="137" name="Google Shape;137;p4:notes"/>
+          <p:cNvPr id="140" name="Google Shape;140;p5:notes"/>
           <p:cNvSpPr/>
           <p:nvPr>
             <p:ph idx="2" type="sldImg"/>
@@ -1106,7 +1103,7 @@
   <p:cSld>
     <p:spTree>
       <p:nvGrpSpPr>
-        <p:cNvPr id="151" name="Shape 151"/>
+        <p:cNvPr id="155" name="Shape 155"/>
         <p:cNvGrpSpPr/>
         <p:nvPr/>
       </p:nvGrpSpPr>
@@ -1120,7 +1117,7 @@
       </p:grpSpPr>
       <p:sp>
         <p:nvSpPr>
-          <p:cNvPr id="152" name="Google Shape;152;p5:notes"/>
+          <p:cNvPr id="156" name="Google Shape;156;p6:notes"/>
           <p:cNvSpPr txBox="1"/>
           <p:nvPr>
             <p:ph idx="1" type="body"/>
@@ -1159,106 +1156,7 @@
       </p:sp>
       <p:sp>
         <p:nvSpPr>
-          <p:cNvPr id="153" name="Google Shape;153;p5:notes"/>
-          <p:cNvSpPr/>
-          <p:nvPr>
-            <p:ph idx="2" type="sldImg"/>
-          </p:nvPr>
-        </p:nvSpPr>
-        <p:spPr>
-          <a:xfrm>
-            <a:off x="1143225" y="685800"/>
-            <a:ext cx="4572225" cy="3429000"/>
-          </a:xfrm>
-          <a:custGeom>
-            <a:rect b="b" l="l" r="r" t="t"/>
-            <a:pathLst>
-              <a:path extrusionOk="0" h="120000" w="120000">
-                <a:moveTo>
-                  <a:pt x="0" y="0"/>
-                </a:moveTo>
-                <a:lnTo>
-                  <a:pt x="120000" y="0"/>
-                </a:lnTo>
-                <a:lnTo>
-                  <a:pt x="120000" y="120000"/>
-                </a:lnTo>
-                <a:lnTo>
-                  <a:pt x="0" y="120000"/>
-                </a:lnTo>
-                <a:close/>
-              </a:path>
-            </a:pathLst>
-          </a:custGeom>
-        </p:spPr>
-      </p:sp>
-    </p:spTree>
-  </p:cSld>
-  <p:clrMapOvr>
-    <a:masterClrMapping/>
-  </p:clrMapOvr>
-</p:notes>
-</file>
-
-<file path=ppt/notesSlides/notesSlide6.xml><?xml version="1.0" encoding="utf-8"?>
-<p:notes xmlns:a="http://schemas.openxmlformats.org/drawingml/2006/main" xmlns:r="http://schemas.openxmlformats.org/officeDocument/2006/relationships" xmlns:mc="http://schemas.openxmlformats.org/markup-compatibility/2006" xmlns:mv="urn:schemas-microsoft-com:mac:vml" xmlns:p="http://schemas.openxmlformats.org/presentationml/2006/main" xmlns:c="http://schemas.openxmlformats.org/drawingml/2006/chart" xmlns:dgm="http://schemas.openxmlformats.org/drawingml/2006/diagram" xmlns:o="urn:schemas-microsoft-com:office:office" xmlns:v="urn:schemas-microsoft-com:vml" xmlns:pvml="urn:schemas-microsoft-com:office:powerpoint" xmlns:com="http://schemas.openxmlformats.org/drawingml/2006/compatibility" xmlns:p14="http://schemas.microsoft.com/office/powerpoint/2010/main" xmlns:p15="http://schemas.microsoft.com/office/powerpoint/2012/main" xmlns:ahyp="http://schemas.microsoft.com/office/drawing/2018/hyperlinkcolor" showMasterPhAnim="0" showMasterSp="0">
-  <p:cSld>
-    <p:spTree>
-      <p:nvGrpSpPr>
-        <p:cNvPr id="167" name="Shape 167"/>
-        <p:cNvGrpSpPr/>
-        <p:nvPr/>
-      </p:nvGrpSpPr>
-      <p:grpSpPr>
-        <a:xfrm>
-          <a:off x="0" y="0"/>
-          <a:ext cx="0" cy="0"/>
-          <a:chOff x="0" y="0"/>
-          <a:chExt cx="0" cy="0"/>
-        </a:xfrm>
-      </p:grpSpPr>
-      <p:sp>
-        <p:nvSpPr>
-          <p:cNvPr id="168" name="Google Shape;168;p6:notes"/>
-          <p:cNvSpPr txBox="1"/>
-          <p:nvPr>
-            <p:ph idx="1" type="body"/>
-          </p:nvPr>
-        </p:nvSpPr>
-        <p:spPr>
-          <a:xfrm>
-            <a:off x="685800" y="4343400"/>
-            <a:ext cx="5486400" cy="4114800"/>
-          </a:xfrm>
-          <a:prstGeom prst="rect">
-            <a:avLst/>
-          </a:prstGeom>
-        </p:spPr>
-        <p:txBody>
-          <a:bodyPr anchorCtr="0" anchor="t" bIns="91425" lIns="91425" spcFirstLastPara="1" rIns="91425" wrap="square" tIns="91425">
-            <a:noAutofit/>
-          </a:bodyPr>
-          <a:lstStyle/>
-          <a:p>
-            <a:pPr indent="0" lvl="0" marL="0" rtl="0" algn="l">
-              <a:spcBef>
-                <a:spcPts val="0"/>
-              </a:spcBef>
-              <a:spcAft>
-                <a:spcPts val="0"/>
-              </a:spcAft>
-              <a:buNone/>
-            </a:pPr>
-            <a:r>
-              <a:t/>
-            </a:r>
-            <a:endParaRPr/>
-          </a:p>
-        </p:txBody>
-      </p:sp>
-      <p:sp>
-        <p:nvSpPr>
-          <p:cNvPr id="169" name="Google Shape;169;p6:notes"/>
+          <p:cNvPr id="157" name="Google Shape;157;p6:notes"/>
           <p:cNvSpPr/>
           <p:nvPr>
             <p:ph idx="2" type="sldImg"/>
@@ -10938,6 +10836,206 @@
         </p:nvGrpSpPr>
         <p:grpSpPr>
           <a:xfrm>
+            <a:off x="0" y="9113639"/>
+            <a:ext cx="18288000" cy="1173361"/>
+            <a:chOff x="0" y="-38100"/>
+            <a:chExt cx="4816593" cy="309033"/>
+          </a:xfrm>
+        </p:grpSpPr>
+        <p:sp>
+          <p:nvSpPr>
+            <p:cNvPr id="85" name="Google Shape;85;p13"/>
+            <p:cNvSpPr/>
+            <p:nvPr/>
+          </p:nvSpPr>
+          <p:spPr>
+            <a:xfrm>
+              <a:off x="0" y="0"/>
+              <a:ext cx="4816592" cy="270933"/>
+            </a:xfrm>
+            <a:custGeom>
+              <a:rect b="b" l="l" r="r" t="t"/>
+              <a:pathLst>
+                <a:path extrusionOk="0" h="270933" w="4816592">
+                  <a:moveTo>
+                    <a:pt x="0" y="0"/>
+                  </a:moveTo>
+                  <a:lnTo>
+                    <a:pt x="4816592" y="0"/>
+                  </a:lnTo>
+                  <a:lnTo>
+                    <a:pt x="4816592" y="270933"/>
+                  </a:lnTo>
+                  <a:lnTo>
+                    <a:pt x="0" y="270933"/>
+                  </a:lnTo>
+                  <a:close/>
+                </a:path>
+              </a:pathLst>
+            </a:custGeom>
+            <a:solidFill>
+              <a:srgbClr val="21436F"/>
+            </a:solidFill>
+            <a:ln>
+              <a:noFill/>
+            </a:ln>
+          </p:spPr>
+        </p:sp>
+        <p:sp>
+          <p:nvSpPr>
+            <p:cNvPr id="86" name="Google Shape;86;p13"/>
+            <p:cNvSpPr txBox="1"/>
+            <p:nvPr/>
+          </p:nvSpPr>
+          <p:spPr>
+            <a:xfrm>
+              <a:off x="0" y="-38100"/>
+              <a:ext cx="4816593" cy="309033"/>
+            </a:xfrm>
+            <a:prstGeom prst="rect">
+              <a:avLst/>
+            </a:prstGeom>
+            <a:noFill/>
+            <a:ln>
+              <a:noFill/>
+            </a:ln>
+          </p:spPr>
+          <p:txBody>
+            <a:bodyPr anchorCtr="0" anchor="ctr" bIns="50800" lIns="50800" spcFirstLastPara="1" rIns="50800" wrap="square" tIns="50800">
+              <a:noAutofit/>
+            </a:bodyPr>
+            <a:lstStyle/>
+            <a:p>
+              <a:pPr indent="0" lvl="0" marL="0" marR="0" rtl="0" algn="ctr">
+                <a:lnSpc>
+                  <a:spcPct val="147722"/>
+                </a:lnSpc>
+                <a:spcBef>
+                  <a:spcPts val="0"/>
+                </a:spcBef>
+                <a:spcAft>
+                  <a:spcPts val="0"/>
+                </a:spcAft>
+                <a:buNone/>
+              </a:pPr>
+              <a:r>
+                <a:t/>
+              </a:r>
+              <a:endParaRPr b="0" i="0" sz="1800" u="none" cap="none" strike="noStrike">
+                <a:solidFill>
+                  <a:schemeClr val="dk1"/>
+                </a:solidFill>
+                <a:latin typeface="Calibri"/>
+                <a:ea typeface="Calibri"/>
+                <a:cs typeface="Calibri"/>
+                <a:sym typeface="Calibri"/>
+              </a:endParaRPr>
+            </a:p>
+          </p:txBody>
+        </p:sp>
+      </p:grpSp>
+      <p:sp>
+        <p:nvSpPr>
+          <p:cNvPr id="87" name="Google Shape;87;p13"/>
+          <p:cNvSpPr/>
+          <p:nvPr/>
+        </p:nvSpPr>
+        <p:spPr>
+          <a:xfrm>
+            <a:off x="11714786" y="1402661"/>
+            <a:ext cx="5254203" cy="7855639"/>
+          </a:xfrm>
+          <a:custGeom>
+            <a:rect b="b" l="l" r="r" t="t"/>
+            <a:pathLst>
+              <a:path extrusionOk="0" h="7855639" w="5254203">
+                <a:moveTo>
+                  <a:pt x="0" y="0"/>
+                </a:moveTo>
+                <a:lnTo>
+                  <a:pt x="5254203" y="0"/>
+                </a:lnTo>
+                <a:lnTo>
+                  <a:pt x="5254203" y="7855639"/>
+                </a:lnTo>
+                <a:lnTo>
+                  <a:pt x="0" y="7855639"/>
+                </a:lnTo>
+                <a:lnTo>
+                  <a:pt x="0" y="0"/>
+                </a:lnTo>
+                <a:close/>
+              </a:path>
+            </a:pathLst>
+          </a:custGeom>
+          <a:blipFill rotWithShape="1">
+            <a:blip r:embed="rId3">
+              <a:alphaModFix amt="82000"/>
+            </a:blip>
+            <a:stretch>
+              <a:fillRect b="-11706" l="0" r="0" t="0"/>
+            </a:stretch>
+          </a:blipFill>
+          <a:ln>
+            <a:noFill/>
+          </a:ln>
+        </p:spPr>
+      </p:sp>
+      <p:sp>
+        <p:nvSpPr>
+          <p:cNvPr id="88" name="Google Shape;88;p13"/>
+          <p:cNvSpPr/>
+          <p:nvPr/>
+        </p:nvSpPr>
+        <p:spPr>
+          <a:xfrm>
+            <a:off x="751699" y="-305242"/>
+            <a:ext cx="6829722" cy="3841719"/>
+          </a:xfrm>
+          <a:custGeom>
+            <a:rect b="b" l="l" r="r" t="t"/>
+            <a:pathLst>
+              <a:path extrusionOk="0" h="3841719" w="6829722">
+                <a:moveTo>
+                  <a:pt x="0" y="0"/>
+                </a:moveTo>
+                <a:lnTo>
+                  <a:pt x="6829722" y="0"/>
+                </a:lnTo>
+                <a:lnTo>
+                  <a:pt x="6829722" y="3841718"/>
+                </a:lnTo>
+                <a:lnTo>
+                  <a:pt x="0" y="3841718"/>
+                </a:lnTo>
+                <a:lnTo>
+                  <a:pt x="0" y="0"/>
+                </a:lnTo>
+                <a:close/>
+              </a:path>
+            </a:pathLst>
+          </a:custGeom>
+          <a:blipFill rotWithShape="1">
+            <a:blip r:embed="rId4">
+              <a:alphaModFix/>
+            </a:blip>
+            <a:stretch>
+              <a:fillRect b="0" l="0" r="0" t="0"/>
+            </a:stretch>
+          </a:blipFill>
+          <a:ln>
+            <a:noFill/>
+          </a:ln>
+        </p:spPr>
+      </p:sp>
+      <p:grpSp>
+        <p:nvGrpSpPr>
+          <p:cNvPr id="89" name="Google Shape;89;p13"/>
+          <p:cNvGrpSpPr/>
+          <p:nvPr/>
+        </p:nvGrpSpPr>
+        <p:grpSpPr>
+          <a:xfrm>
             <a:off x="13341723" y="188798"/>
             <a:ext cx="1204279" cy="1213862"/>
             <a:chOff x="0" y="0"/>
@@ -10946,7 +11044,7 @@
         </p:grpSpPr>
         <p:grpSp>
           <p:nvGrpSpPr>
-            <p:cNvPr id="85" name="Google Shape;85;p13"/>
+            <p:cNvPr id="90" name="Google Shape;90;p13"/>
             <p:cNvGrpSpPr/>
             <p:nvPr/>
           </p:nvGrpSpPr>
@@ -10960,7 +11058,7 @@
           </p:grpSpPr>
           <p:sp>
             <p:nvSpPr>
-              <p:cNvPr id="86" name="Google Shape;86;p13"/>
+              <p:cNvPr id="91" name="Google Shape;91;p13"/>
               <p:cNvSpPr/>
               <p:nvPr/>
             </p:nvSpPr>
@@ -11031,7 +11129,7 @@
           </p:sp>
           <p:sp>
             <p:nvSpPr>
-              <p:cNvPr id="87" name="Google Shape;87;p13"/>
+              <p:cNvPr id="92" name="Google Shape;92;p13"/>
               <p:cNvSpPr txBox="1"/>
               <p:nvPr/>
             </p:nvSpPr>
@@ -11084,7 +11182,7 @@
         </p:grpSp>
         <p:sp>
           <p:nvSpPr>
-            <p:cNvPr id="88" name="Google Shape;88;p13"/>
+            <p:cNvPr id="93" name="Google Shape;93;p13"/>
             <p:cNvSpPr/>
             <p:nvPr/>
           </p:nvSpPr>
@@ -11117,7 +11215,7 @@
               </a:pathLst>
             </a:custGeom>
             <a:blipFill rotWithShape="1">
-              <a:blip r:embed="rId3">
+              <a:blip r:embed="rId5">
                 <a:alphaModFix/>
               </a:blip>
               <a:stretch>
@@ -11132,7 +11230,7 @@
       </p:grpSp>
       <p:sp>
         <p:nvSpPr>
-          <p:cNvPr id="89" name="Google Shape;89;p13"/>
+          <p:cNvPr id="94" name="Google Shape;94;p13"/>
           <p:cNvSpPr/>
           <p:nvPr/>
         </p:nvSpPr>
@@ -11165,214 +11263,6 @@
             </a:pathLst>
           </a:custGeom>
           <a:blipFill rotWithShape="1">
-            <a:blip r:embed="rId4">
-              <a:alphaModFix/>
-            </a:blip>
-            <a:stretch>
-              <a:fillRect b="0" l="0" r="0" t="0"/>
-            </a:stretch>
-          </a:blipFill>
-          <a:ln>
-            <a:noFill/>
-          </a:ln>
-        </p:spPr>
-        <p:txBody>
-          <a:bodyPr/>
-          <a:p/>
-        </p:txBody>
-      </p:sp>
-      <p:grpSp>
-        <p:nvGrpSpPr>
-          <p:cNvPr id="90" name="Google Shape;90;p13"/>
-          <p:cNvGrpSpPr/>
-          <p:nvPr/>
-        </p:nvGrpSpPr>
-        <p:grpSpPr>
-          <a:xfrm>
-            <a:off x="0" y="9113639"/>
-            <a:ext cx="18288000" cy="1173361"/>
-            <a:chOff x="0" y="-38100"/>
-            <a:chExt cx="4816593" cy="309033"/>
-          </a:xfrm>
-        </p:grpSpPr>
-        <p:sp>
-          <p:nvSpPr>
-            <p:cNvPr id="91" name="Google Shape;91;p13"/>
-            <p:cNvSpPr/>
-            <p:nvPr/>
-          </p:nvSpPr>
-          <p:spPr>
-            <a:xfrm>
-              <a:off x="0" y="0"/>
-              <a:ext cx="4816592" cy="270933"/>
-            </a:xfrm>
-            <a:custGeom>
-              <a:rect b="b" l="l" r="r" t="t"/>
-              <a:pathLst>
-                <a:path extrusionOk="0" h="270933" w="4816592">
-                  <a:moveTo>
-                    <a:pt x="0" y="0"/>
-                  </a:moveTo>
-                  <a:lnTo>
-                    <a:pt x="4816592" y="0"/>
-                  </a:lnTo>
-                  <a:lnTo>
-                    <a:pt x="4816592" y="270933"/>
-                  </a:lnTo>
-                  <a:lnTo>
-                    <a:pt x="0" y="270933"/>
-                  </a:lnTo>
-                  <a:close/>
-                </a:path>
-              </a:pathLst>
-            </a:custGeom>
-            <a:solidFill>
-              <a:srgbClr val="9F2F24"/>
-            </a:solidFill>
-            <a:ln>
-              <a:noFill/>
-            </a:ln>
-          </p:spPr>
-        </p:sp>
-        <p:sp>
-          <p:nvSpPr>
-            <p:cNvPr id="92" name="Google Shape;92;p13"/>
-            <p:cNvSpPr txBox="1"/>
-            <p:nvPr/>
-          </p:nvSpPr>
-          <p:spPr>
-            <a:xfrm>
-              <a:off x="0" y="-38100"/>
-              <a:ext cx="4816593" cy="309033"/>
-            </a:xfrm>
-            <a:prstGeom prst="rect">
-              <a:avLst/>
-            </a:prstGeom>
-            <a:noFill/>
-            <a:ln>
-              <a:noFill/>
-            </a:ln>
-          </p:spPr>
-          <p:txBody>
-            <a:bodyPr anchorCtr="0" anchor="ctr" bIns="50800" lIns="50800" spcFirstLastPara="1" rIns="50800" wrap="square" tIns="50800">
-              <a:noAutofit/>
-            </a:bodyPr>
-            <a:lstStyle/>
-            <a:p>
-              <a:pPr indent="0" lvl="0" marL="0" marR="0" rtl="0" algn="ctr">
-                <a:lnSpc>
-                  <a:spcPct val="147722"/>
-                </a:lnSpc>
-                <a:spcBef>
-                  <a:spcPts val="0"/>
-                </a:spcBef>
-                <a:spcAft>
-                  <a:spcPts val="0"/>
-                </a:spcAft>
-                <a:buNone/>
-              </a:pPr>
-              <a:r>
-                <a:t/>
-              </a:r>
-              <a:endParaRPr b="0" i="0" sz="1800" u="none" cap="none" strike="noStrike">
-                <a:solidFill>
-                  <a:schemeClr val="dk1"/>
-                </a:solidFill>
-                <a:latin typeface="Calibri"/>
-                <a:ea typeface="Calibri"/>
-                <a:cs typeface="Calibri"/>
-                <a:sym typeface="Calibri"/>
-              </a:endParaRPr>
-            </a:p>
-          </p:txBody>
-        </p:sp>
-      </p:grpSp>
-      <p:sp>
-        <p:nvSpPr>
-          <p:cNvPr id="93" name="Google Shape;93;p13"/>
-          <p:cNvSpPr/>
-          <p:nvPr/>
-        </p:nvSpPr>
-        <p:spPr>
-          <a:xfrm>
-            <a:off x="10805445" y="1181233"/>
-            <a:ext cx="6453855" cy="8077067"/>
-          </a:xfrm>
-          <a:custGeom>
-            <a:rect b="b" l="l" r="r" t="t"/>
-            <a:pathLst>
-              <a:path extrusionOk="0" h="8077067" w="6453855">
-                <a:moveTo>
-                  <a:pt x="0" y="0"/>
-                </a:moveTo>
-                <a:lnTo>
-                  <a:pt x="6453855" y="0"/>
-                </a:lnTo>
-                <a:lnTo>
-                  <a:pt x="6453855" y="8077067"/>
-                </a:lnTo>
-                <a:lnTo>
-                  <a:pt x="0" y="8077067"/>
-                </a:lnTo>
-                <a:lnTo>
-                  <a:pt x="0" y="0"/>
-                </a:lnTo>
-                <a:close/>
-              </a:path>
-            </a:pathLst>
-          </a:custGeom>
-          <a:blipFill rotWithShape="1">
-            <a:blip r:embed="rId5">
-              <a:alphaModFix amt="82000"/>
-            </a:blip>
-            <a:stretch>
-              <a:fillRect b="-42049" l="0" r="0" t="0"/>
-            </a:stretch>
-          </a:blipFill>
-          <a:ln>
-            <a:noFill/>
-          </a:ln>
-        </p:spPr>
-        <p:txBody>
-          <a:bodyPr/>
-          <a:p/>
-        </p:txBody>
-      </p:sp>
-      <p:sp>
-        <p:nvSpPr>
-          <p:cNvPr id="94" name="Google Shape;94;p13"/>
-          <p:cNvSpPr/>
-          <p:nvPr/>
-        </p:nvSpPr>
-        <p:spPr>
-          <a:xfrm>
-            <a:off x="751699" y="44647"/>
-            <a:ext cx="6536135" cy="3676576"/>
-          </a:xfrm>
-          <a:custGeom>
-            <a:rect b="b" l="l" r="r" t="t"/>
-            <a:pathLst>
-              <a:path extrusionOk="0" h="3676576" w="6536135">
-                <a:moveTo>
-                  <a:pt x="0" y="0"/>
-                </a:moveTo>
-                <a:lnTo>
-                  <a:pt x="6536135" y="0"/>
-                </a:lnTo>
-                <a:lnTo>
-                  <a:pt x="6536135" y="3676576"/>
-                </a:lnTo>
-                <a:lnTo>
-                  <a:pt x="0" y="3676576"/>
-                </a:lnTo>
-                <a:lnTo>
-                  <a:pt x="0" y="0"/>
-                </a:lnTo>
-                <a:close/>
-              </a:path>
-            </a:pathLst>
-          </a:custGeom>
-          <a:blipFill rotWithShape="1">
             <a:blip r:embed="rId6">
               <a:alphaModFix/>
             </a:blip>
@@ -11384,10 +11274,6 @@
             <a:noFill/>
           </a:ln>
         </p:spPr>
-        <p:txBody>
-          <a:bodyPr/>
-          <a:p/>
-        </p:txBody>
       </p:sp>
       <p:sp>
         <p:nvSpPr>
@@ -11489,7 +11375,7 @@
                 <a:cs typeface="IBM Plex Mono"/>
                 <a:sym typeface="IBM Plex Mono"/>
               </a:rPr>
-              <a:t>TRACK:- EVA 02</a:t>
+              <a:t>TRACK:- EVA 01</a:t>
             </a:r>
             <a:endParaRPr/>
           </a:p>
@@ -11520,17 +11406,31 @@
           </a:bodyPr>
           <a:lstStyle/>
           <a:p>
-            <a:pPr>
-              <a:defRPr sz="2000" b="1">
-                <a:solidFill>
-                  <a:srgbClr val="0F172A"/>
-                </a:solidFill>
-                <a:latin typeface="IBM Plex Mono"/>
-              </a:defRPr>
+            <a:pPr indent="0" lvl="0" marL="0" marR="0" rtl="0" algn="l">
+              <a:lnSpc>
+                <a:spcPct val="140035"/>
+              </a:lnSpc>
+              <a:spcBef>
+                <a:spcPts val="0"/>
+              </a:spcBef>
+              <a:spcAft>
+                <a:spcPts val="0"/>
+              </a:spcAft>
+              <a:buNone/>
             </a:pPr>
             <a:r>
-              <a:t>PROBLEM STATEMENT ID:- PS-02 (Campus 360)</a:t>
+              <a:rPr b="1" i="0" lang="en-US" sz="3427" u="none" cap="none" strike="noStrike">
+                <a:solidFill>
+                  <a:srgbClr val="000000"/>
+                </a:solidFill>
+                <a:latin typeface="IBM Plex Mono"/>
+                <a:ea typeface="IBM Plex Mono"/>
+                <a:cs typeface="IBM Plex Mono"/>
+                <a:sym typeface="IBM Plex Mono"/>
+              </a:rPr>
+              <a:t>PROBLEM STATEMENT ID:-</a:t>
             </a:r>
+            <a:endParaRPr/>
           </a:p>
         </p:txBody>
       </p:sp>
@@ -11559,17 +11459,31 @@
           </a:bodyPr>
           <a:lstStyle/>
           <a:p>
-            <a:pPr>
-              <a:defRPr sz="2000" b="1">
-                <a:solidFill>
-                  <a:srgbClr val="4338CA"/>
-                </a:solidFill>
-                <a:latin typeface="IBM Plex Mono"/>
-              </a:defRPr>
+            <a:pPr indent="0" lvl="0" marL="0" marR="0" rtl="0" algn="l">
+              <a:lnSpc>
+                <a:spcPct val="140035"/>
+              </a:lnSpc>
+              <a:spcBef>
+                <a:spcPts val="0"/>
+              </a:spcBef>
+              <a:spcAft>
+                <a:spcPts val="0"/>
+              </a:spcAft>
+              <a:buNone/>
             </a:pPr>
             <a:r>
-              <a:t>TEAM NAME:- Campus360</a:t>
+              <a:rPr b="1" i="0" lang="en-US" sz="3427" u="none" cap="none" strike="noStrike">
+                <a:solidFill>
+                  <a:srgbClr val="000000"/>
+                </a:solidFill>
+                <a:latin typeface="IBM Plex Mono"/>
+                <a:ea typeface="IBM Plex Mono"/>
+                <a:cs typeface="IBM Plex Mono"/>
+                <a:sym typeface="IBM Plex Mono"/>
+              </a:rPr>
+              <a:t>TEAM NAME:- </a:t>
             </a:r>
+            <a:endParaRPr/>
           </a:p>
         </p:txBody>
       </p:sp>
@@ -11598,17 +11512,31 @@
           </a:bodyPr>
           <a:lstStyle/>
           <a:p>
-            <a:pPr>
-              <a:defRPr sz="1600" b="1">
-                <a:solidFill>
-                  <a:srgbClr val="0F172A"/>
-                </a:solidFill>
-                <a:latin typeface="IBM Plex Mono"/>
-              </a:defRPr>
+            <a:pPr indent="0" lvl="0" marL="0" marR="0" rtl="0" algn="l">
+              <a:lnSpc>
+                <a:spcPct val="140035"/>
+              </a:lnSpc>
+              <a:spcBef>
+                <a:spcPts val="0"/>
+              </a:spcBef>
+              <a:spcAft>
+                <a:spcPts val="0"/>
+              </a:spcAft>
+              <a:buNone/>
             </a:pPr>
             <a:r>
-              <a:t>Ritesh Yadav (Leader) | Roll: 62 (EXTC - D4B)</a:t>
+              <a:rPr b="1" i="0" lang="en-US" sz="3427" u="none" cap="none" strike="noStrike">
+                <a:solidFill>
+                  <a:srgbClr val="000000"/>
+                </a:solidFill>
+                <a:latin typeface="IBM Plex Mono"/>
+                <a:ea typeface="IBM Plex Mono"/>
+                <a:cs typeface="IBM Plex Mono"/>
+                <a:sym typeface="IBM Plex Mono"/>
+              </a:rPr>
+              <a:t>TEAM MEMBER 1</a:t>
             </a:r>
+            <a:endParaRPr/>
           </a:p>
         </p:txBody>
       </p:sp>
@@ -11637,17 +11565,31 @@
           </a:bodyPr>
           <a:lstStyle/>
           <a:p>
-            <a:pPr>
-              <a:defRPr sz="1500">
-                <a:solidFill>
-                  <a:srgbClr val="64748B"/>
-                </a:solidFill>
-                <a:latin typeface="IBM Plex Mono"/>
-              </a:defRPr>
+            <a:pPr indent="0" lvl="0" marL="0" marR="0" rtl="0" algn="l">
+              <a:lnSpc>
+                <a:spcPct val="140035"/>
+              </a:lnSpc>
+              <a:spcBef>
+                <a:spcPts val="0"/>
+              </a:spcBef>
+              <a:spcAft>
+                <a:spcPts val="0"/>
+              </a:spcAft>
+              <a:buNone/>
             </a:pPr>
             <a:r>
-              <a:t>Team Member 2 | First Year Engineering (FE)</a:t>
+              <a:rPr b="1" i="0" lang="en-US" sz="3427" u="none" cap="none" strike="noStrike">
+                <a:solidFill>
+                  <a:srgbClr val="000000"/>
+                </a:solidFill>
+                <a:latin typeface="IBM Plex Mono"/>
+                <a:ea typeface="IBM Plex Mono"/>
+                <a:cs typeface="IBM Plex Mono"/>
+                <a:sym typeface="IBM Plex Mono"/>
+              </a:rPr>
+              <a:t>TEAM MEMBER 2</a:t>
             </a:r>
+            <a:endParaRPr/>
           </a:p>
         </p:txBody>
       </p:sp>
@@ -11676,17 +11618,31 @@
           </a:bodyPr>
           <a:lstStyle/>
           <a:p>
-            <a:pPr>
-              <a:defRPr sz="1500">
-                <a:solidFill>
-                  <a:srgbClr val="64748B"/>
-                </a:solidFill>
-                <a:latin typeface="IBM Plex Mono"/>
-              </a:defRPr>
+            <a:pPr indent="0" lvl="0" marL="0" marR="0" rtl="0" algn="l">
+              <a:lnSpc>
+                <a:spcPct val="140035"/>
+              </a:lnSpc>
+              <a:spcBef>
+                <a:spcPts val="0"/>
+              </a:spcBef>
+              <a:spcAft>
+                <a:spcPts val="0"/>
+              </a:spcAft>
+              <a:buNone/>
             </a:pPr>
             <a:r>
-              <a:t>Team Member 3 | First Year Engineering (FE)</a:t>
+              <a:rPr b="1" i="0" lang="en-US" sz="3427" u="none" cap="none" strike="noStrike">
+                <a:solidFill>
+                  <a:srgbClr val="000000"/>
+                </a:solidFill>
+                <a:latin typeface="IBM Plex Mono"/>
+                <a:ea typeface="IBM Plex Mono"/>
+                <a:cs typeface="IBM Plex Mono"/>
+                <a:sym typeface="IBM Plex Mono"/>
+              </a:rPr>
+              <a:t>TEAM MEMBER 3</a:t>
             </a:r>
+            <a:endParaRPr/>
           </a:p>
         </p:txBody>
       </p:sp>
@@ -11715,17 +11671,31 @@
           </a:bodyPr>
           <a:lstStyle/>
           <a:p>
-            <a:pPr>
-              <a:defRPr sz="1500">
-                <a:solidFill>
-                  <a:srgbClr val="64748B"/>
-                </a:solidFill>
-                <a:latin typeface="IBM Plex Mono"/>
-              </a:defRPr>
+            <a:pPr indent="0" lvl="0" marL="0" marR="0" rtl="0" algn="l">
+              <a:lnSpc>
+                <a:spcPct val="140035"/>
+              </a:lnSpc>
+              <a:spcBef>
+                <a:spcPts val="0"/>
+              </a:spcBef>
+              <a:spcAft>
+                <a:spcPts val="0"/>
+              </a:spcAft>
+              <a:buNone/>
             </a:pPr>
             <a:r>
-              <a:t>Team Member 4 | First Year Engineering (FE)</a:t>
+              <a:rPr b="1" i="0" lang="en-US" sz="3427" u="none" cap="none" strike="noStrike">
+                <a:solidFill>
+                  <a:srgbClr val="000000"/>
+                </a:solidFill>
+                <a:latin typeface="IBM Plex Mono"/>
+                <a:ea typeface="IBM Plex Mono"/>
+                <a:cs typeface="IBM Plex Mono"/>
+                <a:sym typeface="IBM Plex Mono"/>
+              </a:rPr>
+              <a:t>TEAM MEMBER 4</a:t>
             </a:r>
+            <a:endParaRPr/>
           </a:p>
         </p:txBody>
       </p:sp>
@@ -11780,8 +11750,8 @@
         </p:nvSpPr>
         <p:spPr>
           <a:xfrm>
-            <a:off x="1294033" y="2070920"/>
-            <a:ext cx="15699934" cy="3580765"/>
+            <a:off x="545138" y="1752917"/>
+            <a:ext cx="8133300" cy="7150000"/>
           </a:xfrm>
           <a:prstGeom prst="rect">
             <a:avLst/>
@@ -11797,26 +11767,6 @@
           </a:bodyPr>
           <a:lstStyle/>
           <a:p>
-            <a:pPr indent="-367030" lvl="1" marL="734059" marR="0" rtl="0" algn="l">
-              <a:lnSpc>
-                <a:spcPct val="140011"/>
-              </a:lnSpc>
-              <a:spcBef>
-                <a:spcPts val="0"/>
-              </a:spcBef>
-              <a:spcAft>
-                <a:spcPts val="0"/>
-              </a:spcAft>
-              <a:buClr>
-                <a:srgbClr val="000000"/>
-              </a:buClr>
-              <a:buSzPts val="3399"/>
-              <a:buFont typeface="Arial"/>
-              <a:buChar char="•"/>
-            </a:pPr>
-            <a:endParaRPr/>
-          </a:p>
-          <a:p>
             <a:pPr indent="0" lvl="0" marL="0" marR="0" rtl="0" algn="l">
               <a:lnSpc>
                 <a:spcPct val="140011"/>
@@ -11825,59 +11775,189 @@
                 <a:spcPts val="0"/>
               </a:spcBef>
               <a:spcAft>
-                <a:spcPts val="0"/>
-              </a:spcAft>
-              <a:buNone/>
+                <a:spcPts val="600"/>
+              </a:spcAft>
+              <a:buNone/>
+              <a:defRPr sz="2200" b="1">
+                <a:solidFill>
+                  <a:srgbClr val="111827"/>
+                </a:solidFill>
+                <a:latin typeface="Libre Baskerville"/>
+              </a:defRPr>
             </a:pPr>
-            <a:endParaRPr b="0" i="0" sz="3399" u="none" cap="none" strike="noStrike">
-              <a:solidFill>
-                <a:srgbClr val="000000"/>
-              </a:solidFill>
-              <a:latin typeface="Libre Baskerville"/>
-              <a:ea typeface="Libre Baskerville"/>
-              <a:cs typeface="Libre Baskerville"/>
-              <a:sym typeface="Libre Baskerville"/>
-            </a:endParaRPr>
-          </a:p>
-          <a:p>
-            <a:pPr indent="-367030" lvl="1" marL="734059" marR="0" rtl="0" algn="l">
-              <a:lnSpc>
-                <a:spcPct val="140011"/>
-              </a:lnSpc>
-              <a:spcBef>
-                <a:spcPts val="0"/>
-              </a:spcBef>
-              <a:spcAft>
-                <a:spcPts val="0"/>
-              </a:spcAft>
-              <a:buClr>
-                <a:srgbClr val="000000"/>
-              </a:buClr>
-              <a:buSzPts val="3399"/>
-              <a:buFont typeface="Arial"/>
-              <a:buChar char="•"/>
-            </a:pPr>
+            <a:r>
+              <a:t>Problem</a:t>
+            </a:r>
             <a:endParaRPr/>
           </a:p>
           <a:p>
-            <a:pPr indent="-367030" lvl="1" marL="734059" marR="0" rtl="0" algn="l">
-              <a:lnSpc>
-                <a:spcPct val="140011"/>
-              </a:lnSpc>
-              <a:spcBef>
-                <a:spcPts val="0"/>
-              </a:spcBef>
-              <a:spcAft>
-                <a:spcPts val="0"/>
-              </a:spcAft>
-              <a:buClr>
-                <a:srgbClr val="000000"/>
-              </a:buClr>
-              <a:buSzPts val="3399"/>
-              <a:buFont typeface="Arial"/>
-              <a:buChar char="•"/>
+            <a:pPr lvl="1">
+              <a:spcAft>
+                <a:spcPts val="400"/>
+              </a:spcAft>
             </a:pPr>
-            <a:endParaRPr/>
+            <a:r>
+              <a:rPr sz="1400" b="1">
+                <a:solidFill>
+                  <a:srgbClr val="111827"/>
+                </a:solidFill>
+                <a:latin typeface="Libre Baskerville"/>
+              </a:rPr>
+              <a:t>Fragmented Daily Routine: </a:t>
+            </a:r>
+            <a:r>
+              <a:rPr sz="1300" b="0">
+                <a:solidFill>
+                  <a:srgbClr val="374151"/>
+                </a:solidFill>
+                <a:latin typeface="Libre Baskerville"/>
+              </a:rPr>
+              <a:t>Academics, timetables, ride-sharing, club events, and peer help are scattered across unorganized WhatsApp groups, physical notice boards, and word-of-mouth.</a:t>
+            </a:r>
+          </a:p>
+          <a:p>
+            <a:pPr lvl="1">
+              <a:spcAft>
+                <a:spcPts val="400"/>
+              </a:spcAft>
+            </a:pPr>
+            <a:r>
+              <a:rPr sz="1400" b="1">
+                <a:solidFill>
+                  <a:srgbClr val="111827"/>
+                </a:solidFill>
+                <a:latin typeface="Libre Baskerville"/>
+              </a:rPr>
+              <a:t>Who Faces This: </a:t>
+            </a:r>
+            <a:r>
+              <a:rPr sz="1300" b="0">
+                <a:solidFill>
+                  <a:srgbClr val="374151"/>
+                </a:solidFill>
+                <a:latin typeface="Libre Baskerville"/>
+              </a:rPr>
+              <a:t>600+ first-year engineering students across 12 divisions transitioning into college without a unified platform.</a:t>
+            </a:r>
+          </a:p>
+          <a:p>
+            <a:pPr lvl="1">
+              <a:spcAft>
+                <a:spcPts val="400"/>
+              </a:spcAft>
+            </a:pPr>
+            <a:r>
+              <a:rPr sz="1400" b="1">
+                <a:solidFill>
+                  <a:srgbClr val="111827"/>
+                </a:solidFill>
+                <a:latin typeface="Libre Baskerville"/>
+              </a:rPr>
+              <a:t>Why Difficult Currently: </a:t>
+            </a:r>
+            <a:r>
+              <a:rPr sz="1300" b="0">
+                <a:solidFill>
+                  <a:srgbClr val="374151"/>
+                </a:solidFill>
+                <a:latin typeface="Libre Baskerville"/>
+              </a:rPr>
+              <a:t>Existing tools are disconnected silos—calculators only work after marks arrive, event pages lack live states, and finding verified peer tutors is ad-hoc.</a:t>
+            </a:r>
+          </a:p>
+          <a:p>
+            <a:pPr>
+              <a:spcBef>
+                <a:spcPts val="1400"/>
+              </a:spcBef>
+              <a:spcAft>
+                <a:spcPts val="600"/>
+              </a:spcAft>
+              <a:defRPr sz="2200" b="1">
+                <a:solidFill>
+                  <a:srgbClr val="111827"/>
+                </a:solidFill>
+                <a:latin typeface="Libre Baskerville"/>
+              </a:defRPr>
+            </a:pPr>
+            <a:r>
+              <a:t>Our Solution</a:t>
+            </a:r>
+          </a:p>
+          <a:p>
+            <a:pPr lvl="1">
+              <a:spcAft>
+                <a:spcPts val="400"/>
+              </a:spcAft>
+            </a:pPr>
+            <a:r>
+              <a:rPr sz="1400" b="1">
+                <a:solidFill>
+                  <a:srgbClr val="111827"/>
+                </a:solidFill>
+                <a:latin typeface="Libre Baskerville"/>
+              </a:rPr>
+              <a:t>Unified Campus Companion (Campus360): </a:t>
+            </a:r>
+            <a:r>
+              <a:rPr sz="1300" b="0">
+                <a:solidFill>
+                  <a:srgbClr val="374151"/>
+                </a:solidFill>
+                <a:latin typeface="Libre Baskerville"/>
+              </a:rPr>
+              <a:t>A single responsive platform solving academic tracking, daily commute, peer-learning, and campus help in one flow.</a:t>
+            </a:r>
+          </a:p>
+          <a:p>
+            <a:pPr lvl="1">
+              <a:spcAft>
+                <a:spcPts val="400"/>
+              </a:spcAft>
+            </a:pPr>
+            <a:r>
+              <a:rPr sz="1400" b="1">
+                <a:solidFill>
+                  <a:srgbClr val="111827"/>
+                </a:solidFill>
+                <a:latin typeface="Libre Baskerville"/>
+              </a:rPr>
+              <a:t>User Inputs: </a:t>
+            </a:r>
+            <a:r>
+              <a:rPr sz="1300" b="0">
+                <a:solidFill>
+                  <a:srgbClr val="374151"/>
+                </a:solidFill>
+                <a:latin typeface="Libre Baskerville"/>
+              </a:rPr>
+              <a:t>Branch &amp; Division (D1ADA to D5C), target SGPA, skills offered/needed, and ride source/destination.</a:t>
+            </a:r>
+          </a:p>
+          <a:p>
+            <a:pPr lvl="1">
+              <a:spcAft>
+                <a:spcPts val="400"/>
+              </a:spcAft>
+            </a:pPr>
+            <a:r>
+              <a:rPr sz="1400" b="1">
+                <a:solidFill>
+                  <a:srgbClr val="111827"/>
+                </a:solidFill>
+                <a:latin typeface="Libre Baskerville"/>
+              </a:rPr>
+              <a:t>Processing &amp; Outputs: </a:t>
+            </a:r>
+            <a:r>
+              <a:rPr sz="1300" b="0">
+                <a:solidFill>
+                  <a:srgbClr val="374151"/>
+                </a:solidFill>
+                <a:latin typeface="Libre Baskerville"/>
+              </a:rPr>
+              <a:t>Generates live Mon–Fri division timetables, what-if SGPA needed-marks tables, verified Leaflet carpools, and peer time-bank exchanges.</a:t>
+            </a:r>
           </a:p>
         </p:txBody>
       </p:sp>
@@ -11927,7 +12007,7 @@
               </a:pathLst>
             </a:custGeom>
             <a:solidFill>
-              <a:srgbClr val="9F2F24"/>
+              <a:srgbClr val="21436F"/>
             </a:solidFill>
             <a:ln>
               <a:noFill/>
@@ -12190,108 +12270,6 @@
       <p:sp>
         <p:nvSpPr>
           <p:cNvPr id="116" name="Google Shape;116;p14"/>
-          <p:cNvSpPr/>
-          <p:nvPr/>
-        </p:nvSpPr>
-        <p:spPr>
-          <a:xfrm>
-            <a:off x="16367044" y="118562"/>
-            <a:ext cx="2229573" cy="1254135"/>
-          </a:xfrm>
-          <a:custGeom>
-            <a:rect b="b" l="l" r="r" t="t"/>
-            <a:pathLst>
-              <a:path extrusionOk="0" h="1254135" w="2229573">
-                <a:moveTo>
-                  <a:pt x="0" y="0"/>
-                </a:moveTo>
-                <a:lnTo>
-                  <a:pt x="2229573" y="0"/>
-                </a:lnTo>
-                <a:lnTo>
-                  <a:pt x="2229573" y="1254135"/>
-                </a:lnTo>
-                <a:lnTo>
-                  <a:pt x="0" y="1254135"/>
-                </a:lnTo>
-                <a:lnTo>
-                  <a:pt x="0" y="0"/>
-                </a:lnTo>
-                <a:close/>
-              </a:path>
-            </a:pathLst>
-          </a:custGeom>
-          <a:blipFill rotWithShape="1">
-            <a:blip r:embed="rId4">
-              <a:alphaModFix/>
-            </a:blip>
-            <a:stretch>
-              <a:fillRect b="0" l="0" r="0" t="0"/>
-            </a:stretch>
-          </a:blipFill>
-          <a:ln>
-            <a:noFill/>
-          </a:ln>
-        </p:spPr>
-        <p:txBody>
-          <a:bodyPr/>
-          <a:p/>
-        </p:txBody>
-      </p:sp>
-      <p:sp>
-        <p:nvSpPr>
-          <p:cNvPr id="117" name="Google Shape;117;p14"/>
-          <p:cNvSpPr/>
-          <p:nvPr/>
-        </p:nvSpPr>
-        <p:spPr>
-          <a:xfrm>
-            <a:off x="2601885" y="1463560"/>
-            <a:ext cx="13084230" cy="7359879"/>
-          </a:xfrm>
-          <a:custGeom>
-            <a:rect b="b" l="l" r="r" t="t"/>
-            <a:pathLst>
-              <a:path extrusionOk="0" h="7359879" w="13084230">
-                <a:moveTo>
-                  <a:pt x="0" y="0"/>
-                </a:moveTo>
-                <a:lnTo>
-                  <a:pt x="13084230" y="0"/>
-                </a:lnTo>
-                <a:lnTo>
-                  <a:pt x="13084230" y="7359880"/>
-                </a:lnTo>
-                <a:lnTo>
-                  <a:pt x="0" y="7359880"/>
-                </a:lnTo>
-                <a:lnTo>
-                  <a:pt x="0" y="0"/>
-                </a:lnTo>
-                <a:close/>
-              </a:path>
-            </a:pathLst>
-          </a:custGeom>
-          <a:blipFill rotWithShape="1">
-            <a:blip r:embed="rId5">
-              <a:alphaModFix amt="5000"/>
-            </a:blip>
-            <a:stretch>
-              <a:fillRect b="0" l="0" r="0" t="0"/>
-            </a:stretch>
-          </a:blipFill>
-          <a:ln>
-            <a:noFill/>
-          </a:ln>
-        </p:spPr>
-        <p:txBody>
-          <a:bodyPr/>
-          <a:p/>
-        </p:txBody>
-      </p:sp>
-      <p:sp>
-        <p:nvSpPr>
-          <p:cNvPr id="118" name="Google Shape;118;p14"/>
           <p:cNvSpPr txBox="1"/>
           <p:nvPr/>
         </p:nvSpPr>
@@ -12344,634 +12322,366 @@
       </p:sp>
       <p:sp>
         <p:nvSpPr>
-          <p:cNvPr id="119" name="Rounded Rectangle 118"/>
-          <p:cNvSpPr/>
+          <p:cNvPr id="117" name="Google Shape;117;p14"/>
+          <p:cNvSpPr txBox="1"/>
           <p:nvPr/>
         </p:nvSpPr>
         <p:spPr>
           <a:xfrm>
-            <a:off x="914400" y="1691640"/>
-            <a:ext cx="5120640" cy="6492240"/>
+            <a:off x="9679726" y="1817053"/>
+            <a:ext cx="8133232" cy="7150000"/>
           </a:xfrm>
-          <a:prstGeom prst="roundRect">
+          <a:prstGeom prst="rect">
             <a:avLst/>
           </a:prstGeom>
-          <a:solidFill>
-            <a:srgbClr val="FFF1F2"/>
-          </a:solidFill>
-          <a:ln w="19050">
-            <a:solidFill>
-              <a:srgbClr val="FECDD3"/>
-            </a:solidFill>
+          <a:noFill/>
+          <a:ln>
+            <a:noFill/>
           </a:ln>
         </p:spPr>
-        <p:style>
-          <a:lnRef idx="1">
-            <a:schemeClr val="accent1"/>
-          </a:lnRef>
-          <a:fillRef idx="3">
-            <a:schemeClr val="accent1"/>
-          </a:fillRef>
-          <a:effectRef idx="2">
-            <a:schemeClr val="accent1"/>
-          </a:effectRef>
-          <a:fontRef idx="minor">
-            <a:schemeClr val="lt1"/>
-          </a:fontRef>
-        </p:style>
         <p:txBody>
-          <a:bodyPr rtlCol="0" anchor="ctr" wrap="square" lIns="182880" rIns="182880" tIns="164592" bIns="164592"/>
+          <a:bodyPr anchorCtr="0" anchor="t" bIns="0" lIns="0" spcFirstLastPara="1" rIns="0" wrap="square" tIns="0">
+            <a:spAutoFit/>
+          </a:bodyPr>
           <a:lstStyle/>
           <a:p>
-            <a:pPr algn="ctr"/>
-          </a:p>
-          <a:p>
-            <a:pPr>
-              <a:spcAft>
-                <a:spcPts val="800"/>
-              </a:spcAft>
-              <a:defRPr sz="1500" b="1">
-                <a:solidFill>
-                  <a:srgbClr val="BE123C"/>
-                </a:solidFill>
-                <a:latin typeface="IBM Plex Mono"/>
+            <a:pPr indent="0" lvl="0" marL="0" marR="0" rtl="0" algn="l">
+              <a:lnSpc>
+                <a:spcPct val="140011"/>
+              </a:lnSpc>
+              <a:spcBef>
+                <a:spcPts val="0"/>
+              </a:spcBef>
+              <a:spcAft>
+                <a:spcPts val="600"/>
+              </a:spcAft>
+              <a:buNone/>
+              <a:defRPr sz="2200" b="1">
+                <a:solidFill>
+                  <a:srgbClr val="111827"/>
+                </a:solidFill>
+                <a:latin typeface="Libre Baskerville"/>
               </a:defRPr>
             </a:pPr>
             <a:r>
-              <a:t>PROBLEM DEFINITION</a:t>
+              <a:t>Key Features</a:t>
+            </a:r>
+            <a:endParaRPr/>
+          </a:p>
+          <a:p>
+            <a:pPr lvl="1">
+              <a:spcAft>
+                <a:spcPts val="400"/>
+              </a:spcAft>
+            </a:pPr>
+            <a:r>
+              <a:rPr sz="1400" b="1">
+                <a:solidFill>
+                  <a:srgbClr val="111827"/>
+                </a:solidFill>
+                <a:latin typeface="Libre Baskerville"/>
+              </a:rPr>
+              <a:t>Division-Bound Smart Timetable: </a:t>
+            </a:r>
+            <a:r>
+              <a:rPr sz="1300" b="0">
+                <a:solidFill>
+                  <a:srgbClr val="374151"/>
+                </a:solidFill>
+                <a:latin typeface="Libre Baskerville"/>
+              </a:rPr>
+              <a:t>Live schedule bound to official VESIT divisions (D1ADA–D5C) with faculty abbreviations &amp; room info.</a:t>
+            </a:r>
+          </a:p>
+          <a:p>
+            <a:pPr lvl="1">
+              <a:spcAft>
+                <a:spcPts val="400"/>
+              </a:spcAft>
+            </a:pPr>
+            <a:r>
+              <a:rPr sz="1400" b="1">
+                <a:solidFill>
+                  <a:srgbClr val="111827"/>
+                </a:solidFill>
+                <a:latin typeface="Libre Baskerville"/>
+              </a:rPr>
+              <a:t>What-If SGPA Academic Planner: </a:t>
+            </a:r>
+            <a:r>
+              <a:rPr sz="1300" b="0">
+                <a:solidFill>
+                  <a:srgbClr val="374151"/>
+                </a:solidFill>
+                <a:latin typeface="Libre Baskerville"/>
+              </a:rPr>
+              <a:t>Dynamic grade lockout engine calculating exact end-sem marks needed to reach target SGPA.</a:t>
+            </a:r>
+          </a:p>
+          <a:p>
+            <a:pPr lvl="1">
+              <a:spcAft>
+                <a:spcPts val="400"/>
+              </a:spcAft>
+            </a:pPr>
+            <a:r>
+              <a:rPr sz="1400" b="1">
+                <a:solidFill>
+                  <a:srgbClr val="111827"/>
+                </a:solidFill>
+                <a:latin typeface="Libre Baskerville"/>
+              </a:rPr>
+              <a:t>Leaflet Student Carpooling: </a:t>
+            </a:r>
+            <a:r>
+              <a:rPr sz="1300" b="0">
+                <a:solidFill>
+                  <a:srgbClr val="374151"/>
+                </a:solidFill>
+                <a:latin typeface="Libre Baskerville"/>
+              </a:rPr>
+              <a:t>Interactive campus map with seat booking state machine (Available, Requested, Confirmed).</a:t>
+            </a:r>
+          </a:p>
+          <a:p>
+            <a:pPr lvl="1">
+              <a:spcAft>
+                <a:spcPts val="400"/>
+              </a:spcAft>
+            </a:pPr>
+            <a:r>
+              <a:rPr sz="1400" b="1">
+                <a:solidFill>
+                  <a:srgbClr val="111827"/>
+                </a:solidFill>
+                <a:latin typeface="Libre Baskerville"/>
+              </a:rPr>
+              <a:t>1:1 Time-Bank Peer Learning: </a:t>
+            </a:r>
+            <a:r>
+              <a:rPr sz="1300" b="0">
+                <a:solidFill>
+                  <a:srgbClr val="374151"/>
+                </a:solidFill>
+                <a:latin typeface="Libre Baskerville"/>
+              </a:rPr>
+              <a:t>Fair credit economy (Teach 1 hr = +1 credit, Learn 1 hr = -1 credit) fostering active collaboration.</a:t>
+            </a:r>
+          </a:p>
+          <a:p>
+            <a:pPr lvl="1">
+              <a:spcAft>
+                <a:spcPts val="400"/>
+              </a:spcAft>
+            </a:pPr>
+            <a:r>
+              <a:rPr sz="1400" b="1">
+                <a:solidFill>
+                  <a:srgbClr val="111827"/>
+                </a:solidFill>
+                <a:latin typeface="Libre Baskerville"/>
+              </a:rPr>
+              <a:t>Inter-Class Quest Leaderboard: </a:t>
+            </a:r>
+            <a:r>
+              <a:rPr sz="1300" b="0">
+                <a:solidFill>
+                  <a:srgbClr val="374151"/>
+                </a:solidFill>
+                <a:latin typeface="Libre Baskerville"/>
+              </a:rPr>
+              <a:t>Gamified challenge board driving friendly competition across college divisions.</a:t>
             </a:r>
           </a:p>
           <a:p>
             <a:pPr>
-              <a:spcAft>
-                <a:spcPts val="800"/>
-              </a:spcAft>
-              <a:defRPr sz="1100" b="1">
-                <a:solidFill>
-                  <a:srgbClr val="0F172A"/>
-                </a:solidFill>
-                <a:latin typeface="Arial"/>
+              <a:spcBef>
+                <a:spcPts val="1400"/>
+              </a:spcBef>
+              <a:spcAft>
+                <a:spcPts val="600"/>
+              </a:spcAft>
+              <a:defRPr sz="2000" b="1">
+                <a:solidFill>
+                  <a:srgbClr val="111827"/>
+                </a:solidFill>
+                <a:latin typeface="Libre Baskerville"/>
               </a:defRPr>
             </a:pPr>
             <a:r>
-              <a:t>Freshers face 3 critical transition hurdles in autonomous college life:</a:t>
+              <a:t>What Makes It Different from existing solution?</a:t>
             </a:r>
           </a:p>
           <a:p>
-            <a:pPr>
-              <a:spcAft>
-                <a:spcPts val="200"/>
-              </a:spcAft>
-              <a:defRPr sz="1200" b="1">
-                <a:solidFill>
-                  <a:srgbClr val="BE123C"/>
-                </a:solidFill>
-                <a:latin typeface="Arial"/>
-              </a:defRPr>
+            <a:pPr lvl="1">
+              <a:spcAft>
+                <a:spcPts val="400"/>
+              </a:spcAft>
             </a:pPr>
             <a:r>
-              <a:t>1. Academic Confusion &amp; Blindspots</a:t>
+              <a:rPr sz="1400" b="1">
+                <a:solidFill>
+                  <a:srgbClr val="111827"/>
+                </a:solidFill>
+                <a:latin typeface="Libre Baskerville"/>
+              </a:rPr>
+              <a:t>All-in-One Interconnected Ecosystem: </a:t>
+            </a:r>
+            <a:r>
+              <a:rPr sz="1300" b="0">
+                <a:solidFill>
+                  <a:srgbClr val="374151"/>
+                </a:solidFill>
+                <a:latin typeface="Libre Baskerville"/>
+              </a:rPr>
+              <a:t>Modules feed into each other (timetable alerts prompt peer study; planner drives skill requests).</a:t>
             </a:r>
           </a:p>
           <a:p>
-            <a:pPr>
-              <a:spcAft>
-                <a:spcPts val="800"/>
-              </a:spcAft>
-              <a:defRPr sz="1050" b="0">
-                <a:solidFill>
-                  <a:srgbClr val="334155"/>
-                </a:solidFill>
-                <a:latin typeface="Arial"/>
-              </a:defRPr>
+            <a:pPr lvl="1">
+              <a:spcAft>
+                <a:spcPts val="400"/>
+              </a:spcAft>
             </a:pPr>
             <a:r>
-              <a:t>• Mumbai University autonomous 10-point credit scheme is confusing. Students struggle to balance internal marks (out of 40/25) vs end-sem requirements (out of 60/75), realizing too late when grades are mathematically locked.</a:t>
+              <a:rPr sz="1400" b="1">
+                <a:solidFill>
+                  <a:srgbClr val="111827"/>
+                </a:solidFill>
+                <a:latin typeface="Libre Baskerville"/>
+              </a:rPr>
+              <a:t>Zero Learning Curve &amp; High Utility: </a:t>
+            </a:r>
+            <a:r>
+              <a:rPr sz="1300" b="0">
+                <a:solidFill>
+                  <a:srgbClr val="374151"/>
+                </a:solidFill>
+                <a:latin typeface="Libre Baskerville"/>
+              </a:rPr>
+              <a:t>Tailored to Mumbai University / VESIT autonomous rules, passing minimums, and division codes.</a:t>
             </a:r>
           </a:p>
           <a:p>
-            <a:pPr>
-              <a:spcAft>
-                <a:spcPts val="200"/>
-              </a:spcAft>
-              <a:defRPr sz="1200" b="1">
-                <a:solidFill>
-                  <a:srgbClr val="BE123C"/>
-                </a:solidFill>
-                <a:latin typeface="Arial"/>
-              </a:defRPr>
+            <a:pPr lvl="1">
+              <a:spcAft>
+                <a:spcPts val="400"/>
+              </a:spcAft>
             </a:pPr>
             <a:r>
-              <a:t>2. Campus Disorientation &amp; Siloed Life</a:t>
+              <a:rPr sz="1400" b="1">
+                <a:solidFill>
+                  <a:srgbClr val="111827"/>
+                </a:solidFill>
+                <a:latin typeface="Libre Baskerville"/>
+              </a:rPr>
+              <a:t>Fosters Real Community: </a:t>
             </a:r>
-          </a:p>
-          <a:p>
-            <a:pPr>
-              <a:spcAft>
-                <a:spcPts val="800"/>
-              </a:spcAft>
-              <a:defRPr sz="1050" b="0">
-                <a:solidFill>
-                  <a:srgbClr val="334155"/>
-                </a:solidFill>
-                <a:latin typeface="Arial"/>
-              </a:defRPr>
-            </a:pPr>
             <a:r>
-              <a:t>• 12 different division schedules across multiple floors/wings, unfamiliar faculty, room switches (B22, 523, 405), and lack of senior academic mentorship.</a:t>
-            </a:r>
-          </a:p>
-          <a:p>
-            <a:pPr>
-              <a:spcAft>
-                <a:spcPts val="200"/>
-              </a:spcAft>
-              <a:defRPr sz="1200" b="1">
-                <a:solidFill>
-                  <a:srgbClr val="BE123C"/>
-                </a:solidFill>
-                <a:latin typeface="Arial"/>
-              </a:defRPr>
-            </a:pPr>
-            <a:r>
-              <a:t>3. Commute Stress &amp; Fragmented Tools</a:t>
-            </a:r>
-          </a:p>
-          <a:p>
-            <a:pPr>
-              <a:spcAft>
-                <a:spcPts val="800"/>
-              </a:spcAft>
-              <a:defRPr sz="1050" b="0">
-                <a:solidFill>
-                  <a:srgbClr val="334155"/>
-                </a:solidFill>
-                <a:latin typeface="Arial"/>
-              </a:defRPr>
-            </a:pPr>
-            <a:r>
-              <a:t>• Exhausting auto lines from Chembur/Kurla stations, absence of verified peer carpooling, and critical campus updates buried in chaotic WhatsApp groups.</a:t>
-            </a:r>
-          </a:p>
-          <a:p>
-            <a:pPr>
-              <a:spcAft>
-                <a:spcPts val="200"/>
-              </a:spcAft>
-              <a:defRPr sz="1100" b="1">
-                <a:solidFill>
-                  <a:srgbClr val="0F172A"/>
-                </a:solidFill>
-                <a:latin typeface="Arial"/>
-              </a:defRPr>
-            </a:pPr>
-            <a:r>
-              <a:t>Target Beneficiaries:</a:t>
-            </a:r>
-          </a:p>
-          <a:p>
-            <a:pPr>
-              <a:spcAft>
-                <a:spcPts val="200"/>
-              </a:spcAft>
-              <a:defRPr sz="1000" b="0">
-                <a:solidFill>
-                  <a:srgbClr val="64748B"/>
-                </a:solidFill>
-                <a:latin typeface="Arial"/>
-              </a:defRPr>
-            </a:pPr>
-            <a:r>
-              <a:t>First-Year Students (FE) as primary users; Seniors (SE/TE/BE) as verified tutors &amp; carpool hosts; Faculty &amp; Class Representatives as challenge moderators.</a:t>
+              <a:rPr sz="1300" b="0">
+                <a:solidFill>
+                  <a:srgbClr val="374151"/>
+                </a:solidFill>
+                <a:latin typeface="Libre Baskerville"/>
+              </a:rPr>
+              <a:t>Replaces passive broadcast groups with reciprocal ride-sharing, time-banking, and class challenges.</a:t>
             </a:r>
           </a:p>
         </p:txBody>
       </p:sp>
       <p:sp>
         <p:nvSpPr>
-          <p:cNvPr id="120" name="Rounded Rectangle 119"/>
+          <p:cNvPr id="118" name="Google Shape;118;p14"/>
           <p:cNvSpPr/>
           <p:nvPr/>
         </p:nvSpPr>
         <p:spPr>
           <a:xfrm>
-            <a:off x="6217920" y="1691640"/>
-            <a:ext cx="5394960" cy="6492240"/>
+            <a:off x="16793950" y="135950"/>
+            <a:ext cx="1259674" cy="1259478"/>
           </a:xfrm>
-          <a:prstGeom prst="roundRect">
-            <a:avLst/>
-          </a:prstGeom>
-          <a:solidFill>
-            <a:srgbClr val="FFFFFF"/>
-          </a:solidFill>
-          <a:ln w="19050">
-            <a:solidFill>
-              <a:srgbClr val="C7D2FE"/>
-            </a:solidFill>
+          <a:custGeom>
+            <a:rect b="b" l="l" r="r" t="t"/>
+            <a:pathLst>
+              <a:path extrusionOk="0" h="1259478" w="1259674">
+                <a:moveTo>
+                  <a:pt x="0" y="0"/>
+                </a:moveTo>
+                <a:lnTo>
+                  <a:pt x="1259674" y="0"/>
+                </a:lnTo>
+                <a:lnTo>
+                  <a:pt x="1259674" y="1259478"/>
+                </a:lnTo>
+                <a:lnTo>
+                  <a:pt x="0" y="1259478"/>
+                </a:lnTo>
+                <a:lnTo>
+                  <a:pt x="0" y="0"/>
+                </a:lnTo>
+                <a:close/>
+              </a:path>
+            </a:pathLst>
+          </a:custGeom>
+          <a:blipFill rotWithShape="1">
+            <a:blip r:embed="rId4">
+              <a:alphaModFix/>
+            </a:blip>
+            <a:stretch>
+              <a:fillRect b="0" l="0" r="-90299" t="-5830"/>
+            </a:stretch>
+          </a:blipFill>
+          <a:ln>
+            <a:noFill/>
           </a:ln>
         </p:spPr>
-        <p:style>
-          <a:lnRef idx="1">
-            <a:schemeClr val="accent1"/>
-          </a:lnRef>
-          <a:fillRef idx="3">
-            <a:schemeClr val="accent1"/>
-          </a:fillRef>
-          <a:effectRef idx="2">
-            <a:schemeClr val="accent1"/>
-          </a:effectRef>
-          <a:fontRef idx="minor">
-            <a:schemeClr val="lt1"/>
-          </a:fontRef>
-        </p:style>
-        <p:txBody>
-          <a:bodyPr rtlCol="0" anchor="ctr" wrap="square" lIns="182880" rIns="182880" tIns="164592" bIns="164592"/>
-          <a:lstStyle/>
-          <a:p>
-            <a:pPr algn="ctr"/>
-          </a:p>
-          <a:p>
-            <a:pPr>
-              <a:spcAft>
-                <a:spcPts val="800"/>
-              </a:spcAft>
-              <a:defRPr sz="1500" b="1">
-                <a:solidFill>
-                  <a:srgbClr val="4338CA"/>
-                </a:solidFill>
-                <a:latin typeface="IBM Plex Mono"/>
-              </a:defRPr>
-            </a:pPr>
-            <a:r>
-              <a:t>PROPOSED SOLUTION: CAMPUS 360</a:t>
-            </a:r>
-          </a:p>
-          <a:p>
-            <a:pPr>
-              <a:spcAft>
-                <a:spcPts val="800"/>
-              </a:spcAft>
-              <a:defRPr sz="1100" b="1">
-                <a:solidFill>
-                  <a:srgbClr val="0F172A"/>
-                </a:solidFill>
-                <a:latin typeface="Arial"/>
-              </a:defRPr>
-            </a:pPr>
-            <a:r>
-              <a:t>A unified, intelligent web companion built specifically for First-Year engineering students:</a:t>
-            </a:r>
-          </a:p>
-          <a:p>
-            <a:pPr>
-              <a:spcAft>
-                <a:spcPts val="200"/>
-              </a:spcAft>
-              <a:defRPr sz="1200" b="1">
-                <a:solidFill>
-                  <a:srgbClr val="4338CA"/>
-                </a:solidFill>
-                <a:latin typeface="Arial"/>
-              </a:defRPr>
-            </a:pPr>
-            <a:r>
-              <a:t>• Unified 8-in-1 Daily Ecosystem</a:t>
-            </a:r>
-          </a:p>
-          <a:p>
-            <a:pPr>
-              <a:spcAft>
-                <a:spcPts val="800"/>
-              </a:spcAft>
-              <a:defRPr sz="1050" b="0">
-                <a:solidFill>
-                  <a:srgbClr val="334155"/>
-                </a:solidFill>
-                <a:latin typeface="Arial"/>
-              </a:defRPr>
-            </a:pPr>
-            <a:r>
-              <a:t>Eliminates scattered tools by uniting Academic Math, Dynamic Timetable, Carpooling, Peer Barter, Leaderboard, Directory, Events, and Phone Auth under one responsive dashboard.</a:t>
-            </a:r>
-          </a:p>
-          <a:p>
-            <a:pPr>
-              <a:spcAft>
-                <a:spcPts val="200"/>
-              </a:spcAft>
-              <a:defRPr sz="1200" b="1">
-                <a:solidFill>
-                  <a:srgbClr val="4338CA"/>
-                </a:solidFill>
-                <a:latin typeface="Arial"/>
-              </a:defRPr>
-            </a:pPr>
-            <a:r>
-              <a:t>• Proactive Cross-Module Intelligence</a:t>
-            </a:r>
-          </a:p>
-          <a:p>
-            <a:pPr>
-              <a:spcAft>
-                <a:spcPts val="800"/>
-              </a:spcAft>
-              <a:defRPr sz="1050" b="0">
-                <a:solidFill>
-                  <a:srgbClr val="334155"/>
-                </a:solidFill>
-                <a:latin typeface="Arial"/>
-              </a:defRPr>
-            </a:pPr>
-            <a:r>
-              <a:t>Modules talk to each other: an academic alert in Mechanics automatically suggests booking an available senior peer tutor; commuter alerts match station carpools.</a:t>
-            </a:r>
-          </a:p>
-          <a:p>
-            <a:pPr>
-              <a:spcAft>
-                <a:spcPts val="200"/>
-              </a:spcAft>
-              <a:defRPr sz="1200" b="1">
-                <a:solidFill>
-                  <a:srgbClr val="4338CA"/>
-                </a:solidFill>
-                <a:latin typeface="Arial"/>
-              </a:defRPr>
-            </a:pPr>
-            <a:r>
-              <a:t>• Built on Real College Data</a:t>
-            </a:r>
-          </a:p>
-          <a:p>
-            <a:pPr>
-              <a:spcAft>
-                <a:spcPts val="800"/>
-              </a:spcAft>
-              <a:defRPr sz="1050" b="0">
-                <a:solidFill>
-                  <a:srgbClr val="334155"/>
-                </a:solidFill>
-                <a:latin typeface="Arial"/>
-              </a:defRPr>
-            </a:pPr>
-            <a:r>
-              <a:t>Pre-loaded with official VESIT 2026-27 Semester 1 division allotments, classroom rooms (B22, 524, 518), and faculty directory (Dr. Ravi Shankar, Mrs. Nusrat, etc.).</a:t>
-            </a:r>
-          </a:p>
-          <a:p>
-            <a:pPr>
-              <a:spcAft>
-                <a:spcPts val="200"/>
-              </a:spcAft>
-              <a:defRPr sz="1200" b="1">
-                <a:solidFill>
-                  <a:srgbClr val="4338CA"/>
-                </a:solidFill>
-                <a:latin typeface="Arial"/>
-              </a:defRPr>
-            </a:pPr>
-            <a:r>
-              <a:t>• Inclusive Cross-Year Continuity</a:t>
-            </a:r>
-          </a:p>
-          <a:p>
-            <a:pPr>
-              <a:spcAft>
-                <a:spcPts val="200"/>
-              </a:spcAft>
-              <a:defRPr sz="1050" b="0">
-                <a:solidFill>
-                  <a:srgbClr val="334155"/>
-                </a:solidFill>
-                <a:latin typeface="Arial"/>
-              </a:defRPr>
-            </a:pPr>
-            <a:r>
-              <a:t>Supports FE freshers and SE/TE/BE senior mentors, ensuring long-term utility across all 4 engineering years.</a:t>
-            </a:r>
-          </a:p>
-        </p:txBody>
       </p:sp>
       <p:sp>
         <p:nvSpPr>
-          <p:cNvPr id="121" name="Rounded Rectangle 120"/>
+          <p:cNvPr id="119" name="Google Shape;119;p14"/>
           <p:cNvSpPr/>
           <p:nvPr/>
         </p:nvSpPr>
         <p:spPr>
           <a:xfrm>
-            <a:off x="11795760" y="1691640"/>
-            <a:ext cx="5577840" cy="6492240"/>
+            <a:off x="5242694" y="1637105"/>
+            <a:ext cx="7187454" cy="7186335"/>
           </a:xfrm>
-          <a:prstGeom prst="roundRect">
-            <a:avLst/>
-          </a:prstGeom>
-          <a:solidFill>
-            <a:srgbClr val="F8FAFC"/>
-          </a:solidFill>
-          <a:ln w="19050">
-            <a:solidFill>
-              <a:srgbClr val="E2E8F0"/>
-            </a:solidFill>
+          <a:custGeom>
+            <a:rect b="b" l="l" r="r" t="t"/>
+            <a:pathLst>
+              <a:path extrusionOk="0" h="7186335" w="7187454">
+                <a:moveTo>
+                  <a:pt x="0" y="0"/>
+                </a:moveTo>
+                <a:lnTo>
+                  <a:pt x="7187454" y="0"/>
+                </a:lnTo>
+                <a:lnTo>
+                  <a:pt x="7187454" y="7186335"/>
+                </a:lnTo>
+                <a:lnTo>
+                  <a:pt x="0" y="7186335"/>
+                </a:lnTo>
+                <a:lnTo>
+                  <a:pt x="0" y="0"/>
+                </a:lnTo>
+                <a:close/>
+              </a:path>
+            </a:pathLst>
+          </a:custGeom>
+          <a:blipFill rotWithShape="1">
+            <a:blip r:embed="rId4">
+              <a:alphaModFix amt="5000"/>
+            </a:blip>
+            <a:stretch>
+              <a:fillRect b="0" l="0" r="-90299" t="-5830"/>
+            </a:stretch>
+          </a:blipFill>
+          <a:ln>
+            <a:noFill/>
           </a:ln>
         </p:spPr>
-        <p:style>
-          <a:lnRef idx="1">
-            <a:schemeClr val="accent1"/>
-          </a:lnRef>
-          <a:fillRef idx="3">
-            <a:schemeClr val="accent1"/>
-          </a:fillRef>
-          <a:effectRef idx="2">
-            <a:schemeClr val="accent1"/>
-          </a:effectRef>
-          <a:fontRef idx="minor">
-            <a:schemeClr val="lt1"/>
-          </a:fontRef>
-        </p:style>
-        <p:txBody>
-          <a:bodyPr rtlCol="0" anchor="ctr" wrap="square" lIns="182880" rIns="182880" tIns="164592" bIns="164592"/>
-          <a:lstStyle/>
-          <a:p>
-            <a:pPr algn="ctr"/>
-          </a:p>
-          <a:p>
-            <a:pPr>
-              <a:spcAft>
-                <a:spcPts val="800"/>
-              </a:spcAft>
-              <a:defRPr sz="1500" b="1">
-                <a:solidFill>
-                  <a:srgbClr val="6D28D9"/>
-                </a:solidFill>
-                <a:latin typeface="IBM Plex Mono"/>
-              </a:defRPr>
-            </a:pPr>
-            <a:r>
-              <a:t>KEY FEATURES &amp; UNIQUE ADVANTAGES</a:t>
-            </a:r>
-          </a:p>
-          <a:p>
-            <a:pPr>
-              <a:spcAft>
-                <a:spcPts val="100"/>
-              </a:spcAft>
-              <a:defRPr sz="1150" b="1">
-                <a:solidFill>
-                  <a:srgbClr val="0F172A"/>
-                </a:solidFill>
-                <a:latin typeface="Arial"/>
-              </a:defRPr>
-            </a:pPr>
-            <a:r>
-              <a:t>1. Academic Planner &amp; SGPA Engine</a:t>
-            </a:r>
-          </a:p>
-          <a:p>
-            <a:pPr>
-              <a:spcAft>
-                <a:spcPts val="600"/>
-              </a:spcAft>
-              <a:defRPr sz="1000" b="0">
-                <a:solidFill>
-                  <a:srgbClr val="334155"/>
-                </a:solidFill>
-                <a:latin typeface="Arial"/>
-              </a:defRPr>
-            </a:pPr>
-            <a:r>
-              <a:t>• Computes exact End-Sem marks required for target SGPA (4-10 scale); automatically locks unreachable grades when internal marks drop.</a:t>
-            </a:r>
-          </a:p>
-          <a:p>
-            <a:pPr>
-              <a:spcAft>
-                <a:spcPts val="100"/>
-              </a:spcAft>
-              <a:defRPr sz="1150" b="1">
-                <a:solidFill>
-                  <a:srgbClr val="0F172A"/>
-                </a:solidFill>
-                <a:latin typeface="Arial"/>
-              </a:defRPr>
-            </a:pPr>
-            <a:r>
-              <a:t>2. Dynamic Division Timetable</a:t>
-            </a:r>
-          </a:p>
-          <a:p>
-            <a:pPr>
-              <a:spcAft>
-                <a:spcPts val="600"/>
-              </a:spcAft>
-              <a:defRPr sz="1000" b="0">
-                <a:solidFill>
-                  <a:srgbClr val="334155"/>
-                </a:solidFill>
-                <a:latin typeface="Arial"/>
-              </a:defRPr>
-            </a:pPr>
-            <a:r>
-              <a:t>• Real-time Mon-Fri timetable across all 12 Sem 1 divisions, with classrooms, batch practicals (Workshop 008, Lab 406), and faculty names.</a:t>
-            </a:r>
-          </a:p>
-          <a:p>
-            <a:pPr>
-              <a:spcAft>
-                <a:spcPts val="100"/>
-              </a:spcAft>
-              <a:defRPr sz="1150" b="1">
-                <a:solidFill>
-                  <a:srgbClr val="0F172A"/>
-                </a:solidFill>
-                <a:latin typeface="Arial"/>
-              </a:defRPr>
-            </a:pPr>
-            <a:r>
-              <a:t>3. Peer Learning Time-Credit Bank</a:t>
-            </a:r>
-          </a:p>
-          <a:p>
-            <a:pPr>
-              <a:spcAft>
-                <a:spcPts val="600"/>
-              </a:spcAft>
-              <a:defRPr sz="1000" b="0">
-                <a:solidFill>
-                  <a:srgbClr val="334155"/>
-                </a:solidFill>
-                <a:latin typeface="Arial"/>
-              </a:defRPr>
-            </a:pPr>
-            <a:r>
-              <a:t>• Zero-cash barter economy: 1 hour teach = +1 credit, 1 hour learn = -1 credit. Seniors mentor juniors safely without monetary transactions.</a:t>
-            </a:r>
-          </a:p>
-          <a:p>
-            <a:pPr>
-              <a:spcAft>
-                <a:spcPts val="100"/>
-              </a:spcAft>
-              <a:defRPr sz="1150" b="1">
-                <a:solidFill>
-                  <a:srgbClr val="0F172A"/>
-                </a:solidFill>
-                <a:latin typeface="Arial"/>
-              </a:defRPr>
-            </a:pPr>
-            <a:r>
-              <a:t>4. Interactive Commute &amp; Station Carpool</a:t>
-            </a:r>
-          </a:p>
-          <a:p>
-            <a:pPr>
-              <a:spcAft>
-                <a:spcPts val="600"/>
-              </a:spcAft>
-              <a:defRPr sz="1000" b="0">
-                <a:solidFill>
-                  <a:srgbClr val="334155"/>
-                </a:solidFill>
-                <a:latin typeface="Arial"/>
-              </a:defRPr>
-            </a:pPr>
-            <a:r>
-              <a:t>• Leaflet OpenStreetMap connects Chembur/Kurla stations to VESIT with verified seat requests and 'Host a Ride' system.</a:t>
-            </a:r>
-          </a:p>
-          <a:p>
-            <a:pPr>
-              <a:spcAft>
-                <a:spcPts val="200"/>
-              </a:spcAft>
-              <a:defRPr sz="1150" b="1">
-                <a:solidFill>
-                  <a:srgbClr val="6D28D9"/>
-                </a:solidFill>
-                <a:latin typeface="Arial"/>
-              </a:defRPr>
-            </a:pPr>
-            <a:r>
-              <a:t>USP (Unique Selling Proposition):</a:t>
-            </a:r>
-          </a:p>
-          <a:p>
-            <a:pPr>
-              <a:spcAft>
-                <a:spcPts val="200"/>
-              </a:spcAft>
-              <a:defRPr sz="1000" b="0">
-                <a:solidFill>
-                  <a:srgbClr val="334155"/>
-                </a:solidFill>
-                <a:latin typeface="Arial"/>
-              </a:defRPr>
-            </a:pPr>
-            <a:r>
-              <a:t>Zero-friction MiniMoth Phone OTP + mathematically accurate MU grade solver + authentic college timetable automation. Not just a static concept—a production-grade working web app.</a:t>
-            </a:r>
-          </a:p>
-        </p:txBody>
       </p:sp>
     </p:spTree>
   </p:cSld>
@@ -13004,7 +12714,7 @@
     </p:bg>
     <p:spTree>
       <p:nvGrpSpPr>
-        <p:cNvPr id="122" name="Shape 122"/>
+        <p:cNvPr id="123" name="Shape 123"/>
         <p:cNvGrpSpPr/>
         <p:nvPr/>
       </p:nvGrpSpPr>
@@ -13018,21 +12728,21 @@
       </p:grpSpPr>
       <p:grpSp>
         <p:nvGrpSpPr>
-          <p:cNvPr id="123" name="Google Shape;123;p15"/>
+          <p:cNvPr id="124" name="Google Shape;124;p15"/>
           <p:cNvGrpSpPr/>
           <p:nvPr/>
         </p:nvGrpSpPr>
         <p:grpSpPr>
           <a:xfrm>
-            <a:off x="0" y="9113639"/>
-            <a:ext cx="18288000" cy="1173361"/>
+            <a:off x="0" y="9113638"/>
+            <a:ext cx="18288118" cy="1173367"/>
             <a:chOff x="0" y="-38100"/>
-            <a:chExt cx="4816593" cy="309033"/>
+            <a:chExt cx="4816592" cy="309033"/>
           </a:xfrm>
         </p:grpSpPr>
         <p:sp>
           <p:nvSpPr>
-            <p:cNvPr id="124" name="Google Shape;124;p15"/>
+            <p:cNvPr id="125" name="Google Shape;125;p15"/>
             <p:cNvSpPr/>
             <p:nvPr/>
           </p:nvSpPr>
@@ -13062,7 +12772,7 @@
               </a:pathLst>
             </a:custGeom>
             <a:solidFill>
-              <a:srgbClr val="9F2F24"/>
+              <a:srgbClr val="21436F"/>
             </a:solidFill>
             <a:ln>
               <a:noFill/>
@@ -13071,14 +12781,14 @@
         </p:sp>
         <p:sp>
           <p:nvSpPr>
-            <p:cNvPr id="125" name="Google Shape;125;p15"/>
+            <p:cNvPr id="126" name="Google Shape;126;p15"/>
             <p:cNvSpPr txBox="1"/>
             <p:nvPr/>
           </p:nvSpPr>
           <p:spPr>
             <a:xfrm>
               <a:off x="0" y="-38100"/>
-              <a:ext cx="4816593" cy="309033"/>
+              <a:ext cx="4816500" cy="309000"/>
             </a:xfrm>
             <a:prstGeom prst="rect">
               <a:avLst/>
@@ -13124,35 +12834,35 @@
       </p:grpSp>
       <p:grpSp>
         <p:nvGrpSpPr>
-          <p:cNvPr id="126" name="Google Shape;126;p15"/>
+          <p:cNvPr id="127" name="Google Shape;127;p15"/>
           <p:cNvGrpSpPr/>
           <p:nvPr/>
         </p:nvGrpSpPr>
         <p:grpSpPr>
           <a:xfrm>
             <a:off x="191375" y="118562"/>
-            <a:ext cx="1292532" cy="1302817"/>
+            <a:ext cx="1292532" cy="1302818"/>
             <a:chOff x="0" y="0"/>
             <a:chExt cx="1723376" cy="1737090"/>
           </a:xfrm>
         </p:grpSpPr>
         <p:grpSp>
           <p:nvGrpSpPr>
-            <p:cNvPr id="127" name="Google Shape;127;p15"/>
+            <p:cNvPr id="128" name="Google Shape;128;p15"/>
             <p:cNvGrpSpPr/>
             <p:nvPr/>
           </p:nvGrpSpPr>
           <p:grpSpPr>
             <a:xfrm>
               <a:off x="94119" y="59143"/>
-              <a:ext cx="1540538" cy="1540538"/>
+              <a:ext cx="1540500" cy="1540500"/>
               <a:chOff x="0" y="0"/>
               <a:chExt cx="812800" cy="812800"/>
             </a:xfrm>
           </p:grpSpPr>
           <p:sp>
             <p:nvSpPr>
-              <p:cNvPr id="128" name="Google Shape;128;p15"/>
+              <p:cNvPr id="129" name="Google Shape;129;p15"/>
               <p:cNvSpPr/>
               <p:nvPr/>
             </p:nvSpPr>
@@ -13223,14 +12933,14 @@
           </p:sp>
           <p:sp>
             <p:nvSpPr>
-              <p:cNvPr id="129" name="Google Shape;129;p15"/>
+              <p:cNvPr id="130" name="Google Shape;130;p15"/>
               <p:cNvSpPr txBox="1"/>
               <p:nvPr/>
             </p:nvSpPr>
             <p:spPr>
               <a:xfrm>
                 <a:off x="76200" y="47625"/>
-                <a:ext cx="660400" cy="688975"/>
+                <a:ext cx="660300" cy="689100"/>
               </a:xfrm>
               <a:prstGeom prst="rect">
                 <a:avLst/>
@@ -13276,7 +12986,7 @@
         </p:grpSp>
         <p:sp>
           <p:nvSpPr>
-            <p:cNvPr id="130" name="Google Shape;130;p15"/>
+            <p:cNvPr id="131" name="Google Shape;131;p15"/>
             <p:cNvSpPr/>
             <p:nvPr/>
           </p:nvSpPr>
@@ -13324,14 +13034,372 @@
       </p:grpSp>
       <p:sp>
         <p:nvSpPr>
-          <p:cNvPr id="131" name="Google Shape;131;p15"/>
+          <p:cNvPr id="132" name="Google Shape;132;p15"/>
           <p:cNvSpPr txBox="1"/>
           <p:nvPr/>
         </p:nvSpPr>
         <p:spPr>
           <a:xfrm>
-            <a:off x="5013201" y="375193"/>
-            <a:ext cx="8261598" cy="1037623"/>
+            <a:off x="1028700" y="445700"/>
+            <a:ext cx="15699900" cy="927000"/>
+          </a:xfrm>
+          <a:prstGeom prst="rect">
+            <a:avLst/>
+          </a:prstGeom>
+          <a:noFill/>
+          <a:ln>
+            <a:noFill/>
+          </a:ln>
+        </p:spPr>
+        <p:txBody>
+          <a:bodyPr anchorCtr="0" anchor="t" bIns="0" lIns="0" spcFirstLastPara="1" rIns="0" wrap="square" tIns="0">
+            <a:spAutoFit/>
+          </a:bodyPr>
+          <a:lstStyle/>
+          <a:p>
+            <a:pPr indent="0" lvl="0" marL="0" marR="0" rtl="0" algn="ctr">
+              <a:lnSpc>
+                <a:spcPct val="140013"/>
+              </a:lnSpc>
+              <a:spcBef>
+                <a:spcPts val="0"/>
+              </a:spcBef>
+              <a:spcAft>
+                <a:spcPts val="0"/>
+              </a:spcAft>
+              <a:buNone/>
+            </a:pPr>
+            <a:r>
+              <a:rPr b="1" i="0" lang="en-US" sz="6023" u="none" cap="none" strike="noStrike">
+                <a:solidFill>
+                  <a:srgbClr val="000000"/>
+                </a:solidFill>
+                <a:latin typeface="IBM Plex Mono"/>
+                <a:ea typeface="IBM Plex Mono"/>
+                <a:cs typeface="IBM Plex Mono"/>
+                <a:sym typeface="IBM Plex Mono"/>
+              </a:rPr>
+              <a:t>TECHNICAL APPROACH &amp; </a:t>
+            </a:r>
+            <a:r>
+              <a:rPr b="1" lang="en-US" sz="6023">
+                <a:latin typeface="IBM Plex Mono"/>
+                <a:ea typeface="IBM Plex Mono"/>
+                <a:cs typeface="IBM Plex Mono"/>
+                <a:sym typeface="IBM Plex Mono"/>
+              </a:rPr>
+              <a:t>WORKFLOW</a:t>
+            </a:r>
+            <a:endParaRPr/>
+          </a:p>
+        </p:txBody>
+      </p:sp>
+      <p:sp>
+        <p:nvSpPr>
+          <p:cNvPr id="133" name="Google Shape;133;p15"/>
+          <p:cNvSpPr txBox="1"/>
+          <p:nvPr/>
+        </p:nvSpPr>
+        <p:spPr>
+          <a:xfrm>
+            <a:off x="364075" y="1463550"/>
+            <a:ext cx="10500000" cy="7800000"/>
+          </a:xfrm>
+          <a:prstGeom prst="rect">
+            <a:avLst/>
+          </a:prstGeom>
+          <a:noFill/>
+          <a:ln>
+            <a:noFill/>
+          </a:ln>
+        </p:spPr>
+        <p:txBody>
+          <a:bodyPr anchorCtr="0" anchor="t" bIns="0" lIns="0" spcFirstLastPara="1" rIns="0" wrap="square" tIns="0">
+            <a:spAutoFit/>
+          </a:bodyPr>
+          <a:lstStyle/>
+          <a:p>
+            <a:pPr indent="0" lvl="0" marL="0" rtl="0" algn="l">
+              <a:lnSpc>
+                <a:spcPct val="140000"/>
+              </a:lnSpc>
+              <a:spcBef>
+                <a:spcPts val="0"/>
+              </a:spcBef>
+              <a:spcAft>
+                <a:spcPts val="100"/>
+              </a:spcAft>
+              <a:buClr>
+                <a:schemeClr val="dk1"/>
+              </a:buClr>
+              <a:buSzPts val="1100"/>
+              <a:buFont typeface="Arial"/>
+              <a:buNone/>
+            </a:pPr>
+            <a:r>
+              <a:rPr sz="1400" b="1">
+                <a:solidFill>
+                  <a:srgbClr val="111827"/>
+                </a:solidFill>
+                <a:latin typeface="Libre Baskerville"/>
+              </a:rPr>
+              <a:t>Step 1 — User Input: </a:t>
+            </a:r>
+            <a:r>
+              <a:rPr sz="1300" b="0">
+                <a:solidFill>
+                  <a:srgbClr val="374151"/>
+                </a:solidFill>
+                <a:latin typeface="Libre Baskerville"/>
+              </a:rPr>
+              <a:t>Student authenticates via Phone OTP (MiniMoth) &amp; selects Branch, Division (e.g. D4B EXTC), and Academic Goals.</a:t>
+            </a:r>
+            <a:endParaRPr sz="2300">
+              <a:solidFill>
+                <a:schemeClr val="dk1"/>
+              </a:solidFill>
+            </a:endParaRPr>
+          </a:p>
+          <a:p>
+            <a:pPr>
+              <a:spcAft>
+                <a:spcPts val="100"/>
+              </a:spcAft>
+              <a:defRPr sz="1200" b="1">
+                <a:solidFill>
+                  <a:srgbClr val="1E3A8A"/>
+                </a:solidFill>
+                <a:latin typeface="Libre Baskerville"/>
+              </a:defRPr>
+            </a:pPr>
+            <a:r>
+              <a:t>      ↓</a:t>
+            </a:r>
+          </a:p>
+          <a:p>
+            <a:pPr>
+              <a:spcAft>
+                <a:spcPts val="100"/>
+              </a:spcAft>
+            </a:pPr>
+            <a:r>
+              <a:rPr sz="1400" b="1">
+                <a:solidFill>
+                  <a:srgbClr val="111827"/>
+                </a:solidFill>
+                <a:latin typeface="Libre Baskerville"/>
+              </a:rPr>
+              <a:t>Step 2 — Data Collection: </a:t>
+            </a:r>
+            <a:r>
+              <a:rPr sz="1300" b="0">
+                <a:solidFill>
+                  <a:srgbClr val="374151"/>
+                </a:solidFill>
+                <a:latin typeface="Libre Baskerville"/>
+              </a:rPr>
+              <a:t>System aggregates division timetable feeds, autonomous credit matrix, active carpool routes &amp; peer listings.</a:t>
+            </a:r>
+          </a:p>
+          <a:p>
+            <a:pPr>
+              <a:spcAft>
+                <a:spcPts val="100"/>
+              </a:spcAft>
+              <a:defRPr sz="1200" b="1">
+                <a:solidFill>
+                  <a:srgbClr val="1E3A8A"/>
+                </a:solidFill>
+                <a:latin typeface="Libre Baskerville"/>
+              </a:defRPr>
+            </a:pPr>
+            <a:r>
+              <a:t>      ↓</a:t>
+            </a:r>
+          </a:p>
+          <a:p>
+            <a:pPr>
+              <a:spcAft>
+                <a:spcPts val="100"/>
+              </a:spcAft>
+            </a:pPr>
+            <a:r>
+              <a:rPr sz="1400" b="1">
+                <a:solidFill>
+                  <a:srgbClr val="111827"/>
+                </a:solidFill>
+                <a:latin typeface="Libre Baskerville"/>
+              </a:rPr>
+              <a:t>Step 3 — Processing: </a:t>
+            </a:r>
+            <a:r>
+              <a:rPr sz="1300" b="0">
+                <a:solidFill>
+                  <a:srgbClr val="374151"/>
+                </a:solidFill>
+                <a:latin typeface="Libre Baskerville"/>
+              </a:rPr>
+              <a:t>Grade engine computes passing thresholds and SGPA = Σ(Credits × GP) / Total Credits; geospatial filter indexes routes.</a:t>
+            </a:r>
+          </a:p>
+          <a:p>
+            <a:pPr>
+              <a:spcAft>
+                <a:spcPts val="100"/>
+              </a:spcAft>
+              <a:defRPr sz="1200" b="1">
+                <a:solidFill>
+                  <a:srgbClr val="1E3A8A"/>
+                </a:solidFill>
+                <a:latin typeface="Libre Baskerville"/>
+              </a:defRPr>
+            </a:pPr>
+            <a:r>
+              <a:t>      ↓</a:t>
+            </a:r>
+          </a:p>
+          <a:p>
+            <a:pPr>
+              <a:spcAft>
+                <a:spcPts val="100"/>
+              </a:spcAft>
+            </a:pPr>
+            <a:r>
+              <a:rPr sz="1400" b="1">
+                <a:solidFill>
+                  <a:srgbClr val="111827"/>
+                </a:solidFill>
+                <a:latin typeface="Libre Baskerville"/>
+              </a:rPr>
+              <a:t>Step 4 — Decision / Prediction: </a:t>
+            </a:r>
+            <a:r>
+              <a:rPr sz="1300" b="0">
+                <a:solidFill>
+                  <a:srgbClr val="374151"/>
+                </a:solidFill>
+                <a:latin typeface="Libre Baskerville"/>
+              </a:rPr>
+              <a:t>Algorithm locks unreachable grades, verifies minimum pass cutoffs, and balances time-credit ledger.</a:t>
+            </a:r>
+          </a:p>
+          <a:p>
+            <a:pPr>
+              <a:spcAft>
+                <a:spcPts val="100"/>
+              </a:spcAft>
+              <a:defRPr sz="1200" b="1">
+                <a:solidFill>
+                  <a:srgbClr val="1E3A8A"/>
+                </a:solidFill>
+                <a:latin typeface="Libre Baskerville"/>
+              </a:defRPr>
+            </a:pPr>
+            <a:r>
+              <a:t>      ↓</a:t>
+            </a:r>
+          </a:p>
+          <a:p>
+            <a:pPr>
+              <a:spcAft>
+                <a:spcPts val="100"/>
+              </a:spcAft>
+            </a:pPr>
+            <a:r>
+              <a:rPr sz="1400" b="1">
+                <a:solidFill>
+                  <a:srgbClr val="111827"/>
+                </a:solidFill>
+                <a:latin typeface="Libre Baskerville"/>
+              </a:rPr>
+              <a:t>Step 5 — Final Output: </a:t>
+            </a:r>
+            <a:r>
+              <a:rPr sz="1300" b="0">
+                <a:solidFill>
+                  <a:srgbClr val="374151"/>
+                </a:solidFill>
+                <a:latin typeface="Libre Baskerville"/>
+              </a:rPr>
+              <a:t>Interactive dashboard renders live lecture cards, what-if marks needed table, Leaflet map, and leaderboard.</a:t>
+            </a:r>
+          </a:p>
+          <a:p>
+            <a:pPr>
+              <a:spcBef>
+                <a:spcPts val="800"/>
+              </a:spcBef>
+              <a:spcAft>
+                <a:spcPts val="200"/>
+              </a:spcAft>
+              <a:defRPr sz="1600" b="1">
+                <a:solidFill>
+                  <a:srgbClr val="111827"/>
+                </a:solidFill>
+                <a:latin typeface="Libre Baskerville"/>
+              </a:defRPr>
+            </a:pPr>
+            <a:r>
+              <a:t>Demo (Optional):</a:t>
+            </a:r>
+          </a:p>
+          <a:p>
+            <a:pPr>
+              <a:spcAft>
+                <a:spcPts val="200"/>
+              </a:spcAft>
+            </a:pPr>
+            <a:r>
+              <a:rPr sz="1300" b="1">
+                <a:solidFill>
+                  <a:srgbClr val="111827"/>
+                </a:solidFill>
+                <a:latin typeface="Libre Baskerville"/>
+              </a:rPr>
+              <a:t>• Working Prototype: </a:t>
+            </a:r>
+            <a:r>
+              <a:rPr sz="1300" b="0">
+                <a:solidFill>
+                  <a:srgbClr val="374151"/>
+                </a:solidFill>
+                <a:latin typeface="Libre Baskerville"/>
+              </a:rPr>
+              <a:t>Production build verified (0 errors); hosted live via Vercel / Netlify &amp; local dev server.</a:t>
+            </a:r>
+          </a:p>
+          <a:p>
+            <a:r>
+              <a:rPr sz="1300" b="1">
+                <a:solidFill>
+                  <a:srgbClr val="111827"/>
+                </a:solidFill>
+                <a:latin typeface="Libre Baskerville"/>
+              </a:rPr>
+              <a:t>• Live Interaction: </a:t>
+            </a:r>
+            <a:r>
+              <a:rPr sz="1300" b="0">
+                <a:solidFill>
+                  <a:srgbClr val="374151"/>
+                </a:solidFill>
+                <a:latin typeface="Libre Baskerville"/>
+              </a:rPr>
+              <a:t>Fully responsive on mobile &amp; desktop, instant division switching, real-time what-if SGPA calculations.</a:t>
+            </a:r>
+          </a:p>
+        </p:txBody>
+      </p:sp>
+      <p:sp>
+        <p:nvSpPr>
+          <p:cNvPr id="134" name="Google Shape;134;p15"/>
+          <p:cNvSpPr txBox="1"/>
+          <p:nvPr/>
+        </p:nvSpPr>
+        <p:spPr>
+          <a:xfrm>
+            <a:off x="364075" y="4855625"/>
+            <a:ext cx="7090800" cy="615600"/>
           </a:xfrm>
           <a:prstGeom prst="rect">
             <a:avLst/>
@@ -13349,7 +13417,7 @@
           <a:p>
             <a:pPr indent="0" lvl="0" marL="0" marR="0" rtl="0" algn="l">
               <a:lnSpc>
-                <a:spcPct val="140013"/>
+                <a:spcPct val="140000"/>
               </a:lnSpc>
               <a:spcBef>
                 <a:spcPts val="0"/>
@@ -13360,31 +13428,48 @@
               <a:buNone/>
             </a:pPr>
             <a:r>
-              <a:rPr b="1" i="0" lang="en-US" sz="6023" u="none" cap="none" strike="noStrike">
-                <a:solidFill>
-                  <a:srgbClr val="000000"/>
-                </a:solidFill>
-                <a:latin typeface="IBM Plex Mono"/>
-                <a:ea typeface="IBM Plex Mono"/>
-                <a:cs typeface="IBM Plex Mono"/>
-                <a:sym typeface="IBM Plex Mono"/>
-              </a:rPr>
-              <a:t>TECHNICAL APPROACH</a:t>
+              <a:t/>
             </a:r>
-            <a:endParaRPr/>
+            <a:endParaRPr sz="1000"/>
+          </a:p>
+          <a:p>
+            <a:pPr indent="0" lvl="0" marL="0" marR="0" rtl="0" algn="l">
+              <a:lnSpc>
+                <a:spcPct val="140000"/>
+              </a:lnSpc>
+              <a:spcBef>
+                <a:spcPts val="0"/>
+              </a:spcBef>
+              <a:spcAft>
+                <a:spcPts val="0"/>
+              </a:spcAft>
+              <a:buNone/>
+            </a:pPr>
+            <a:r>
+              <a:t/>
+            </a:r>
+            <a:endParaRPr b="0" i="0" sz="2600" u="none" cap="none" strike="noStrike">
+              <a:solidFill>
+                <a:srgbClr val="000000"/>
+              </a:solidFill>
+              <a:latin typeface="Libre Baskerville"/>
+              <a:ea typeface="Libre Baskerville"/>
+              <a:cs typeface="Libre Baskerville"/>
+              <a:sym typeface="Libre Baskerville"/>
+            </a:endParaRPr>
           </a:p>
         </p:txBody>
       </p:sp>
       <p:sp>
         <p:nvSpPr>
-          <p:cNvPr id="132" name="Google Shape;132;p15"/>
+          <p:cNvPr id="135" name="Google Shape;135;p15"/>
           <p:cNvSpPr txBox="1"/>
           <p:nvPr/>
         </p:nvSpPr>
         <p:spPr>
           <a:xfrm>
-            <a:off x="1294033" y="2287757"/>
-            <a:ext cx="15699934" cy="3580765"/>
+            <a:off x="11200000" y="1809750"/>
+            <a:ext cx="6500000" cy="7500000"/>
           </a:xfrm>
           <a:prstGeom prst="rect">
             <a:avLst/>
@@ -13395,12 +13480,12 @@
           </a:ln>
         </p:spPr>
         <p:txBody>
-          <a:bodyPr anchorCtr="0" anchor="t" bIns="0" lIns="0" spcFirstLastPara="1" rIns="0" wrap="square" tIns="0">
+          <a:bodyPr anchorCtr="0" anchor="t" bIns="91425" lIns="91425" spcFirstLastPara="1" rIns="91425" wrap="square" tIns="91425">
             <a:spAutoFit/>
           </a:bodyPr>
           <a:lstStyle/>
           <a:p>
-            <a:pPr indent="-367030" lvl="1" marL="734059" marR="0" rtl="0" algn="l">
+            <a:pPr indent="0" lvl="0" marL="0" rtl="0" algn="l">
               <a:lnSpc>
                 <a:spcPct val="140011"/>
               </a:lnSpc>
@@ -13408,65 +13493,254 @@
                 <a:spcPts val="0"/>
               </a:spcBef>
               <a:spcAft>
-                <a:spcPts val="0"/>
+                <a:spcPts val="800"/>
               </a:spcAft>
               <a:buClr>
-                <a:srgbClr val="000000"/>
+                <a:schemeClr val="dk1"/>
               </a:buClr>
-              <a:buSzPts val="3399"/>
               <a:buFont typeface="Arial"/>
-              <a:buChar char="•"/>
+              <a:buNone/>
+              <a:defRPr sz="2000" b="1">
+                <a:solidFill>
+                  <a:srgbClr val="111827"/>
+                </a:solidFill>
+                <a:latin typeface="Libre Baskerville"/>
+              </a:defRPr>
             </a:pPr>
-            <a:endParaRPr/>
+            <a:r>
+              <a:t>Technology &amp; Why we used it</a:t>
+            </a:r>
+            <a:endParaRPr sz="1000">
+              <a:solidFill>
+                <a:schemeClr val="dk1"/>
+              </a:solidFill>
+            </a:endParaRPr>
           </a:p>
           <a:p>
-            <a:pPr indent="-367030" lvl="1" marL="734059" marR="0" rtl="0" algn="l">
-              <a:lnSpc>
-                <a:spcPct val="140011"/>
-              </a:lnSpc>
-              <a:spcBef>
-                <a:spcPts val="0"/>
-              </a:spcBef>
-              <a:spcAft>
-                <a:spcPts val="0"/>
-              </a:spcAft>
-              <a:buClr>
-                <a:srgbClr val="000000"/>
-              </a:buClr>
-              <a:buSzPts val="3399"/>
-              <a:buFont typeface="Arial"/>
-              <a:buChar char="•"/>
+            <a:pPr lvl="1">
+              <a:spcAft>
+                <a:spcPts val="500"/>
+              </a:spcAft>
             </a:pPr>
-            <a:endParaRPr/>
+            <a:r>
+              <a:rPr sz="1300" b="1">
+                <a:solidFill>
+                  <a:srgbClr val="111827"/>
+                </a:solidFill>
+                <a:latin typeface="Libre Baskerville"/>
+              </a:rPr>
+              <a:t>Frontend: React 19 + TypeScript — </a:t>
+            </a:r>
+            <a:r>
+              <a:rPr sz="1200" b="0">
+                <a:solidFill>
+                  <a:srgbClr val="374151"/>
+                </a:solidFill>
+                <a:latin typeface="Libre Baskerville"/>
+              </a:rPr>
+              <a:t>Provides component modularity, instantaneous rendering, and strict end-to-end type safety.</a:t>
+            </a:r>
+          </a:p>
+          <a:p>
+            <a:pPr lvl="1">
+              <a:spcAft>
+                <a:spcPts val="500"/>
+              </a:spcAft>
+            </a:pPr>
+            <a:r>
+              <a:rPr sz="1300" b="1">
+                <a:solidFill>
+                  <a:srgbClr val="111827"/>
+                </a:solidFill>
+                <a:latin typeface="Libre Baskerville"/>
+              </a:rPr>
+              <a:t>Bundler: Vite — </a:t>
+            </a:r>
+            <a:r>
+              <a:rPr sz="1200" b="0">
+                <a:solidFill>
+                  <a:srgbClr val="374151"/>
+                </a:solidFill>
+                <a:latin typeface="Libre Baskerville"/>
+              </a:rPr>
+              <a:t>Ultra-fast Hot Module Replacement and highly optimized production builds (&lt; 1.5s).</a:t>
+            </a:r>
+          </a:p>
+          <a:p>
+            <a:pPr lvl="1">
+              <a:spcAft>
+                <a:spcPts val="500"/>
+              </a:spcAft>
+            </a:pPr>
+            <a:r>
+              <a:rPr sz="1300" b="1">
+                <a:solidFill>
+                  <a:srgbClr val="111827"/>
+                </a:solidFill>
+                <a:latin typeface="Libre Baskerville"/>
+              </a:rPr>
+              <a:t>Styling: Tailwind CSS — </a:t>
+            </a:r>
+            <a:r>
+              <a:rPr sz="1200" b="0">
+                <a:solidFill>
+                  <a:srgbClr val="374151"/>
+                </a:solidFill>
+                <a:latin typeface="Libre Baskerville"/>
+              </a:rPr>
+              <a:t>Utility-first design enabling rapid, mobile-responsive layouts and instant Dark/Light mode toggle.</a:t>
+            </a:r>
+          </a:p>
+          <a:p>
+            <a:pPr lvl="1">
+              <a:spcAft>
+                <a:spcPts val="500"/>
+              </a:spcAft>
+            </a:pPr>
+            <a:r>
+              <a:rPr sz="1300" b="1">
+                <a:solidFill>
+                  <a:srgbClr val="111827"/>
+                </a:solidFill>
+                <a:latin typeface="Libre Baskerville"/>
+              </a:rPr>
+              <a:t>State &amp; Storage: Reactive State + LocalStorage — </a:t>
+            </a:r>
+            <a:r>
+              <a:rPr sz="1200" b="0">
+                <a:solidFill>
+                  <a:srgbClr val="374151"/>
+                </a:solidFill>
+                <a:latin typeface="Libre Baskerville"/>
+              </a:rPr>
+              <a:t>Ensures zero-latency offline performance and persistence without requiring backend servers for prototype demo.</a:t>
+            </a:r>
+          </a:p>
+          <a:p>
+            <a:pPr lvl="1">
+              <a:spcAft>
+                <a:spcPts val="500"/>
+              </a:spcAft>
+            </a:pPr>
+            <a:r>
+              <a:rPr sz="1300" b="1">
+                <a:solidFill>
+                  <a:srgbClr val="111827"/>
+                </a:solidFill>
+                <a:latin typeface="Libre Baskerville"/>
+              </a:rPr>
+              <a:t>Mapping: Leaflet &amp; OpenStreetMap — </a:t>
+            </a:r>
+            <a:r>
+              <a:rPr sz="1200" b="0">
+                <a:solidFill>
+                  <a:srgbClr val="374151"/>
+                </a:solidFill>
+                <a:latin typeface="Libre Baskerville"/>
+              </a:rPr>
+              <a:t>Lightweight, zero-cost interactive geospatial map rendering for ride origins and campus landmarks.</a:t>
+            </a:r>
+          </a:p>
+          <a:p>
+            <a:pPr lvl="1">
+              <a:spcAft>
+                <a:spcPts val="500"/>
+              </a:spcAft>
+            </a:pPr>
+            <a:r>
+              <a:rPr sz="1300" b="1">
+                <a:solidFill>
+                  <a:srgbClr val="111827"/>
+                </a:solidFill>
+                <a:latin typeface="Libre Baskerville"/>
+              </a:rPr>
+              <a:t>Auth API: MiniMoth Service — </a:t>
+            </a:r>
+            <a:r>
+              <a:rPr sz="1200" b="0">
+                <a:solidFill>
+                  <a:srgbClr val="374151"/>
+                </a:solidFill>
+                <a:latin typeface="Libre Baskerville"/>
+              </a:rPr>
+              <a:t>Secure phone-based OTP verification with token refresh and seamless session management.</a:t>
+            </a:r>
           </a:p>
         </p:txBody>
       </p:sp>
       <p:sp>
         <p:nvSpPr>
-          <p:cNvPr id="133" name="Google Shape;133;p15"/>
+          <p:cNvPr id="136" name="Google Shape;136;p15"/>
           <p:cNvSpPr/>
           <p:nvPr/>
         </p:nvSpPr>
         <p:spPr>
           <a:xfrm>
-            <a:off x="2601885" y="1463560"/>
-            <a:ext cx="13084230" cy="7359879"/>
+            <a:off x="16793950" y="135950"/>
+            <a:ext cx="1259674" cy="1259478"/>
           </a:xfrm>
           <a:custGeom>
             <a:rect b="b" l="l" r="r" t="t"/>
             <a:pathLst>
-              <a:path extrusionOk="0" h="7359879" w="13084230">
+              <a:path extrusionOk="0" h="1259478" w="1259674">
                 <a:moveTo>
                   <a:pt x="0" y="0"/>
                 </a:moveTo>
                 <a:lnTo>
-                  <a:pt x="13084230" y="0"/>
+                  <a:pt x="1259674" y="0"/>
                 </a:lnTo>
                 <a:lnTo>
-                  <a:pt x="13084230" y="7359880"/>
+                  <a:pt x="1259674" y="1259478"/>
                 </a:lnTo>
                 <a:lnTo>
-                  <a:pt x="0" y="7359880"/>
+                  <a:pt x="0" y="1259478"/>
+                </a:lnTo>
+                <a:lnTo>
+                  <a:pt x="0" y="0"/>
+                </a:lnTo>
+                <a:close/>
+              </a:path>
+            </a:pathLst>
+          </a:custGeom>
+          <a:blipFill rotWithShape="1">
+            <a:blip r:embed="rId4">
+              <a:alphaModFix/>
+            </a:blip>
+            <a:stretch>
+              <a:fillRect b="0" l="0" r="-90299" t="-5830"/>
+            </a:stretch>
+          </a:blipFill>
+          <a:ln>
+            <a:noFill/>
+          </a:ln>
+        </p:spPr>
+      </p:sp>
+      <p:sp>
+        <p:nvSpPr>
+          <p:cNvPr id="137" name="Google Shape;137;p15"/>
+          <p:cNvSpPr/>
+          <p:nvPr/>
+        </p:nvSpPr>
+        <p:spPr>
+          <a:xfrm>
+            <a:off x="5242694" y="1637105"/>
+            <a:ext cx="7187454" cy="7186335"/>
+          </a:xfrm>
+          <a:custGeom>
+            <a:rect b="b" l="l" r="r" t="t"/>
+            <a:pathLst>
+              <a:path extrusionOk="0" h="7186335" w="7187454">
+                <a:moveTo>
+                  <a:pt x="0" y="0"/>
+                </a:moveTo>
+                <a:lnTo>
+                  <a:pt x="7187454" y="0"/>
+                </a:lnTo>
+                <a:lnTo>
+                  <a:pt x="7187454" y="7186335"/>
+                </a:lnTo>
+                <a:lnTo>
+                  <a:pt x="0" y="7186335"/>
                 </a:lnTo>
                 <a:lnTo>
                   <a:pt x="0" y="0"/>
@@ -13480,574 +13754,13 @@
               <a:alphaModFix amt="5000"/>
             </a:blip>
             <a:stretch>
-              <a:fillRect b="0" l="0" r="0" t="0"/>
+              <a:fillRect b="0" l="0" r="-90299" t="-5830"/>
             </a:stretch>
           </a:blipFill>
           <a:ln>
             <a:noFill/>
           </a:ln>
         </p:spPr>
-        <p:txBody>
-          <a:bodyPr/>
-          <a:p/>
-        </p:txBody>
-      </p:sp>
-      <p:sp>
-        <p:nvSpPr>
-          <p:cNvPr id="134" name="Google Shape;134;p15"/>
-          <p:cNvSpPr/>
-          <p:nvPr/>
-        </p:nvSpPr>
-        <p:spPr>
-          <a:xfrm>
-            <a:off x="16367044" y="118562"/>
-            <a:ext cx="2229573" cy="1254135"/>
-          </a:xfrm>
-          <a:custGeom>
-            <a:rect b="b" l="l" r="r" t="t"/>
-            <a:pathLst>
-              <a:path extrusionOk="0" h="1254135" w="2229573">
-                <a:moveTo>
-                  <a:pt x="0" y="0"/>
-                </a:moveTo>
-                <a:lnTo>
-                  <a:pt x="2229573" y="0"/>
-                </a:lnTo>
-                <a:lnTo>
-                  <a:pt x="2229573" y="1254135"/>
-                </a:lnTo>
-                <a:lnTo>
-                  <a:pt x="0" y="1254135"/>
-                </a:lnTo>
-                <a:lnTo>
-                  <a:pt x="0" y="0"/>
-                </a:lnTo>
-                <a:close/>
-              </a:path>
-            </a:pathLst>
-          </a:custGeom>
-          <a:blipFill rotWithShape="1">
-            <a:blip r:embed="rId5">
-              <a:alphaModFix/>
-            </a:blip>
-            <a:stretch>
-              <a:fillRect b="0" l="0" r="0" t="0"/>
-            </a:stretch>
-          </a:blipFill>
-          <a:ln>
-            <a:noFill/>
-          </a:ln>
-        </p:spPr>
-        <p:txBody>
-          <a:bodyPr/>
-          <a:p/>
-        </p:txBody>
-      </p:sp>
-      <p:sp>
-        <p:nvSpPr>
-          <p:cNvPr id="135" name="Rounded Rectangle 134"/>
-          <p:cNvSpPr/>
-          <p:nvPr/>
-        </p:nvSpPr>
-        <p:spPr>
-          <a:xfrm>
-            <a:off x="914400" y="1691640"/>
-            <a:ext cx="7863840" cy="6492240"/>
-          </a:xfrm>
-          <a:prstGeom prst="roundRect">
-            <a:avLst/>
-          </a:prstGeom>
-          <a:solidFill>
-            <a:srgbClr val="FFFFFF"/>
-          </a:solidFill>
-          <a:ln w="19050">
-            <a:solidFill>
-              <a:srgbClr val="E2E8F0"/>
-            </a:solidFill>
-          </a:ln>
-        </p:spPr>
-        <p:style>
-          <a:lnRef idx="1">
-            <a:schemeClr val="accent1"/>
-          </a:lnRef>
-          <a:fillRef idx="3">
-            <a:schemeClr val="accent1"/>
-          </a:fillRef>
-          <a:effectRef idx="2">
-            <a:schemeClr val="accent1"/>
-          </a:effectRef>
-          <a:fontRef idx="minor">
-            <a:schemeClr val="lt1"/>
-          </a:fontRef>
-        </p:style>
-        <p:txBody>
-          <a:bodyPr rtlCol="0" anchor="ctr" wrap="square" lIns="182880" rIns="182880" tIns="164592" bIns="164592"/>
-          <a:lstStyle/>
-          <a:p>
-            <a:pPr algn="ctr"/>
-          </a:p>
-          <a:p>
-            <a:pPr>
-              <a:spcAft>
-                <a:spcPts val="1000"/>
-              </a:spcAft>
-              <a:defRPr sz="1500" b="1">
-                <a:solidFill>
-                  <a:srgbClr val="4338CA"/>
-                </a:solidFill>
-                <a:latin typeface="IBM Plex Mono"/>
-              </a:defRPr>
-            </a:pPr>
-            <a:r>
-              <a:t>TECH STACK &amp; SELECTION JUSTIFICATION</a:t>
-            </a:r>
-          </a:p>
-          <a:p>
-            <a:pPr>
-              <a:spcAft>
-                <a:spcPts val="200"/>
-              </a:spcAft>
-              <a:defRPr sz="1200" b="1">
-                <a:solidFill>
-                  <a:srgbClr val="0F172A"/>
-                </a:solidFill>
-                <a:latin typeface="Arial"/>
-              </a:defRPr>
-            </a:pPr>
-            <a:r>
-              <a:t>• React 19 + TypeScript (Frontend Core)</a:t>
-            </a:r>
-          </a:p>
-          <a:p>
-            <a:pPr>
-              <a:spcAft>
-                <a:spcPts val="800"/>
-              </a:spcAft>
-              <a:defRPr sz="1050" b="0">
-                <a:solidFill>
-                  <a:srgbClr val="334155"/>
-                </a:solidFill>
-                <a:latin typeface="Arial"/>
-              </a:defRPr>
-            </a:pPr>
-            <a:r>
-              <a:t>Justification: Provides compile-time type safety across complex academic data structures, instantaneous virtual DOM updates, and robust component reusability.</a:t>
-            </a:r>
-          </a:p>
-          <a:p>
-            <a:pPr>
-              <a:spcAft>
-                <a:spcPts val="200"/>
-              </a:spcAft>
-              <a:defRPr sz="1200" b="1">
-                <a:solidFill>
-                  <a:srgbClr val="0F172A"/>
-                </a:solidFill>
-                <a:latin typeface="Arial"/>
-              </a:defRPr>
-            </a:pPr>
-            <a:r>
-              <a:t>• Tailwind CSS v4 + Lucide Icons (Styling System)</a:t>
-            </a:r>
-          </a:p>
-          <a:p>
-            <a:pPr>
-              <a:spcAft>
-                <a:spcPts val="800"/>
-              </a:spcAft>
-              <a:defRPr sz="1050" b="0">
-                <a:solidFill>
-                  <a:srgbClr val="334155"/>
-                </a:solidFill>
-                <a:latin typeface="Arial"/>
-              </a:defRPr>
-            </a:pPr>
-            <a:r>
-              <a:t>Justification: Zero-runtime utility CSS engine enabling soft, accessible color palettes with built-in persistent Light and Dark theme toggling.</a:t>
-            </a:r>
-          </a:p>
-          <a:p>
-            <a:pPr>
-              <a:spcAft>
-                <a:spcPts val="200"/>
-              </a:spcAft>
-              <a:defRPr sz="1200" b="1">
-                <a:solidFill>
-                  <a:srgbClr val="0F172A"/>
-                </a:solidFill>
-                <a:latin typeface="Arial"/>
-              </a:defRPr>
-            </a:pPr>
-            <a:r>
-              <a:t>• Leaflet.js + OpenStreetMap (GIS &amp; Maps)</a:t>
-            </a:r>
-          </a:p>
-          <a:p>
-            <a:pPr>
-              <a:spcAft>
-                <a:spcPts val="800"/>
-              </a:spcAft>
-              <a:defRPr sz="1050" b="0">
-                <a:solidFill>
-                  <a:srgbClr val="334155"/>
-                </a:solidFill>
-                <a:latin typeface="Arial"/>
-              </a:defRPr>
-            </a:pPr>
-            <a:r>
-              <a:t>Justification: High-performance interactive client-side vector mapping without costly proprietary Google Maps API keys or billing limits.</a:t>
-            </a:r>
-          </a:p>
-          <a:p>
-            <a:pPr>
-              <a:spcAft>
-                <a:spcPts val="200"/>
-              </a:spcAft>
-              <a:defRPr sz="1200" b="1">
-                <a:solidFill>
-                  <a:srgbClr val="0F172A"/>
-                </a:solidFill>
-                <a:latin typeface="Arial"/>
-              </a:defRPr>
-            </a:pPr>
-            <a:r>
-              <a:t>• MiniMoth SDK (Sponsor Authentication)</a:t>
-            </a:r>
-          </a:p>
-          <a:p>
-            <a:pPr>
-              <a:spcAft>
-                <a:spcPts val="800"/>
-              </a:spcAft>
-              <a:defRPr sz="1050" b="0">
-                <a:solidFill>
-                  <a:srgbClr val="334155"/>
-                </a:solidFill>
-                <a:latin typeface="Arial"/>
-              </a:defRPr>
-            </a:pPr>
-            <a:r>
-              <a:t>Justification: Serverless Phone OTP authentication specifically tailored for Indian developers with JWT access/refresh token rotation and instant demo sandboxing.</a:t>
-            </a:r>
-          </a:p>
-          <a:p>
-            <a:pPr>
-              <a:spcAft>
-                <a:spcPts val="200"/>
-              </a:spcAft>
-              <a:defRPr sz="1200" b="1">
-                <a:solidFill>
-                  <a:srgbClr val="0F172A"/>
-                </a:solidFill>
-                <a:latin typeface="Arial"/>
-              </a:defRPr>
-            </a:pPr>
-            <a:r>
-              <a:t>• Vite 8 &amp; Reactive Context API (State &amp; Build)</a:t>
-            </a:r>
-          </a:p>
-          <a:p>
-            <a:pPr>
-              <a:spcAft>
-                <a:spcPts val="200"/>
-              </a:spcAft>
-              <a:defRPr sz="1050" b="0">
-                <a:solidFill>
-                  <a:srgbClr val="334155"/>
-                </a:solidFill>
-                <a:latin typeface="Arial"/>
-              </a:defRPr>
-            </a:pPr>
-            <a:r>
-              <a:t>Justification: Sub-second hot module reloading, optimized 150kB gzipped production bundles, and offline-first LocalStorage synchronization.</a:t>
-            </a:r>
-          </a:p>
-        </p:txBody>
-      </p:sp>
-      <p:sp>
-        <p:nvSpPr>
-          <p:cNvPr id="136" name="Rounded Rectangle 135"/>
-          <p:cNvSpPr/>
-          <p:nvPr/>
-        </p:nvSpPr>
-        <p:spPr>
-          <a:xfrm>
-            <a:off x="8961120" y="1691640"/>
-            <a:ext cx="8412480" cy="6492240"/>
-          </a:xfrm>
-          <a:prstGeom prst="roundRect">
-            <a:avLst/>
-          </a:prstGeom>
-          <a:solidFill>
-            <a:srgbClr val="F8FAFC"/>
-          </a:solidFill>
-          <a:ln w="19050">
-            <a:solidFill>
-              <a:srgbClr val="C7D2FE"/>
-            </a:solidFill>
-          </a:ln>
-        </p:spPr>
-        <p:style>
-          <a:lnRef idx="1">
-            <a:schemeClr val="accent1"/>
-          </a:lnRef>
-          <a:fillRef idx="3">
-            <a:schemeClr val="accent1"/>
-          </a:fillRef>
-          <a:effectRef idx="2">
-            <a:schemeClr val="accent1"/>
-          </a:effectRef>
-          <a:fontRef idx="minor">
-            <a:schemeClr val="lt1"/>
-          </a:fontRef>
-        </p:style>
-        <p:txBody>
-          <a:bodyPr rtlCol="0" anchor="ctr" wrap="square" lIns="182880" rIns="182880" tIns="164592" bIns="164592"/>
-          <a:lstStyle/>
-          <a:p>
-            <a:pPr algn="ctr"/>
-          </a:p>
-          <a:p>
-            <a:pPr>
-              <a:spcAft>
-                <a:spcPts val="800"/>
-              </a:spcAft>
-              <a:defRPr sz="1500" b="1">
-                <a:solidFill>
-                  <a:srgbClr val="6D28D9"/>
-                </a:solidFill>
-                <a:latin typeface="IBM Plex Mono"/>
-              </a:defRPr>
-            </a:pPr>
-            <a:r>
-              <a:t>SYSTEM ARCHITECTURE &amp; DATA FLOW</a:t>
-            </a:r>
-          </a:p>
-          <a:p>
-            <a:pPr>
-              <a:spcAft>
-                <a:spcPts val="400"/>
-              </a:spcAft>
-              <a:defRPr sz="1150" b="1">
-                <a:solidFill>
-                  <a:srgbClr val="0F172A"/>
-                </a:solidFill>
-                <a:latin typeface="Arial"/>
-              </a:defRPr>
-            </a:pPr>
-            <a:r>
-              <a:t>System Architecture Hierarchy:</a:t>
-            </a:r>
-          </a:p>
-          <a:p>
-            <a:pPr>
-              <a:spcAft>
-                <a:spcPts val="100"/>
-              </a:spcAft>
-              <a:defRPr sz="1100" b="1">
-                <a:solidFill>
-                  <a:srgbClr val="4338CA"/>
-                </a:solidFill>
-                <a:latin typeface="Arial"/>
-              </a:defRPr>
-            </a:pPr>
-            <a:r>
-              <a:t>▸ 1. Presentation Layer</a:t>
-            </a:r>
-          </a:p>
-          <a:p>
-            <a:pPr>
-              <a:spcAft>
-                <a:spcPts val="500"/>
-              </a:spcAft>
-              <a:defRPr sz="1000" b="0">
-                <a:solidFill>
-                  <a:srgbClr val="334155"/>
-                </a:solidFill>
-                <a:latin typeface="Arial"/>
-              </a:defRPr>
-            </a:pPr>
-            <a:r>
-              <a:t>   Responsive UI (Dashboard, SGPA Planner, Timetable, Carpool Map, Peer Bank, Guide, Events, Profile) + Theme Switcher</a:t>
-            </a:r>
-          </a:p>
-          <a:p>
-            <a:pPr>
-              <a:spcAft>
-                <a:spcPts val="100"/>
-              </a:spcAft>
-              <a:defRPr sz="1100" b="1">
-                <a:solidFill>
-                  <a:srgbClr val="4338CA"/>
-                </a:solidFill>
-                <a:latin typeface="Arial"/>
-              </a:defRPr>
-            </a:pPr>
-            <a:r>
-              <a:t>▸ 2. State &amp; Auth Engine</a:t>
-            </a:r>
-          </a:p>
-          <a:p>
-            <a:pPr>
-              <a:spcAft>
-                <a:spcPts val="500"/>
-              </a:spcAft>
-              <a:defRPr sz="1000" b="0">
-                <a:solidFill>
-                  <a:srgbClr val="334155"/>
-                </a:solidFill>
-                <a:latin typeface="Arial"/>
-              </a:defRPr>
-            </a:pPr>
-            <a:r>
-              <a:t>   CampusContext Provider + MiniMoth JWT Session Token Service (Login, Token Refresh, Role Verification)</a:t>
-            </a:r>
-          </a:p>
-          <a:p>
-            <a:pPr>
-              <a:spcAft>
-                <a:spcPts val="100"/>
-              </a:spcAft>
-              <a:defRPr sz="1100" b="1">
-                <a:solidFill>
-                  <a:srgbClr val="4338CA"/>
-                </a:solidFill>
-                <a:latin typeface="Arial"/>
-              </a:defRPr>
-            </a:pPr>
-            <a:r>
-              <a:t>▸ 3. Business Logic Engines</a:t>
-            </a:r>
-          </a:p>
-          <a:p>
-            <a:pPr>
-              <a:spcAft>
-                <a:spcPts val="500"/>
-              </a:spcAft>
-              <a:defRPr sz="1000" b="0">
-                <a:solidFill>
-                  <a:srgbClr val="334155"/>
-                </a:solidFill>
-                <a:latin typeface="Arial"/>
-              </a:defRPr>
-            </a:pPr>
-            <a:r>
-              <a:t>   Academic Grade Calculator (MU 10-pt Math) + Timetable Engine (12 Divisions) + Leaflet GIS + Barter Economy</a:t>
-            </a:r>
-          </a:p>
-          <a:p>
-            <a:pPr>
-              <a:spcAft>
-                <a:spcPts val="100"/>
-              </a:spcAft>
-              <a:defRPr sz="1100" b="1">
-                <a:solidFill>
-                  <a:srgbClr val="4338CA"/>
-                </a:solidFill>
-                <a:latin typeface="Arial"/>
-              </a:defRPr>
-            </a:pPr>
-            <a:r>
-              <a:t>▸ 4. Data &amp; Persistence Layer</a:t>
-            </a:r>
-          </a:p>
-          <a:p>
-            <a:pPr>
-              <a:spcAft>
-                <a:spcPts val="500"/>
-              </a:spcAft>
-              <a:defRPr sz="1000" b="0">
-                <a:solidFill>
-                  <a:srgbClr val="334155"/>
-                </a:solidFill>
-                <a:latin typeface="Arial"/>
-              </a:defRPr>
-            </a:pPr>
-            <a:r>
-              <a:t>   LocalStorage Persistence Cache + MiniMoth Serverless API + OpenStreetMap Tile Servers</a:t>
-            </a:r>
-          </a:p>
-          <a:p>
-            <a:pPr>
-              <a:spcAft>
-                <a:spcPts val="300"/>
-              </a:spcAft>
-              <a:defRPr sz="1150" b="1">
-                <a:solidFill>
-                  <a:srgbClr val="0F172A"/>
-                </a:solidFill>
-                <a:latin typeface="Arial"/>
-              </a:defRPr>
-            </a:pPr>
-            <a:r>
-              <a:t>Data Flow &amp; Processing Lifecycle:</a:t>
-            </a:r>
-          </a:p>
-          <a:p>
-            <a:pPr>
-              <a:spcAft>
-                <a:spcPts val="300"/>
-              </a:spcAft>
-              <a:defRPr sz="1000" b="0">
-                <a:solidFill>
-                  <a:srgbClr val="334155"/>
-                </a:solidFill>
-                <a:latin typeface="Arial"/>
-              </a:defRPr>
-            </a:pPr>
-            <a:r>
-              <a:t>• 1. User Input: Student enters phone OTP, changes division to D4B, or adjusts internal test score.</a:t>
-            </a:r>
-          </a:p>
-          <a:p>
-            <a:pPr>
-              <a:spcAft>
-                <a:spcPts val="300"/>
-              </a:spcAft>
-              <a:defRPr sz="1000" b="0">
-                <a:solidFill>
-                  <a:srgbClr val="334155"/>
-                </a:solidFill>
-                <a:latin typeface="Arial"/>
-              </a:defRPr>
-            </a:pPr>
-            <a:r>
-              <a:t>• 2. State Mutation: CampusContext processes action, executes pure calculation functions, and validates bounds.</a:t>
-            </a:r>
-          </a:p>
-          <a:p>
-            <a:pPr>
-              <a:spcAft>
-                <a:spcPts val="300"/>
-              </a:spcAft>
-              <a:defRPr sz="1000" b="0">
-                <a:solidFill>
-                  <a:srgbClr val="334155"/>
-                </a:solidFill>
-                <a:latin typeface="Arial"/>
-              </a:defRPr>
-            </a:pPr>
-            <a:r>
-              <a:t>• 3. Cross-Module Trigger: High risk in FEC104 (Mechanics) raises automated dashboard alert &amp; peer tutor recommendation.</a:t>
-            </a:r>
-          </a:p>
-          <a:p>
-            <a:pPr>
-              <a:spcAft>
-                <a:spcPts val="200"/>
-              </a:spcAft>
-              <a:defRPr sz="1000" b="0">
-                <a:solidFill>
-                  <a:srgbClr val="334155"/>
-                </a:solidFill>
-                <a:latin typeface="Arial"/>
-              </a:defRPr>
-            </a:pPr>
-            <a:r>
-              <a:t>• 4. Persistence: Data is serialized into browser LocalStorage, ensuring zero state loss on page refresh.</a:t>
-            </a:r>
-          </a:p>
-        </p:txBody>
       </p:sp>
     </p:spTree>
   </p:cSld>
@@ -14080,7 +13793,7 @@
     </p:bg>
     <p:spTree>
       <p:nvGrpSpPr>
-        <p:cNvPr id="138" name="Shape 138"/>
+        <p:cNvPr id="141" name="Shape 141"/>
         <p:cNvGrpSpPr/>
         <p:nvPr/>
       </p:nvGrpSpPr>
@@ -14094,7 +13807,7 @@
       </p:grpSpPr>
       <p:grpSp>
         <p:nvGrpSpPr>
-          <p:cNvPr id="139" name="Google Shape;139;p16"/>
+          <p:cNvPr id="142" name="Google Shape;142;p16"/>
           <p:cNvGrpSpPr/>
           <p:nvPr/>
         </p:nvGrpSpPr>
@@ -14108,7 +13821,7 @@
         </p:grpSpPr>
         <p:sp>
           <p:nvSpPr>
-            <p:cNvPr id="140" name="Google Shape;140;p16"/>
+            <p:cNvPr id="143" name="Google Shape;143;p16"/>
             <p:cNvSpPr/>
             <p:nvPr/>
           </p:nvSpPr>
@@ -14138,7 +13851,7 @@
               </a:pathLst>
             </a:custGeom>
             <a:solidFill>
-              <a:srgbClr val="9F2F24"/>
+              <a:srgbClr val="21436F"/>
             </a:solidFill>
             <a:ln>
               <a:noFill/>
@@ -14147,7 +13860,7 @@
         </p:sp>
         <p:sp>
           <p:nvSpPr>
-            <p:cNvPr id="141" name="Google Shape;141;p16"/>
+            <p:cNvPr id="144" name="Google Shape;144;p16"/>
             <p:cNvSpPr txBox="1"/>
             <p:nvPr/>
           </p:nvSpPr>
@@ -14198,9 +13911,262 @@
           </p:txBody>
         </p:sp>
       </p:grpSp>
+      <p:sp>
+        <p:nvSpPr>
+          <p:cNvPr id="145" name="Google Shape;145;p16"/>
+          <p:cNvSpPr txBox="1"/>
+          <p:nvPr/>
+        </p:nvSpPr>
+        <p:spPr>
+          <a:xfrm>
+            <a:off x="3406676" y="383756"/>
+            <a:ext cx="11474648" cy="1037623"/>
+          </a:xfrm>
+          <a:prstGeom prst="rect">
+            <a:avLst/>
+          </a:prstGeom>
+          <a:noFill/>
+          <a:ln>
+            <a:noFill/>
+          </a:ln>
+        </p:spPr>
+        <p:txBody>
+          <a:bodyPr anchorCtr="0" anchor="t" bIns="0" lIns="0" spcFirstLastPara="1" rIns="0" wrap="square" tIns="0">
+            <a:spAutoFit/>
+          </a:bodyPr>
+          <a:lstStyle/>
+          <a:p>
+            <a:pPr indent="0" lvl="0" marL="0" marR="0" rtl="0" algn="l">
+              <a:lnSpc>
+                <a:spcPct val="140013"/>
+              </a:lnSpc>
+              <a:spcBef>
+                <a:spcPts val="0"/>
+              </a:spcBef>
+              <a:spcAft>
+                <a:spcPts val="0"/>
+              </a:spcAft>
+              <a:buNone/>
+            </a:pPr>
+            <a:r>
+              <a:rPr b="1" i="0" lang="en-US" sz="6023" u="none" cap="none" strike="noStrike">
+                <a:solidFill>
+                  <a:srgbClr val="000000"/>
+                </a:solidFill>
+                <a:latin typeface="IBM Plex Mono"/>
+                <a:ea typeface="IBM Plex Mono"/>
+                <a:cs typeface="IBM Plex Mono"/>
+                <a:sym typeface="IBM Plex Mono"/>
+              </a:rPr>
+              <a:t>FUTURE SCOPE &amp; REFERENCES</a:t>
+            </a:r>
+            <a:endParaRPr/>
+          </a:p>
+        </p:txBody>
+      </p:sp>
+      <p:sp>
+        <p:nvSpPr>
+          <p:cNvPr id="146" name="Google Shape;146;p16"/>
+          <p:cNvSpPr txBox="1"/>
+          <p:nvPr/>
+        </p:nvSpPr>
+        <p:spPr>
+          <a:xfrm>
+            <a:off x="837641" y="2000000"/>
+            <a:ext cx="7772913" cy="6800000"/>
+          </a:xfrm>
+          <a:prstGeom prst="rect">
+            <a:avLst/>
+          </a:prstGeom>
+          <a:noFill/>
+          <a:ln>
+            <a:noFill/>
+          </a:ln>
+        </p:spPr>
+        <p:txBody>
+          <a:bodyPr anchorCtr="0" anchor="t" bIns="0" lIns="0" spcFirstLastPara="1" rIns="0" wrap="square" tIns="0">
+            <a:spAutoFit/>
+          </a:bodyPr>
+          <a:lstStyle/>
+          <a:p>
+            <a:pPr indent="0" lvl="0" marL="0" marR="0" rtl="0" algn="l">
+              <a:lnSpc>
+                <a:spcPct val="140011"/>
+              </a:lnSpc>
+              <a:spcBef>
+                <a:spcPts val="0"/>
+              </a:spcBef>
+              <a:spcAft>
+                <a:spcPts val="800"/>
+              </a:spcAft>
+              <a:buNone/>
+              <a:defRPr sz="2200" b="1">
+                <a:solidFill>
+                  <a:srgbClr val="111827"/>
+                </a:solidFill>
+                <a:latin typeface="Libre Baskerville"/>
+              </a:defRPr>
+            </a:pPr>
+            <a:r>
+              <a:t>Future Scope</a:t>
+            </a:r>
+            <a:endParaRPr/>
+          </a:p>
+          <a:p>
+            <a:pPr lvl="1">
+              <a:spcAft>
+                <a:spcPts val="600"/>
+              </a:spcAft>
+            </a:pPr>
+            <a:r>
+              <a:rPr sz="1400" b="1">
+                <a:solidFill>
+                  <a:srgbClr val="111827"/>
+                </a:solidFill>
+                <a:latin typeface="Libre Baskerville"/>
+              </a:rPr>
+              <a:t>Mobile App Support: </a:t>
+            </a:r>
+            <a:r>
+              <a:rPr sz="1300" b="0">
+                <a:solidFill>
+                  <a:srgbClr val="374151"/>
+                </a:solidFill>
+                <a:latin typeface="Libre Baskerville"/>
+              </a:rPr>
+              <a:t>Develop native iOS and Android apps (React Native) with offline push notifications for class alerts and carpools.</a:t>
+            </a:r>
+          </a:p>
+          <a:p>
+            <a:pPr lvl="1">
+              <a:spcAft>
+                <a:spcPts val="600"/>
+              </a:spcAft>
+            </a:pPr>
+            <a:r>
+              <a:rPr sz="1400" b="1">
+                <a:solidFill>
+                  <a:srgbClr val="111827"/>
+                </a:solidFill>
+                <a:latin typeface="Libre Baskerville"/>
+              </a:rPr>
+              <a:t>College ERP &amp; Moodle Sync: </a:t>
+            </a:r>
+            <a:r>
+              <a:rPr sz="1300" b="0">
+                <a:solidFill>
+                  <a:srgbClr val="374151"/>
+                </a:solidFill>
+                <a:latin typeface="Libre Baskerville"/>
+              </a:rPr>
+              <a:t>Bi-directional integration with college attendance systems to auto-sync internal marks and attendance percentages.</a:t>
+            </a:r>
+          </a:p>
+          <a:p>
+            <a:pPr lvl="1">
+              <a:spcAft>
+                <a:spcPts val="600"/>
+              </a:spcAft>
+            </a:pPr>
+            <a:r>
+              <a:rPr sz="1400" b="1">
+                <a:solidFill>
+                  <a:srgbClr val="111827"/>
+                </a:solidFill>
+                <a:latin typeface="Libre Baskerville"/>
+              </a:rPr>
+              <a:t>Live GPS Commute Telemetry: </a:t>
+            </a:r>
+            <a:r>
+              <a:rPr sz="1300" b="0">
+                <a:solidFill>
+                  <a:srgbClr val="374151"/>
+                </a:solidFill>
+                <a:latin typeface="Libre Baskerville"/>
+              </a:rPr>
+              <a:t>Real-time live vehicle tracking for ride-sharing and official college bus arrival estimates.</a:t>
+            </a:r>
+          </a:p>
+          <a:p>
+            <a:pPr lvl="1">
+              <a:spcAft>
+                <a:spcPts val="600"/>
+              </a:spcAft>
+            </a:pPr>
+            <a:r>
+              <a:rPr sz="1400" b="1">
+                <a:solidFill>
+                  <a:srgbClr val="111827"/>
+                </a:solidFill>
+                <a:latin typeface="Libre Baskerville"/>
+              </a:rPr>
+              <a:t>AI Academic Diagnostic Advisor: </a:t>
+            </a:r>
+            <a:r>
+              <a:rPr sz="1300" b="0">
+                <a:solidFill>
+                  <a:srgbClr val="374151"/>
+                </a:solidFill>
+                <a:latin typeface="Libre Baskerville"/>
+              </a:rPr>
+              <a:t>Lightweight machine-learning model forecasting borderline grades and recommending targeted peer tutors.</a:t>
+            </a:r>
+          </a:p>
+          <a:p>
+            <a:pPr lvl="1">
+              <a:spcAft>
+                <a:spcPts val="600"/>
+              </a:spcAft>
+            </a:pPr>
+            <a:r>
+              <a:rPr sz="1400" b="1">
+                <a:solidFill>
+                  <a:srgbClr val="111827"/>
+                </a:solidFill>
+                <a:latin typeface="Libre Baskerville"/>
+              </a:rPr>
+              <a:t>Smart Campus IoT Integrations: </a:t>
+            </a:r>
+            <a:r>
+              <a:rPr sz="1300" b="0">
+                <a:solidFill>
+                  <a:srgbClr val="374151"/>
+                </a:solidFill>
+                <a:latin typeface="Libre Baskerville"/>
+              </a:rPr>
+              <a:t>Connect with library RFID turnstiles for real-time seat availability and canteen queue monitoring.</a:t>
+            </a:r>
+          </a:p>
+          <a:p>
+            <a:pPr lvl="1">
+              <a:spcAft>
+                <a:spcPts val="600"/>
+              </a:spcAft>
+            </a:pPr>
+            <a:r>
+              <a:rPr sz="1400" b="1">
+                <a:solidFill>
+                  <a:srgbClr val="111827"/>
+                </a:solidFill>
+                <a:latin typeface="Libre Baskerville"/>
+              </a:rPr>
+              <a:t>Enterprise Scalability: </a:t>
+            </a:r>
+            <a:r>
+              <a:rPr sz="1300" b="0">
+                <a:solidFill>
+                  <a:srgbClr val="374151"/>
+                </a:solidFill>
+                <a:latin typeface="Libre Baskerville"/>
+              </a:rPr>
+              <a:t>Deploy scalable PostgreSQL / Supabase backend with role-based access control for faculty and student coordinators.</a:t>
+            </a:r>
+          </a:p>
+        </p:txBody>
+      </p:sp>
       <p:grpSp>
         <p:nvGrpSpPr>
-          <p:cNvPr id="142" name="Google Shape;142;p16"/>
+          <p:cNvPr id="147" name="Google Shape;147;p16"/>
           <p:cNvGrpSpPr/>
           <p:nvPr/>
         </p:nvGrpSpPr>
@@ -14214,7 +14180,7 @@
         </p:grpSpPr>
         <p:grpSp>
           <p:nvGrpSpPr>
-            <p:cNvPr id="143" name="Google Shape;143;p16"/>
+            <p:cNvPr id="148" name="Google Shape;148;p16"/>
             <p:cNvGrpSpPr/>
             <p:nvPr/>
           </p:nvGrpSpPr>
@@ -14228,7 +14194,7 @@
           </p:grpSpPr>
           <p:sp>
             <p:nvSpPr>
-              <p:cNvPr id="144" name="Google Shape;144;p16"/>
+              <p:cNvPr id="149" name="Google Shape;149;p16"/>
               <p:cNvSpPr/>
               <p:nvPr/>
             </p:nvSpPr>
@@ -14299,7 +14265,7 @@
           </p:sp>
           <p:sp>
             <p:nvSpPr>
-              <p:cNvPr id="145" name="Google Shape;145;p16"/>
+              <p:cNvPr id="150" name="Google Shape;150;p16"/>
               <p:cNvSpPr txBox="1"/>
               <p:nvPr/>
             </p:nvSpPr>
@@ -14352,7 +14318,7 @@
         </p:grpSp>
         <p:sp>
           <p:nvSpPr>
-            <p:cNvPr id="146" name="Google Shape;146;p16"/>
+            <p:cNvPr id="151" name="Google Shape;151;p16"/>
             <p:cNvSpPr/>
             <p:nvPr/>
           </p:nvSpPr>
@@ -14400,14 +14366,14 @@
       </p:grpSp>
       <p:sp>
         <p:nvSpPr>
-          <p:cNvPr id="147" name="Google Shape;147;p16"/>
+          <p:cNvPr id="152" name="Google Shape;152;p16"/>
           <p:cNvSpPr txBox="1"/>
           <p:nvPr/>
         </p:nvSpPr>
         <p:spPr>
           <a:xfrm>
-            <a:off x="4786741" y="383756"/>
-            <a:ext cx="8755743" cy="1037623"/>
+            <a:off x="9486387" y="2000000"/>
+            <a:ext cx="7772913" cy="6800000"/>
           </a:xfrm>
           <a:prstGeom prst="rect">
             <a:avLst/>
@@ -14425,124 +14391,227 @@
           <a:p>
             <a:pPr indent="0" lvl="0" marL="0" marR="0" rtl="0" algn="l">
               <a:lnSpc>
-                <a:spcPct val="140013"/>
+                <a:spcPct val="140011"/>
               </a:lnSpc>
               <a:spcBef>
                 <a:spcPts val="0"/>
               </a:spcBef>
               <a:spcAft>
-                <a:spcPts val="0"/>
-              </a:spcAft>
-              <a:buNone/>
+                <a:spcPts val="800"/>
+              </a:spcAft>
+              <a:buNone/>
+              <a:defRPr sz="2200" b="1">
+                <a:solidFill>
+                  <a:srgbClr val="111827"/>
+                </a:solidFill>
+                <a:latin typeface="Libre Baskerville"/>
+              </a:defRPr>
             </a:pPr>
             <a:r>
-              <a:rPr b="1" i="0" lang="en-US" sz="6023" u="none" cap="none" strike="noStrike">
-                <a:solidFill>
-                  <a:srgbClr val="000000"/>
-                </a:solidFill>
-                <a:latin typeface="IBM Plex Mono"/>
-                <a:ea typeface="IBM Plex Mono"/>
-                <a:cs typeface="IBM Plex Mono"/>
-                <a:sym typeface="IBM Plex Mono"/>
-              </a:rPr>
-              <a:t>END TO END WORKFLOW</a:t>
+              <a:t>References</a:t>
             </a:r>
             <a:endParaRPr/>
+          </a:p>
+          <a:p>
+            <a:pPr lvl="1">
+              <a:spcAft>
+                <a:spcPts val="600"/>
+              </a:spcAft>
+            </a:pPr>
+            <a:r>
+              <a:rPr sz="1400" b="1">
+                <a:solidFill>
+                  <a:srgbClr val="111827"/>
+                </a:solidFill>
+                <a:latin typeface="Libre Baskerville"/>
+              </a:rPr>
+              <a:t>Datasets: </a:t>
+            </a:r>
+            <a:r>
+              <a:rPr sz="1300" b="0">
+                <a:solidFill>
+                  <a:srgbClr val="374151"/>
+                </a:solidFill>
+                <a:latin typeface="Libre Baskerville"/>
+              </a:rPr>
+              <a:t>VESIT First-Year Engineering Autonomous Curriculum (Sem 1), Official Division &amp; Roll Allotment Sheet, and Master Timetable.</a:t>
+            </a:r>
+          </a:p>
+          <a:p>
+            <a:pPr lvl="1">
+              <a:spcAft>
+                <a:spcPts val="600"/>
+              </a:spcAft>
+            </a:pPr>
+            <a:r>
+              <a:rPr sz="1400" b="1">
+                <a:solidFill>
+                  <a:srgbClr val="111827"/>
+                </a:solidFill>
+                <a:latin typeface="Libre Baskerville"/>
+              </a:rPr>
+              <a:t>Research: </a:t>
+            </a:r>
+            <a:r>
+              <a:rPr sz="1300" b="0">
+                <a:solidFill>
+                  <a:srgbClr val="374151"/>
+                </a:solidFill>
+                <a:latin typeface="Libre Baskerville"/>
+              </a:rPr>
+              <a:t>IEEE Education Society: 'Student-Centered Digital Campuses &amp; Academic Retention Systems' (2023); Mumbai University Choice Based Credit System (CBCS) Guidelines.</a:t>
+            </a:r>
+          </a:p>
+          <a:p>
+            <a:pPr lvl="1">
+              <a:spcAft>
+                <a:spcPts val="600"/>
+              </a:spcAft>
+            </a:pPr>
+            <a:r>
+              <a:rPr sz="1400" b="1">
+                <a:solidFill>
+                  <a:srgbClr val="111827"/>
+                </a:solidFill>
+                <a:latin typeface="Libre Baskerville"/>
+              </a:rPr>
+              <a:t>Technologies: </a:t>
+            </a:r>
+            <a:r>
+              <a:rPr sz="1300" b="0">
+                <a:solidFill>
+                  <a:srgbClr val="374151"/>
+                </a:solidFill>
+                <a:latin typeface="Libre Baskerville"/>
+              </a:rPr>
+              <a:t>React 19 Official Documentation (react.dev), Vite 8 Frontend Tooling, Tailwind CSS Design System, Lucide React Icons.</a:t>
+            </a:r>
+          </a:p>
+          <a:p>
+            <a:pPr lvl="1">
+              <a:spcAft>
+                <a:spcPts val="600"/>
+              </a:spcAft>
+            </a:pPr>
+            <a:r>
+              <a:rPr sz="1400" b="1">
+                <a:solidFill>
+                  <a:srgbClr val="111827"/>
+                </a:solidFill>
+                <a:latin typeface="Libre Baskerville"/>
+              </a:rPr>
+              <a:t>APIs &amp; Services: </a:t>
+            </a:r>
+            <a:r>
+              <a:rPr sz="1300" b="0">
+                <a:solidFill>
+                  <a:srgbClr val="374151"/>
+                </a:solidFill>
+                <a:latin typeface="Libre Baskerville"/>
+              </a:rPr>
+              <a:t>MiniMoth Phone Authentication Protocol (minimoth.dev), OpenStreetMap Foundation &amp; Leaflet.js Geocoding APIs.</a:t>
+            </a:r>
+          </a:p>
+          <a:p>
+            <a:pPr lvl="1">
+              <a:spcAft>
+                <a:spcPts val="600"/>
+              </a:spcAft>
+            </a:pPr>
+            <a:r>
+              <a:rPr sz="1400" b="1">
+                <a:solidFill>
+                  <a:srgbClr val="111827"/>
+                </a:solidFill>
+                <a:latin typeface="Libre Baskerville"/>
+              </a:rPr>
+              <a:t>Other Resources: </a:t>
+            </a:r>
+            <a:r>
+              <a:rPr sz="1300" b="0">
+                <a:solidFill>
+                  <a:srgbClr val="374151"/>
+                </a:solidFill>
+                <a:latin typeface="Libre Baskerville"/>
+              </a:rPr>
+              <a:t>Vivekanand Education Society's Institute of Technology (Autonomous) Portal (ves.ac.in).</a:t>
+            </a:r>
           </a:p>
         </p:txBody>
       </p:sp>
       <p:sp>
         <p:nvSpPr>
-          <p:cNvPr id="148" name="Google Shape;148;p16"/>
-          <p:cNvSpPr txBox="1"/>
-          <p:nvPr/>
-        </p:nvSpPr>
-        <p:spPr>
-          <a:xfrm>
-            <a:off x="1297140" y="2307564"/>
-            <a:ext cx="15699934" cy="2380615"/>
-          </a:xfrm>
-          <a:prstGeom prst="rect">
-            <a:avLst/>
-          </a:prstGeom>
-          <a:noFill/>
-          <a:ln>
-            <a:noFill/>
-          </a:ln>
-        </p:spPr>
-        <p:txBody>
-          <a:bodyPr anchorCtr="0" anchor="t" bIns="0" lIns="0" spcFirstLastPara="1" rIns="0" wrap="square" tIns="0">
-            <a:spAutoFit/>
-          </a:bodyPr>
-          <a:lstStyle/>
-          <a:p>
-            <a:pPr indent="-367030" lvl="1" marL="734059" marR="0" rtl="0" algn="l">
-              <a:lnSpc>
-                <a:spcPct val="140011"/>
-              </a:lnSpc>
-              <a:spcBef>
-                <a:spcPts val="0"/>
-              </a:spcBef>
-              <a:spcAft>
-                <a:spcPts val="0"/>
-              </a:spcAft>
-              <a:buClr>
-                <a:srgbClr val="000000"/>
-              </a:buClr>
-              <a:buSzPts val="3399"/>
-              <a:buFont typeface="Arial"/>
-              <a:buChar char="•"/>
-            </a:pPr>
-            <a:endParaRPr/>
-          </a:p>
-          <a:p>
-            <a:pPr indent="-367030" lvl="1" marL="734059" marR="0" rtl="0" algn="l">
-              <a:lnSpc>
-                <a:spcPct val="140011"/>
-              </a:lnSpc>
-              <a:spcBef>
-                <a:spcPts val="0"/>
-              </a:spcBef>
-              <a:spcAft>
-                <a:spcPts val="0"/>
-              </a:spcAft>
-              <a:buClr>
-                <a:srgbClr val="000000"/>
-              </a:buClr>
-              <a:buSzPts val="3399"/>
-              <a:buFont typeface="Arial"/>
-              <a:buChar char="•"/>
-            </a:pPr>
-            <a:endParaRPr/>
-          </a:p>
-        </p:txBody>
-      </p:sp>
-      <p:sp>
-        <p:nvSpPr>
-          <p:cNvPr id="149" name="Google Shape;149;p16"/>
+          <p:cNvPr id="153" name="Google Shape;153;p16"/>
           <p:cNvSpPr/>
           <p:nvPr/>
         </p:nvSpPr>
         <p:spPr>
           <a:xfrm>
-            <a:off x="2601885" y="1463560"/>
-            <a:ext cx="13084230" cy="7359879"/>
+            <a:off x="16793950" y="135950"/>
+            <a:ext cx="1259674" cy="1259478"/>
           </a:xfrm>
           <a:custGeom>
             <a:rect b="b" l="l" r="r" t="t"/>
             <a:pathLst>
-              <a:path extrusionOk="0" h="7359879" w="13084230">
+              <a:path extrusionOk="0" h="1259478" w="1259674">
                 <a:moveTo>
                   <a:pt x="0" y="0"/>
                 </a:moveTo>
                 <a:lnTo>
-                  <a:pt x="13084230" y="0"/>
+                  <a:pt x="1259674" y="0"/>
                 </a:lnTo>
                 <a:lnTo>
-                  <a:pt x="13084230" y="7359880"/>
+                  <a:pt x="1259674" y="1259478"/>
                 </a:lnTo>
                 <a:lnTo>
-                  <a:pt x="0" y="7359880"/>
+                  <a:pt x="0" y="1259478"/>
+                </a:lnTo>
+                <a:lnTo>
+                  <a:pt x="0" y="0"/>
+                </a:lnTo>
+                <a:close/>
+              </a:path>
+            </a:pathLst>
+          </a:custGeom>
+          <a:blipFill rotWithShape="1">
+            <a:blip r:embed="rId4">
+              <a:alphaModFix/>
+            </a:blip>
+            <a:stretch>
+              <a:fillRect b="0" l="0" r="-90299" t="-5830"/>
+            </a:stretch>
+          </a:blipFill>
+          <a:ln>
+            <a:noFill/>
+          </a:ln>
+        </p:spPr>
+      </p:sp>
+      <p:sp>
+        <p:nvSpPr>
+          <p:cNvPr id="154" name="Google Shape;154;p16"/>
+          <p:cNvSpPr/>
+          <p:nvPr/>
+        </p:nvSpPr>
+        <p:spPr>
+          <a:xfrm>
+            <a:off x="5242694" y="1637105"/>
+            <a:ext cx="7187454" cy="7186335"/>
+          </a:xfrm>
+          <a:custGeom>
+            <a:rect b="b" l="l" r="r" t="t"/>
+            <a:pathLst>
+              <a:path extrusionOk="0" h="7186335" w="7187454">
+                <a:moveTo>
+                  <a:pt x="0" y="0"/>
+                </a:moveTo>
+                <a:lnTo>
+                  <a:pt x="7187454" y="0"/>
+                </a:lnTo>
+                <a:lnTo>
+                  <a:pt x="7187454" y="7186335"/>
+                </a:lnTo>
+                <a:lnTo>
+                  <a:pt x="0" y="7186335"/>
                 </a:lnTo>
                 <a:lnTo>
                   <a:pt x="0" y="0"/>
@@ -14556,882 +14625,13 @@
               <a:alphaModFix amt="5000"/>
             </a:blip>
             <a:stretch>
-              <a:fillRect b="0" l="0" r="0" t="0"/>
+              <a:fillRect b="0" l="0" r="-90299" t="-5830"/>
             </a:stretch>
           </a:blipFill>
           <a:ln>
             <a:noFill/>
           </a:ln>
         </p:spPr>
-        <p:txBody>
-          <a:bodyPr/>
-          <a:p/>
-        </p:txBody>
-      </p:sp>
-      <p:sp>
-        <p:nvSpPr>
-          <p:cNvPr id="150" name="Google Shape;150;p16"/>
-          <p:cNvSpPr/>
-          <p:nvPr/>
-        </p:nvSpPr>
-        <p:spPr>
-          <a:xfrm>
-            <a:off x="16367044" y="118562"/>
-            <a:ext cx="2229573" cy="1254135"/>
-          </a:xfrm>
-          <a:custGeom>
-            <a:rect b="b" l="l" r="r" t="t"/>
-            <a:pathLst>
-              <a:path extrusionOk="0" h="1254135" w="2229573">
-                <a:moveTo>
-                  <a:pt x="0" y="0"/>
-                </a:moveTo>
-                <a:lnTo>
-                  <a:pt x="2229573" y="0"/>
-                </a:lnTo>
-                <a:lnTo>
-                  <a:pt x="2229573" y="1254135"/>
-                </a:lnTo>
-                <a:lnTo>
-                  <a:pt x="0" y="1254135"/>
-                </a:lnTo>
-                <a:lnTo>
-                  <a:pt x="0" y="0"/>
-                </a:lnTo>
-                <a:close/>
-              </a:path>
-            </a:pathLst>
-          </a:custGeom>
-          <a:blipFill rotWithShape="1">
-            <a:blip r:embed="rId5">
-              <a:alphaModFix/>
-            </a:blip>
-            <a:stretch>
-              <a:fillRect b="0" l="0" r="0" t="0"/>
-            </a:stretch>
-          </a:blipFill>
-          <a:ln>
-            <a:noFill/>
-          </a:ln>
-        </p:spPr>
-        <p:txBody>
-          <a:bodyPr/>
-          <a:p/>
-        </p:txBody>
-      </p:sp>
-      <p:sp>
-        <p:nvSpPr>
-          <p:cNvPr id="151" name="Rounded Rectangle 150"/>
-          <p:cNvSpPr/>
-          <p:nvPr/>
-        </p:nvSpPr>
-        <p:spPr>
-          <a:xfrm>
-            <a:off x="914400" y="1691640"/>
-            <a:ext cx="3154680" cy="4389120"/>
-          </a:xfrm>
-          <a:prstGeom prst="roundRect">
-            <a:avLst/>
-          </a:prstGeom>
-          <a:solidFill>
-            <a:srgbClr val="FFFFFF"/>
-          </a:solidFill>
-          <a:ln w="19050">
-            <a:solidFill>
-              <a:srgbClr val="4338CA"/>
-            </a:solidFill>
-          </a:ln>
-        </p:spPr>
-        <p:style>
-          <a:lnRef idx="1">
-            <a:schemeClr val="accent1"/>
-          </a:lnRef>
-          <a:fillRef idx="3">
-            <a:schemeClr val="accent1"/>
-          </a:fillRef>
-          <a:effectRef idx="2">
-            <a:schemeClr val="accent1"/>
-          </a:effectRef>
-          <a:fontRef idx="minor">
-            <a:schemeClr val="lt1"/>
-          </a:fontRef>
-        </p:style>
-        <p:txBody>
-          <a:bodyPr rtlCol="0" anchor="ctr" wrap="square" lIns="182880" rIns="182880" tIns="164592" bIns="164592"/>
-          <a:lstStyle/>
-          <a:p>
-            <a:pPr algn="ctr"/>
-          </a:p>
-          <a:p>
-            <a:pPr>
-              <a:spcAft>
-                <a:spcPts val="100"/>
-              </a:spcAft>
-              <a:defRPr sz="1100" b="1">
-                <a:solidFill>
-                  <a:srgbClr val="4338CA"/>
-                </a:solidFill>
-                <a:latin typeface="IBM Plex Mono"/>
-              </a:defRPr>
-            </a:pPr>
-            <a:r>
-              <a:t>STEP 1</a:t>
-            </a:r>
-          </a:p>
-          <a:p>
-            <a:pPr>
-              <a:spcAft>
-                <a:spcPts val="800"/>
-              </a:spcAft>
-              <a:defRPr sz="1300" b="1">
-                <a:solidFill>
-                  <a:srgbClr val="0F172A"/>
-                </a:solidFill>
-                <a:latin typeface="IBM Plex Mono"/>
-              </a:defRPr>
-            </a:pPr>
-            <a:r>
-              <a:t>Phone OTP Sign-In</a:t>
-            </a:r>
-          </a:p>
-          <a:p>
-            <a:pPr>
-              <a:spcAft>
-                <a:spcPts val="600"/>
-              </a:spcAft>
-              <a:defRPr sz="1000" b="0">
-                <a:solidFill>
-                  <a:srgbClr val="334155"/>
-                </a:solidFill>
-                <a:latin typeface="Arial"/>
-              </a:defRPr>
-            </a:pPr>
-            <a:r>
-              <a:t>• User enters mobile number via MiniMoth modal</a:t>
-            </a:r>
-          </a:p>
-          <a:p>
-            <a:pPr>
-              <a:spcAft>
-                <a:spcPts val="600"/>
-              </a:spcAft>
-              <a:defRPr sz="1000" b="0">
-                <a:solidFill>
-                  <a:srgbClr val="334155"/>
-                </a:solidFill>
-                <a:latin typeface="Arial"/>
-              </a:defRPr>
-            </a:pPr>
-            <a:r>
-              <a:t>• Enters 6-digit SMS OTP (or sandbox 123456)</a:t>
-            </a:r>
-          </a:p>
-          <a:p>
-            <a:pPr>
-              <a:spcAft>
-                <a:spcPts val="600"/>
-              </a:spcAft>
-              <a:defRPr sz="1000" b="0">
-                <a:solidFill>
-                  <a:srgbClr val="334155"/>
-                </a:solidFill>
-                <a:latin typeface="Arial"/>
-              </a:defRPr>
-            </a:pPr>
-            <a:r>
-              <a:t>• Profile binds to Roll 62, Div D4B, EXTC, FE</a:t>
-            </a:r>
-          </a:p>
-          <a:p>
-            <a:pPr>
-              <a:spcAft>
-                <a:spcPts val="600"/>
-              </a:spcAft>
-              <a:defRPr sz="1000" b="0">
-                <a:solidFill>
-                  <a:srgbClr val="334155"/>
-                </a:solidFill>
-                <a:latin typeface="Arial"/>
-              </a:defRPr>
-            </a:pPr>
-            <a:r>
-              <a:t>• JWT session token generated &amp; stored</a:t>
-            </a:r>
-          </a:p>
-        </p:txBody>
-      </p:sp>
-      <p:sp>
-        <p:nvSpPr>
-          <p:cNvPr id="152" name="Rounded Rectangle 151"/>
-          <p:cNvSpPr/>
-          <p:nvPr/>
-        </p:nvSpPr>
-        <p:spPr>
-          <a:xfrm>
-            <a:off x="4251960" y="1691640"/>
-            <a:ext cx="3154680" cy="4389120"/>
-          </a:xfrm>
-          <a:prstGeom prst="roundRect">
-            <a:avLst/>
-          </a:prstGeom>
-          <a:solidFill>
-            <a:srgbClr val="FFFFFF"/>
-          </a:solidFill>
-          <a:ln w="19050">
-            <a:solidFill>
-              <a:srgbClr val="047857"/>
-            </a:solidFill>
-          </a:ln>
-        </p:spPr>
-        <p:style>
-          <a:lnRef idx="1">
-            <a:schemeClr val="accent1"/>
-          </a:lnRef>
-          <a:fillRef idx="3">
-            <a:schemeClr val="accent1"/>
-          </a:fillRef>
-          <a:effectRef idx="2">
-            <a:schemeClr val="accent1"/>
-          </a:effectRef>
-          <a:fontRef idx="minor">
-            <a:schemeClr val="lt1"/>
-          </a:fontRef>
-        </p:style>
-        <p:txBody>
-          <a:bodyPr rtlCol="0" anchor="ctr" wrap="square" lIns="182880" rIns="182880" tIns="164592" bIns="164592"/>
-          <a:lstStyle/>
-          <a:p>
-            <a:pPr algn="ctr"/>
-          </a:p>
-          <a:p>
-            <a:pPr>
-              <a:spcAft>
-                <a:spcPts val="100"/>
-              </a:spcAft>
-              <a:defRPr sz="1100" b="1">
-                <a:solidFill>
-                  <a:srgbClr val="047857"/>
-                </a:solidFill>
-                <a:latin typeface="IBM Plex Mono"/>
-              </a:defRPr>
-            </a:pPr>
-            <a:r>
-              <a:t>STEP 2</a:t>
-            </a:r>
-          </a:p>
-          <a:p>
-            <a:pPr>
-              <a:spcAft>
-                <a:spcPts val="800"/>
-              </a:spcAft>
-              <a:defRPr sz="1300" b="1">
-                <a:solidFill>
-                  <a:srgbClr val="0F172A"/>
-                </a:solidFill>
-                <a:latin typeface="IBM Plex Mono"/>
-              </a:defRPr>
-            </a:pPr>
-            <a:r>
-              <a:t>Daily Smart Hub</a:t>
-            </a:r>
-          </a:p>
-          <a:p>
-            <a:pPr>
-              <a:spcAft>
-                <a:spcPts val="600"/>
-              </a:spcAft>
-              <a:defRPr sz="1000" b="0">
-                <a:solidFill>
-                  <a:srgbClr val="334155"/>
-                </a:solidFill>
-                <a:latin typeface="Arial"/>
-              </a:defRPr>
-            </a:pPr>
-            <a:r>
-              <a:t>• Dashboard auto-detects current weekday</a:t>
-            </a:r>
-          </a:p>
-          <a:p>
-            <a:pPr>
-              <a:spcAft>
-                <a:spcPts val="600"/>
-              </a:spcAft>
-              <a:defRPr sz="1000" b="0">
-                <a:solidFill>
-                  <a:srgbClr val="334155"/>
-                </a:solidFill>
-                <a:latin typeface="Arial"/>
-              </a:defRPr>
-            </a:pPr>
-            <a:r>
-              <a:t>• Loads official D4B schedule (Room B22/523)</a:t>
-            </a:r>
-          </a:p>
-          <a:p>
-            <a:pPr>
-              <a:spcAft>
-                <a:spcPts val="600"/>
-              </a:spcAft>
-              <a:defRPr sz="1000" b="0">
-                <a:solidFill>
-                  <a:srgbClr val="334155"/>
-                </a:solidFill>
-                <a:latin typeface="Arial"/>
-              </a:defRPr>
-            </a:pPr>
-            <a:r>
-              <a:t>• Shows urgent assignment submissions</a:t>
-            </a:r>
-          </a:p>
-          <a:p>
-            <a:pPr>
-              <a:spcAft>
-                <a:spcPts val="600"/>
-              </a:spcAft>
-              <a:defRPr sz="1000" b="0">
-                <a:solidFill>
-                  <a:srgbClr val="334155"/>
-                </a:solidFill>
-                <a:latin typeface="Arial"/>
-              </a:defRPr>
-            </a:pPr>
-            <a:r>
-              <a:t>• Displays real-time campus &amp; commute alerts</a:t>
-            </a:r>
-          </a:p>
-        </p:txBody>
-      </p:sp>
-      <p:sp>
-        <p:nvSpPr>
-          <p:cNvPr id="153" name="Rounded Rectangle 152"/>
-          <p:cNvSpPr/>
-          <p:nvPr/>
-        </p:nvSpPr>
-        <p:spPr>
-          <a:xfrm>
-            <a:off x="7589520" y="1691640"/>
-            <a:ext cx="3154680" cy="4389120"/>
-          </a:xfrm>
-          <a:prstGeom prst="roundRect">
-            <a:avLst/>
-          </a:prstGeom>
-          <a:solidFill>
-            <a:srgbClr val="FFFFFF"/>
-          </a:solidFill>
-          <a:ln w="19050">
-            <a:solidFill>
-              <a:srgbClr val="B45309"/>
-            </a:solidFill>
-          </a:ln>
-        </p:spPr>
-        <p:style>
-          <a:lnRef idx="1">
-            <a:schemeClr val="accent1"/>
-          </a:lnRef>
-          <a:fillRef idx="3">
-            <a:schemeClr val="accent1"/>
-          </a:fillRef>
-          <a:effectRef idx="2">
-            <a:schemeClr val="accent1"/>
-          </a:effectRef>
-          <a:fontRef idx="minor">
-            <a:schemeClr val="lt1"/>
-          </a:fontRef>
-        </p:style>
-        <p:txBody>
-          <a:bodyPr rtlCol="0" anchor="ctr" wrap="square" lIns="182880" rIns="182880" tIns="164592" bIns="164592"/>
-          <a:lstStyle/>
-          <a:p>
-            <a:pPr algn="ctr"/>
-          </a:p>
-          <a:p>
-            <a:pPr>
-              <a:spcAft>
-                <a:spcPts val="100"/>
-              </a:spcAft>
-              <a:defRPr sz="1100" b="1">
-                <a:solidFill>
-                  <a:srgbClr val="B45309"/>
-                </a:solidFill>
-                <a:latin typeface="IBM Plex Mono"/>
-              </a:defRPr>
-            </a:pPr>
-            <a:r>
-              <a:t>STEP 3</a:t>
-            </a:r>
-          </a:p>
-          <a:p>
-            <a:pPr>
-              <a:spcAft>
-                <a:spcPts val="800"/>
-              </a:spcAft>
-              <a:defRPr sz="1300" b="1">
-                <a:solidFill>
-                  <a:srgbClr val="0F172A"/>
-                </a:solidFill>
-                <a:latin typeface="IBM Plex Mono"/>
-              </a:defRPr>
-            </a:pPr>
-            <a:r>
-              <a:t>Academic Goal Math</a:t>
-            </a:r>
-          </a:p>
-          <a:p>
-            <a:pPr>
-              <a:spcAft>
-                <a:spcPts val="600"/>
-              </a:spcAft>
-              <a:defRPr sz="1000" b="0">
-                <a:solidFill>
-                  <a:srgbClr val="334155"/>
-                </a:solidFill>
-                <a:latin typeface="Arial"/>
-              </a:defRPr>
-            </a:pPr>
-            <a:r>
-              <a:t>• Enters Unit Test scores (24/40 in Maths)</a:t>
-            </a:r>
-          </a:p>
-          <a:p>
-            <a:pPr>
-              <a:spcAft>
-                <a:spcPts val="600"/>
-              </a:spcAft>
-              <a:defRPr sz="1000" b="0">
-                <a:solidFill>
-                  <a:srgbClr val="334155"/>
-                </a:solidFill>
-                <a:latin typeface="Arial"/>
-              </a:defRPr>
-            </a:pPr>
-            <a:r>
-              <a:t>• Adjusts target SGPA slider (e.g. 8.50)</a:t>
-            </a:r>
-          </a:p>
-          <a:p>
-            <a:pPr>
-              <a:spcAft>
-                <a:spcPts val="600"/>
-              </a:spcAft>
-              <a:defRPr sz="1000" b="0">
-                <a:solidFill>
-                  <a:srgbClr val="334155"/>
-                </a:solidFill>
-                <a:latin typeface="Arial"/>
-              </a:defRPr>
-            </a:pPr>
-            <a:r>
-              <a:t>• Engine locks mathematically impossible grades</a:t>
-            </a:r>
-          </a:p>
-          <a:p>
-            <a:pPr>
-              <a:spcAft>
-                <a:spcPts val="600"/>
-              </a:spcAft>
-              <a:defRPr sz="1000" b="0">
-                <a:solidFill>
-                  <a:srgbClr val="334155"/>
-                </a:solidFill>
-                <a:latin typeface="Arial"/>
-              </a:defRPr>
-            </a:pPr>
-            <a:r>
-              <a:t>• Calculates exact End-Sem score needed (56/60)</a:t>
-            </a:r>
-          </a:p>
-        </p:txBody>
-      </p:sp>
-      <p:sp>
-        <p:nvSpPr>
-          <p:cNvPr id="154" name="Rounded Rectangle 153"/>
-          <p:cNvSpPr/>
-          <p:nvPr/>
-        </p:nvSpPr>
-        <p:spPr>
-          <a:xfrm>
-            <a:off x="10927080" y="1691640"/>
-            <a:ext cx="3154680" cy="4389120"/>
-          </a:xfrm>
-          <a:prstGeom prst="roundRect">
-            <a:avLst/>
-          </a:prstGeom>
-          <a:solidFill>
-            <a:srgbClr val="FFFFFF"/>
-          </a:solidFill>
-          <a:ln w="19050">
-            <a:solidFill>
-              <a:srgbClr val="6D28D9"/>
-            </a:solidFill>
-          </a:ln>
-        </p:spPr>
-        <p:style>
-          <a:lnRef idx="1">
-            <a:schemeClr val="accent1"/>
-          </a:lnRef>
-          <a:fillRef idx="3">
-            <a:schemeClr val="accent1"/>
-          </a:fillRef>
-          <a:effectRef idx="2">
-            <a:schemeClr val="accent1"/>
-          </a:effectRef>
-          <a:fontRef idx="minor">
-            <a:schemeClr val="lt1"/>
-          </a:fontRef>
-        </p:style>
-        <p:txBody>
-          <a:bodyPr rtlCol="0" anchor="ctr" wrap="square" lIns="182880" rIns="182880" tIns="164592" bIns="164592"/>
-          <a:lstStyle/>
-          <a:p>
-            <a:pPr algn="ctr"/>
-          </a:p>
-          <a:p>
-            <a:pPr>
-              <a:spcAft>
-                <a:spcPts val="100"/>
-              </a:spcAft>
-              <a:defRPr sz="1100" b="1">
-                <a:solidFill>
-                  <a:srgbClr val="6D28D9"/>
-                </a:solidFill>
-                <a:latin typeface="IBM Plex Mono"/>
-              </a:defRPr>
-            </a:pPr>
-            <a:r>
-              <a:t>STEP 4</a:t>
-            </a:r>
-          </a:p>
-          <a:p>
-            <a:pPr>
-              <a:spcAft>
-                <a:spcPts val="800"/>
-              </a:spcAft>
-              <a:defRPr sz="1300" b="1">
-                <a:solidFill>
-                  <a:srgbClr val="0F172A"/>
-                </a:solidFill>
-                <a:latin typeface="IBM Plex Mono"/>
-              </a:defRPr>
-            </a:pPr>
-            <a:r>
-              <a:t>Peer Barter &amp; Ride</a:t>
-            </a:r>
-          </a:p>
-          <a:p>
-            <a:pPr>
-              <a:spcAft>
-                <a:spcPts val="600"/>
-              </a:spcAft>
-              <a:defRPr sz="1000" b="0">
-                <a:solidFill>
-                  <a:srgbClr val="334155"/>
-                </a:solidFill>
-                <a:latin typeface="Arial"/>
-              </a:defRPr>
-            </a:pPr>
-            <a:r>
-              <a:t>• Alert flags vulnerable Mechanics grade</a:t>
-            </a:r>
-          </a:p>
-          <a:p>
-            <a:pPr>
-              <a:spcAft>
-                <a:spcPts val="600"/>
-              </a:spcAft>
-              <a:defRPr sz="1000" b="0">
-                <a:solidFill>
-                  <a:srgbClr val="334155"/>
-                </a:solidFill>
-                <a:latin typeface="Arial"/>
-              </a:defRPr>
-            </a:pPr>
-            <a:r>
-              <a:t>• Books 1-on-1 session with senior tutor</a:t>
-            </a:r>
-          </a:p>
-          <a:p>
-            <a:pPr>
-              <a:spcAft>
-                <a:spcPts val="600"/>
-              </a:spcAft>
-              <a:defRPr sz="1000" b="0">
-                <a:solidFill>
-                  <a:srgbClr val="334155"/>
-                </a:solidFill>
-                <a:latin typeface="Arial"/>
-              </a:defRPr>
-            </a:pPr>
-            <a:r>
-              <a:t>• Spends 1 Time-Credit (1h teach = 1 credit)</a:t>
-            </a:r>
-          </a:p>
-          <a:p>
-            <a:pPr>
-              <a:spcAft>
-                <a:spcPts val="600"/>
-              </a:spcAft>
-              <a:defRPr sz="1000" b="0">
-                <a:solidFill>
-                  <a:srgbClr val="334155"/>
-                </a:solidFill>
-                <a:latin typeface="Arial"/>
-              </a:defRPr>
-            </a:pPr>
-            <a:r>
-              <a:t>• Requests carpool seat from Kurla station</a:t>
-            </a:r>
-          </a:p>
-        </p:txBody>
-      </p:sp>
-      <p:sp>
-        <p:nvSpPr>
-          <p:cNvPr id="155" name="Rounded Rectangle 154"/>
-          <p:cNvSpPr/>
-          <p:nvPr/>
-        </p:nvSpPr>
-        <p:spPr>
-          <a:xfrm>
-            <a:off x="14264640" y="1691640"/>
-            <a:ext cx="3154680" cy="4389120"/>
-          </a:xfrm>
-          <a:prstGeom prst="roundRect">
-            <a:avLst/>
-          </a:prstGeom>
-          <a:solidFill>
-            <a:srgbClr val="FFFFFF"/>
-          </a:solidFill>
-          <a:ln w="19050">
-            <a:solidFill>
-              <a:srgbClr val="BE123C"/>
-            </a:solidFill>
-          </a:ln>
-        </p:spPr>
-        <p:style>
-          <a:lnRef idx="1">
-            <a:schemeClr val="accent1"/>
-          </a:lnRef>
-          <a:fillRef idx="3">
-            <a:schemeClr val="accent1"/>
-          </a:fillRef>
-          <a:effectRef idx="2">
-            <a:schemeClr val="accent1"/>
-          </a:effectRef>
-          <a:fontRef idx="minor">
-            <a:schemeClr val="lt1"/>
-          </a:fontRef>
-        </p:style>
-        <p:txBody>
-          <a:bodyPr rtlCol="0" anchor="ctr" wrap="square" lIns="182880" rIns="182880" tIns="164592" bIns="164592"/>
-          <a:lstStyle/>
-          <a:p>
-            <a:pPr algn="ctr"/>
-          </a:p>
-          <a:p>
-            <a:pPr>
-              <a:spcAft>
-                <a:spcPts val="100"/>
-              </a:spcAft>
-              <a:defRPr sz="1100" b="1">
-                <a:solidFill>
-                  <a:srgbClr val="BE123C"/>
-                </a:solidFill>
-                <a:latin typeface="IBM Plex Mono"/>
-              </a:defRPr>
-            </a:pPr>
-            <a:r>
-              <a:t>STEP 5</a:t>
-            </a:r>
-          </a:p>
-          <a:p>
-            <a:pPr>
-              <a:spcAft>
-                <a:spcPts val="800"/>
-              </a:spcAft>
-              <a:defRPr sz="1300" b="1">
-                <a:solidFill>
-                  <a:srgbClr val="0F172A"/>
-                </a:solidFill>
-                <a:latin typeface="IBM Plex Mono"/>
-              </a:defRPr>
-            </a:pPr>
-            <a:r>
-              <a:t>Spirit Challenge</a:t>
-            </a:r>
-          </a:p>
-          <a:p>
-            <a:pPr>
-              <a:spcAft>
-                <a:spcPts val="600"/>
-              </a:spcAft>
-              <a:defRPr sz="1000" b="0">
-                <a:solidFill>
-                  <a:srgbClr val="334155"/>
-                </a:solidFill>
-                <a:latin typeface="Arial"/>
-              </a:defRPr>
-            </a:pPr>
-            <a:r>
-              <a:t>• Division completes Genesis Hackathon task</a:t>
-            </a:r>
-          </a:p>
-          <a:p>
-            <a:pPr>
-              <a:spcAft>
-                <a:spcPts val="600"/>
-              </a:spcAft>
-              <a:defRPr sz="1000" b="0">
-                <a:solidFill>
-                  <a:srgbClr val="334155"/>
-                </a:solidFill>
-                <a:latin typeface="Arial"/>
-              </a:defRPr>
-            </a:pPr>
-            <a:r>
-              <a:t>• Submits verification proof link</a:t>
-            </a:r>
-          </a:p>
-          <a:p>
-            <a:pPr>
-              <a:spcAft>
-                <a:spcPts val="600"/>
-              </a:spcAft>
-              <a:defRPr sz="1000" b="0">
-                <a:solidFill>
-                  <a:srgbClr val="334155"/>
-                </a:solidFill>
-                <a:latin typeface="Arial"/>
-              </a:defRPr>
-            </a:pPr>
-            <a:r>
-              <a:t>• Division D4B earns 500 leaderboard points</a:t>
-            </a:r>
-          </a:p>
-          <a:p>
-            <a:pPr>
-              <a:spcAft>
-                <a:spcPts val="600"/>
-              </a:spcAft>
-              <a:defRPr sz="1000" b="0">
-                <a:solidFill>
-                  <a:srgbClr val="334155"/>
-                </a:solidFill>
-                <a:latin typeface="Arial"/>
-              </a:defRPr>
-            </a:pPr>
-            <a:r>
-              <a:t>• Division rank updates live on Spirit Board</a:t>
-            </a:r>
-          </a:p>
-        </p:txBody>
-      </p:sp>
-      <p:sp>
-        <p:nvSpPr>
-          <p:cNvPr id="156" name="Rounded Rectangle 155"/>
-          <p:cNvSpPr/>
-          <p:nvPr/>
-        </p:nvSpPr>
-        <p:spPr>
-          <a:xfrm>
-            <a:off x="914400" y="6309360"/>
-            <a:ext cx="16459200" cy="1874519"/>
-          </a:xfrm>
-          <a:prstGeom prst="roundRect">
-            <a:avLst/>
-          </a:prstGeom>
-          <a:solidFill>
-            <a:srgbClr val="F8FAFC"/>
-          </a:solidFill>
-          <a:ln w="19050">
-            <a:solidFill>
-              <a:srgbClr val="4338CA"/>
-            </a:solidFill>
-          </a:ln>
-        </p:spPr>
-        <p:style>
-          <a:lnRef idx="1">
-            <a:schemeClr val="accent1"/>
-          </a:lnRef>
-          <a:fillRef idx="3">
-            <a:schemeClr val="accent1"/>
-          </a:fillRef>
-          <a:effectRef idx="2">
-            <a:schemeClr val="accent1"/>
-          </a:effectRef>
-          <a:fontRef idx="minor">
-            <a:schemeClr val="lt1"/>
-          </a:fontRef>
-        </p:style>
-        <p:txBody>
-          <a:bodyPr rtlCol="0" anchor="ctr" wrap="square" lIns="182880" rIns="182880" tIns="164592" bIns="164592"/>
-          <a:lstStyle/>
-          <a:p>
-            <a:pPr algn="ctr"/>
-          </a:p>
-          <a:p>
-            <a:pPr>
-              <a:spcAft>
-                <a:spcPts val="400"/>
-              </a:spcAft>
-              <a:defRPr sz="1300" b="1">
-                <a:solidFill>
-                  <a:srgbClr val="4338CA"/>
-                </a:solidFill>
-                <a:latin typeface="IBM Plex Mono"/>
-              </a:defRPr>
-            </a:pPr>
-            <a:r>
-              <a:t>WORKING PROTOTYPE &amp; LIVE DEMO VERIFICATION</a:t>
-            </a:r>
-          </a:p>
-          <a:p>
-            <a:pPr>
-              <a:spcAft>
-                <a:spcPts val="300"/>
-              </a:spcAft>
-              <a:defRPr sz="1100" b="1">
-                <a:solidFill>
-                  <a:srgbClr val="0F172A"/>
-                </a:solidFill>
-                <a:latin typeface="Arial"/>
-              </a:defRPr>
-            </a:pPr>
-            <a:r>
-              <a:t>• Fully Functional Application: Production-ready React 19 web companion running live at http://localhost:5173/</a:t>
-            </a:r>
-          </a:p>
-          <a:p>
-            <a:pPr>
-              <a:spcAft>
-                <a:spcPts val="300"/>
-              </a:spcAft>
-              <a:defRPr sz="1050" b="0">
-                <a:solidFill>
-                  <a:srgbClr val="334155"/>
-                </a:solidFill>
-                <a:latin typeface="Arial"/>
-              </a:defRPr>
-            </a:pPr>
-            <a:r>
-              <a:t>• Complete PS-02 Compliance: All 8 core problem statement modules implemented with real VESIT data (12 divisions, Sem 1 official timetable, MiniMoth auth).</a:t>
-            </a:r>
-          </a:p>
-          <a:p>
-            <a:pPr>
-              <a:spcAft>
-                <a:spcPts val="200"/>
-              </a:spcAft>
-              <a:defRPr sz="1050" b="0">
-                <a:solidFill>
-                  <a:srgbClr val="334155"/>
-                </a:solidFill>
-                <a:latin typeface="Arial"/>
-              </a:defRPr>
-            </a:pPr>
-            <a:r>
-              <a:t>• Zero Errors Build: Built and verified via 'npm run build' with zero TypeScript compilation warnings or layout errors.</a:t>
-            </a:r>
-          </a:p>
-        </p:txBody>
       </p:sp>
     </p:spTree>
   </p:cSld>
@@ -15464,7 +14664,7 @@
     </p:bg>
     <p:spTree>
       <p:nvGrpSpPr>
-        <p:cNvPr id="154" name="Shape 154"/>
+        <p:cNvPr id="158" name="Shape 158"/>
         <p:cNvGrpSpPr/>
         <p:nvPr/>
       </p:nvGrpSpPr>
@@ -15478,7 +14678,7 @@
       </p:grpSpPr>
       <p:grpSp>
         <p:nvGrpSpPr>
-          <p:cNvPr id="155" name="Google Shape;155;p17"/>
+          <p:cNvPr id="159" name="Google Shape;159;p17"/>
           <p:cNvGrpSpPr/>
           <p:nvPr/>
         </p:nvGrpSpPr>
@@ -15492,7 +14692,7 @@
         </p:grpSpPr>
         <p:sp>
           <p:nvSpPr>
-            <p:cNvPr id="156" name="Google Shape;156;p17"/>
+            <p:cNvPr id="160" name="Google Shape;160;p17"/>
             <p:cNvSpPr/>
             <p:nvPr/>
           </p:nvSpPr>
@@ -15522,7 +14722,7 @@
               </a:pathLst>
             </a:custGeom>
             <a:solidFill>
-              <a:srgbClr val="9F2F24"/>
+              <a:srgbClr val="21436F"/>
             </a:solidFill>
             <a:ln>
               <a:noFill/>
@@ -15531,7 +14731,7 @@
         </p:sp>
         <p:sp>
           <p:nvSpPr>
-            <p:cNvPr id="157" name="Google Shape;157;p17"/>
+            <p:cNvPr id="161" name="Google Shape;161;p17"/>
             <p:cNvSpPr txBox="1"/>
             <p:nvPr/>
           </p:nvSpPr>
@@ -15584,14 +14784,14 @@
       </p:grpSp>
       <p:sp>
         <p:nvSpPr>
-          <p:cNvPr id="158" name="Google Shape;158;p17"/>
+          <p:cNvPr id="162" name="Google Shape;162;p17"/>
           <p:cNvSpPr txBox="1"/>
           <p:nvPr/>
         </p:nvSpPr>
         <p:spPr>
           <a:xfrm>
-            <a:off x="3406676" y="383756"/>
-            <a:ext cx="11474648" cy="1037623"/>
+            <a:off x="4095304" y="389964"/>
+            <a:ext cx="10097393" cy="1037623"/>
           </a:xfrm>
           <a:prstGeom prst="rect">
             <a:avLst/>
@@ -15629,7 +14829,7 @@
                 <a:cs typeface="IBM Plex Mono"/>
                 <a:sym typeface="IBM Plex Mono"/>
               </a:rPr>
-              <a:t>FUTURE SCOPE &amp; REFERENCES</a:t>
+              <a:t>IMPORTANT INSTRUCTIONS</a:t>
             </a:r>
             <a:endParaRPr/>
           </a:p>
@@ -15637,14 +14837,14 @@
       </p:sp>
       <p:sp>
         <p:nvSpPr>
-          <p:cNvPr id="159" name="Google Shape;159;p17"/>
+          <p:cNvPr id="163" name="Google Shape;163;p17"/>
           <p:cNvSpPr txBox="1"/>
           <p:nvPr/>
         </p:nvSpPr>
         <p:spPr>
           <a:xfrm>
-            <a:off x="1028700" y="1911027"/>
-            <a:ext cx="15699934" cy="2980690"/>
+            <a:off x="837641" y="2365142"/>
+            <a:ext cx="15699900" cy="4185900"/>
           </a:xfrm>
           <a:prstGeom prst="rect">
             <a:avLst/>
@@ -15674,9 +14874,42 @@
                 <a:srgbClr val="000000"/>
               </a:buClr>
               <a:buSzPts val="3399"/>
-              <a:buFont typeface="Arial"/>
-              <a:buChar char="•"/>
+              <a:buFont typeface="Libre Baskerville"/>
+              <a:buAutoNum type="arabicPeriod"/>
             </a:pPr>
+            <a:r>
+              <a:rPr b="0" i="0" lang="en-US" sz="3399" u="none" cap="none" strike="noStrike">
+                <a:solidFill>
+                  <a:srgbClr val="000000"/>
+                </a:solidFill>
+                <a:latin typeface="Libre Baskerville"/>
+                <a:ea typeface="Libre Baskerville"/>
+                <a:cs typeface="Libre Baskerville"/>
+                <a:sym typeface="Libre Baskerville"/>
+              </a:rPr>
+              <a:t>Maximum </a:t>
+            </a:r>
+            <a:r>
+              <a:rPr lang="en-US" sz="3399">
+                <a:latin typeface="Libre Baskerville"/>
+                <a:ea typeface="Libre Baskerville"/>
+                <a:cs typeface="Libre Baskerville"/>
+                <a:sym typeface="Libre Baskerville"/>
+              </a:rPr>
+              <a:t>4</a:t>
+            </a:r>
+            <a:r>
+              <a:rPr b="0" i="0" lang="en-US" sz="3399" u="none" cap="none" strike="noStrike">
+                <a:solidFill>
+                  <a:srgbClr val="000000"/>
+                </a:solidFill>
+                <a:latin typeface="Libre Baskerville"/>
+                <a:ea typeface="Libre Baskerville"/>
+                <a:cs typeface="Libre Baskerville"/>
+                <a:sym typeface="Libre Baskerville"/>
+              </a:rPr>
+              <a:t> slides only (excluding this slide)</a:t>
+            </a:r>
             <a:endParaRPr/>
           </a:p>
           <a:p>
@@ -15694,13 +14927,25 @@
                 <a:srgbClr val="000000"/>
               </a:buClr>
               <a:buSzPts val="3399"/>
-              <a:buFont typeface="Arial"/>
-              <a:buChar char="•"/>
+              <a:buFont typeface="Libre Baskerville"/>
+              <a:buAutoNum type="arabicPeriod"/>
             </a:pPr>
+            <a:r>
+              <a:rPr b="0" i="0" lang="en-US" sz="3399" u="none" cap="none" strike="noStrike">
+                <a:solidFill>
+                  <a:srgbClr val="000000"/>
+                </a:solidFill>
+                <a:latin typeface="Libre Baskerville"/>
+                <a:ea typeface="Libre Baskerville"/>
+                <a:cs typeface="Libre Baskerville"/>
+                <a:sym typeface="Libre Baskerville"/>
+              </a:rPr>
+              <a:t>Do not change slide order or headings</a:t>
+            </a:r>
             <a:endParaRPr/>
           </a:p>
           <a:p>
-            <a:pPr indent="0" lvl="0" marL="0" marR="0" rtl="0" algn="just">
+            <a:pPr indent="-367030" lvl="1" marL="734059" marR="0" rtl="0" algn="l">
               <a:lnSpc>
                 <a:spcPct val="140011"/>
               </a:lnSpc>
@@ -15710,125 +14955,128 @@
               <a:spcAft>
                 <a:spcPts val="0"/>
               </a:spcAft>
-              <a:buNone/>
+              <a:buClr>
+                <a:srgbClr val="000000"/>
+              </a:buClr>
+              <a:buSzPts val="3399"/>
+              <a:buFont typeface="Libre Baskerville"/>
+              <a:buAutoNum type="arabicPeriod"/>
             </a:pPr>
-            <a:endParaRPr b="0" i="0" sz="3399" u="none" cap="none" strike="noStrike">
-              <a:solidFill>
+            <a:r>
+              <a:rPr b="0" i="0" lang="en-US" sz="3399" u="none" cap="none" strike="noStrike">
+                <a:solidFill>
+                  <a:srgbClr val="000000"/>
+                </a:solidFill>
+                <a:latin typeface="Libre Baskerville"/>
+                <a:ea typeface="Libre Baskerville"/>
+                <a:cs typeface="Libre Baskerville"/>
+                <a:sym typeface="Libre Baskerville"/>
+              </a:rPr>
+              <a:t>Avoid long paragraphs</a:t>
+            </a:r>
+            <a:endParaRPr/>
+          </a:p>
+          <a:p>
+            <a:pPr indent="-367030" lvl="1" marL="734059" marR="0" rtl="0" algn="l">
+              <a:lnSpc>
+                <a:spcPct val="140011"/>
+              </a:lnSpc>
+              <a:spcBef>
+                <a:spcPts val="0"/>
+              </a:spcBef>
+              <a:spcAft>
+                <a:spcPts val="0"/>
+              </a:spcAft>
+              <a:buClr>
                 <a:srgbClr val="000000"/>
-              </a:solidFill>
-              <a:latin typeface="Libre Baskerville"/>
-              <a:ea typeface="Libre Baskerville"/>
-              <a:cs typeface="Libre Baskerville"/>
-              <a:sym typeface="Libre Baskerville"/>
-            </a:endParaRPr>
+              </a:buClr>
+              <a:buSzPts val="3399"/>
+              <a:buFont typeface="Libre Baskerville"/>
+              <a:buAutoNum type="arabicPeriod"/>
+            </a:pPr>
+            <a:r>
+              <a:rPr b="0" i="0" lang="en-US" sz="3399" u="none" cap="none" strike="noStrike">
+                <a:solidFill>
+                  <a:srgbClr val="000000"/>
+                </a:solidFill>
+                <a:latin typeface="Libre Baskerville"/>
+                <a:ea typeface="Libre Baskerville"/>
+                <a:cs typeface="Libre Baskerville"/>
+                <a:sym typeface="Libre Baskerville"/>
+              </a:rPr>
+              <a:t>Use bullets, diagrams, images, flowcharts</a:t>
+            </a:r>
+            <a:endParaRPr/>
           </a:p>
-        </p:txBody>
-      </p:sp>
-      <p:sp>
-        <p:nvSpPr>
-          <p:cNvPr id="160" name="Google Shape;160;p17"/>
-          <p:cNvSpPr/>
-          <p:nvPr/>
-        </p:nvSpPr>
-        <p:spPr>
-          <a:xfrm>
-            <a:off x="2601885" y="1463560"/>
-            <a:ext cx="13084230" cy="7359879"/>
-          </a:xfrm>
-          <a:custGeom>
-            <a:rect b="b" l="l" r="r" t="t"/>
-            <a:pathLst>
-              <a:path extrusionOk="0" h="7359879" w="13084230">
-                <a:moveTo>
-                  <a:pt x="0" y="0"/>
-                </a:moveTo>
-                <a:lnTo>
-                  <a:pt x="13084230" y="0"/>
-                </a:lnTo>
-                <a:lnTo>
-                  <a:pt x="13084230" y="7359880"/>
-                </a:lnTo>
-                <a:lnTo>
-                  <a:pt x="0" y="7359880"/>
-                </a:lnTo>
-                <a:lnTo>
-                  <a:pt x="0" y="0"/>
-                </a:lnTo>
-                <a:close/>
-              </a:path>
-            </a:pathLst>
-          </a:custGeom>
-          <a:blipFill rotWithShape="1">
-            <a:blip r:embed="rId3">
-              <a:alphaModFix amt="5000"/>
-            </a:blip>
-            <a:stretch>
-              <a:fillRect b="0" l="0" r="0" t="0"/>
-            </a:stretch>
-          </a:blipFill>
-          <a:ln>
-            <a:noFill/>
-          </a:ln>
-        </p:spPr>
-        <p:txBody>
-          <a:bodyPr/>
-          <a:p/>
-        </p:txBody>
-      </p:sp>
-      <p:sp>
-        <p:nvSpPr>
-          <p:cNvPr id="161" name="Google Shape;161;p17"/>
-          <p:cNvSpPr/>
-          <p:nvPr/>
-        </p:nvSpPr>
-        <p:spPr>
-          <a:xfrm>
-            <a:off x="16367044" y="118562"/>
-            <a:ext cx="2229573" cy="1254135"/>
-          </a:xfrm>
-          <a:custGeom>
-            <a:rect b="b" l="l" r="r" t="t"/>
-            <a:pathLst>
-              <a:path extrusionOk="0" h="1254135" w="2229573">
-                <a:moveTo>
-                  <a:pt x="0" y="0"/>
-                </a:moveTo>
-                <a:lnTo>
-                  <a:pt x="2229573" y="0"/>
-                </a:lnTo>
-                <a:lnTo>
-                  <a:pt x="2229573" y="1254135"/>
-                </a:lnTo>
-                <a:lnTo>
-                  <a:pt x="0" y="1254135"/>
-                </a:lnTo>
-                <a:lnTo>
-                  <a:pt x="0" y="0"/>
-                </a:lnTo>
-                <a:close/>
-              </a:path>
-            </a:pathLst>
-          </a:custGeom>
-          <a:blipFill rotWithShape="1">
-            <a:blip r:embed="rId3">
-              <a:alphaModFix/>
-            </a:blip>
-            <a:stretch>
-              <a:fillRect b="0" l="0" r="0" t="0"/>
-            </a:stretch>
-          </a:blipFill>
-          <a:ln>
-            <a:noFill/>
-          </a:ln>
-        </p:spPr>
-        <p:txBody>
-          <a:bodyPr/>
-          <a:p/>
+          <a:p>
+            <a:pPr indent="-367030" lvl="1" marL="734059" marR="0" rtl="0" algn="l">
+              <a:lnSpc>
+                <a:spcPct val="140011"/>
+              </a:lnSpc>
+              <a:spcBef>
+                <a:spcPts val="0"/>
+              </a:spcBef>
+              <a:spcAft>
+                <a:spcPts val="0"/>
+              </a:spcAft>
+              <a:buClr>
+                <a:srgbClr val="000000"/>
+              </a:buClr>
+              <a:buSzPts val="3399"/>
+              <a:buFont typeface="Libre Baskerville"/>
+              <a:buAutoNum type="arabicPeriod"/>
+            </a:pPr>
+            <a:r>
+              <a:rPr b="0" i="0" lang="en-US" sz="3399" u="none" cap="none" strike="noStrike">
+                <a:solidFill>
+                  <a:srgbClr val="000000"/>
+                </a:solidFill>
+                <a:latin typeface="Libre Baskerville"/>
+                <a:ea typeface="Libre Baskerville"/>
+                <a:cs typeface="Libre Baskerville"/>
+                <a:sym typeface="Libre Baskerville"/>
+              </a:rPr>
+              <a:t>PPT must be original work of the team</a:t>
+            </a:r>
+            <a:endParaRPr/>
+          </a:p>
+          <a:p>
+            <a:pPr indent="-367030" lvl="1" marL="734059" marR="0" rtl="0" algn="l">
+              <a:lnSpc>
+                <a:spcPct val="140011"/>
+              </a:lnSpc>
+              <a:spcBef>
+                <a:spcPts val="0"/>
+              </a:spcBef>
+              <a:spcAft>
+                <a:spcPts val="0"/>
+              </a:spcAft>
+              <a:buClr>
+                <a:srgbClr val="000000"/>
+              </a:buClr>
+              <a:buSzPts val="3399"/>
+              <a:buFont typeface="Libre Baskerville"/>
+              <a:buAutoNum type="arabicPeriod"/>
+            </a:pPr>
+            <a:r>
+              <a:rPr b="0" i="0" lang="en-US" sz="3399" u="none" cap="none" strike="noStrike">
+                <a:solidFill>
+                  <a:srgbClr val="000000"/>
+                </a:solidFill>
+                <a:latin typeface="Libre Baskerville"/>
+                <a:ea typeface="Libre Baskerville"/>
+                <a:cs typeface="Libre Baskerville"/>
+                <a:sym typeface="Libre Baskerville"/>
+              </a:rPr>
+              <a:t>File name format: TeamName_Genesis2.0_FE/SE/TE/BE/MCA</a:t>
+            </a:r>
+            <a:endParaRPr/>
+          </a:p>
         </p:txBody>
       </p:sp>
       <p:grpSp>
         <p:nvGrpSpPr>
-          <p:cNvPr id="162" name="Google Shape;162;p17"/>
+          <p:cNvPr id="164" name="Google Shape;164;p17"/>
           <p:cNvGrpSpPr/>
           <p:nvPr/>
         </p:nvGrpSpPr>
@@ -15842,7 +15090,7 @@
         </p:grpSpPr>
         <p:grpSp>
           <p:nvGrpSpPr>
-            <p:cNvPr id="163" name="Google Shape;163;p17"/>
+            <p:cNvPr id="165" name="Google Shape;165;p17"/>
             <p:cNvGrpSpPr/>
             <p:nvPr/>
           </p:nvGrpSpPr>
@@ -15856,7 +15104,7 @@
           </p:grpSpPr>
           <p:sp>
             <p:nvSpPr>
-              <p:cNvPr id="164" name="Google Shape;164;p17"/>
+              <p:cNvPr id="166" name="Google Shape;166;p17"/>
               <p:cNvSpPr/>
               <p:nvPr/>
             </p:nvSpPr>
@@ -15927,7 +15175,7 @@
           </p:sp>
           <p:sp>
             <p:nvSpPr>
-              <p:cNvPr id="165" name="Google Shape;165;p17"/>
+              <p:cNvPr id="167" name="Google Shape;167;p17"/>
               <p:cNvSpPr txBox="1"/>
               <p:nvPr/>
             </p:nvSpPr>
@@ -15980,7 +15228,7 @@
         </p:grpSp>
         <p:sp>
           <p:nvSpPr>
-            <p:cNvPr id="166" name="Google Shape;166;p17"/>
+            <p:cNvPr id="168" name="Google Shape;168;p17"/>
             <p:cNvSpPr/>
             <p:nvPr/>
           </p:nvSpPr>
@@ -16013,7 +15261,7 @@
               </a:pathLst>
             </a:custGeom>
             <a:blipFill rotWithShape="1">
-              <a:blip r:embed="rId4">
+              <a:blip r:embed="rId3">
                 <a:alphaModFix/>
               </a:blip>
               <a:stretch>
@@ -16028,844 +15276,30 @@
       </p:grpSp>
       <p:sp>
         <p:nvSpPr>
-          <p:cNvPr id="167" name="Rounded Rectangle 166"/>
+          <p:cNvPr id="169" name="Google Shape;169;p17"/>
           <p:cNvSpPr/>
           <p:nvPr/>
         </p:nvSpPr>
         <p:spPr>
           <a:xfrm>
-            <a:off x="914400" y="1691640"/>
-            <a:ext cx="8046720" cy="6492240"/>
-          </a:xfrm>
-          <a:prstGeom prst="roundRect">
-            <a:avLst/>
-          </a:prstGeom>
-          <a:solidFill>
-            <a:srgbClr val="FFFFFF"/>
-          </a:solidFill>
-          <a:ln w="19050">
-            <a:solidFill>
-              <a:srgbClr val="E2E8F0"/>
-            </a:solidFill>
-          </a:ln>
-        </p:spPr>
-        <p:style>
-          <a:lnRef idx="1">
-            <a:schemeClr val="accent1"/>
-          </a:lnRef>
-          <a:fillRef idx="3">
-            <a:schemeClr val="accent1"/>
-          </a:fillRef>
-          <a:effectRef idx="2">
-            <a:schemeClr val="accent1"/>
-          </a:effectRef>
-          <a:fontRef idx="minor">
-            <a:schemeClr val="lt1"/>
-          </a:fontRef>
-        </p:style>
-        <p:txBody>
-          <a:bodyPr rtlCol="0" anchor="ctr" wrap="square" lIns="182880" rIns="182880" tIns="164592" bIns="164592"/>
-          <a:lstStyle/>
-          <a:p>
-            <a:pPr algn="ctr"/>
-          </a:p>
-          <a:p>
-            <a:pPr>
-              <a:spcAft>
-                <a:spcPts val="1000"/>
-              </a:spcAft>
-              <a:defRPr sz="1500" b="1">
-                <a:solidFill>
-                  <a:srgbClr val="4338CA"/>
-                </a:solidFill>
-                <a:latin typeface="IBM Plex Mono"/>
-              </a:defRPr>
-            </a:pPr>
-            <a:r>
-              <a:t>FUTURE SCOPE &amp; PRODUCT ROADMAP</a:t>
-            </a:r>
-          </a:p>
-          <a:p>
-            <a:pPr>
-              <a:spcAft>
-                <a:spcPts val="200"/>
-              </a:spcAft>
-              <a:defRPr sz="1200" b="1">
-                <a:solidFill>
-                  <a:srgbClr val="0F172A"/>
-                </a:solidFill>
-                <a:latin typeface="Arial"/>
-              </a:defRPr>
-            </a:pPr>
-            <a:r>
-              <a:t>1. Mobile Native App via Capacitor / PWA</a:t>
-            </a:r>
-          </a:p>
-          <a:p>
-            <a:pPr>
-              <a:spcAft>
-                <a:spcPts val="800"/>
-              </a:spcAft>
-              <a:defRPr sz="1050" b="0">
-                <a:solidFill>
-                  <a:srgbClr val="334155"/>
-                </a:solidFill>
-                <a:latin typeface="Arial"/>
-              </a:defRPr>
-            </a:pPr>
-            <a:r>
-              <a:t>• Packaging the web application into lightweight Android/iOS apps with offline timetable caching, lock-screen widgets, and push notifications 15 minutes before lectures.</a:t>
-            </a:r>
-          </a:p>
-          <a:p>
-            <a:pPr>
-              <a:spcAft>
-                <a:spcPts val="200"/>
-              </a:spcAft>
-              <a:defRPr sz="1200" b="1">
-                <a:solidFill>
-                  <a:srgbClr val="0F172A"/>
-                </a:solidFill>
-                <a:latin typeface="Arial"/>
-              </a:defRPr>
-            </a:pPr>
-            <a:r>
-              <a:t>2. College ERP &amp; MIS Portal Integration</a:t>
-            </a:r>
-          </a:p>
-          <a:p>
-            <a:pPr>
-              <a:spcAft>
-                <a:spcPts val="800"/>
-              </a:spcAft>
-              <a:defRPr sz="1050" b="0">
-                <a:solidFill>
-                  <a:srgbClr val="334155"/>
-                </a:solidFill>
-                <a:latin typeface="Arial"/>
-              </a:defRPr>
-            </a:pPr>
-            <a:r>
-              <a:t>• Direct API integration with college academic systems to automatically pull attendance percentages and unit test marks without manual student data entry.</a:t>
-            </a:r>
-          </a:p>
-          <a:p>
-            <a:pPr>
-              <a:spcAft>
-                <a:spcPts val="200"/>
-              </a:spcAft>
-              <a:defRPr sz="1200" b="1">
-                <a:solidFill>
-                  <a:srgbClr val="0F172A"/>
-                </a:solidFill>
-                <a:latin typeface="Arial"/>
-              </a:defRPr>
-            </a:pPr>
-            <a:r>
-              <a:t>3. AI Academic Co-Pilot for Difficult Subjects</a:t>
-            </a:r>
-          </a:p>
-          <a:p>
-            <a:pPr>
-              <a:spcAft>
-                <a:spcPts val="800"/>
-              </a:spcAft>
-              <a:defRPr sz="1050" b="0">
-                <a:solidFill>
-                  <a:srgbClr val="334155"/>
-                </a:solidFill>
-                <a:latin typeface="Arial"/>
-              </a:defRPr>
-            </a:pPr>
-            <a:r>
-              <a:t>• Fine-tuning localized lightweight LLMs on Mumbai University syllabus and previous year question papers (PYQs) to solve step-by-step mechanics and math equations.</a:t>
-            </a:r>
-          </a:p>
-          <a:p>
-            <a:pPr>
-              <a:spcAft>
-                <a:spcPts val="200"/>
-              </a:spcAft>
-              <a:defRPr sz="1200" b="1">
-                <a:solidFill>
-                  <a:srgbClr val="0F172A"/>
-                </a:solidFill>
-                <a:latin typeface="Arial"/>
-              </a:defRPr>
-            </a:pPr>
-            <a:r>
-              <a:t>4. Multi-College Autonomous Scaling</a:t>
-            </a:r>
-          </a:p>
-          <a:p>
-            <a:pPr>
-              <a:spcAft>
-                <a:spcPts val="200"/>
-              </a:spcAft>
-              <a:defRPr sz="1050" b="0">
-                <a:solidFill>
-                  <a:srgbClr val="334155"/>
-                </a:solidFill>
-                <a:latin typeface="Arial"/>
-              </a:defRPr>
-            </a:pPr>
-            <a:r>
-              <a:t>• Multi-tenant institutional architecture allowing other Mumbai University engineering colleges to onboard their customized divisions, grading rules, and campus maps.</a:t>
-            </a:r>
-          </a:p>
-        </p:txBody>
-      </p:sp>
-      <p:sp>
-        <p:nvSpPr>
-          <p:cNvPr id="168" name="Rounded Rectangle 167"/>
-          <p:cNvSpPr/>
-          <p:nvPr/>
-        </p:nvSpPr>
-        <p:spPr>
-          <a:xfrm>
-            <a:off x="9235440" y="1691640"/>
-            <a:ext cx="8138160" cy="6492240"/>
-          </a:xfrm>
-          <a:prstGeom prst="roundRect">
-            <a:avLst/>
-          </a:prstGeom>
-          <a:solidFill>
-            <a:srgbClr val="F8FAFC"/>
-          </a:solidFill>
-          <a:ln w="19050">
-            <a:solidFill>
-              <a:srgbClr val="E2E8F0"/>
-            </a:solidFill>
-          </a:ln>
-        </p:spPr>
-        <p:style>
-          <a:lnRef idx="1">
-            <a:schemeClr val="accent1"/>
-          </a:lnRef>
-          <a:fillRef idx="3">
-            <a:schemeClr val="accent1"/>
-          </a:fillRef>
-          <a:effectRef idx="2">
-            <a:schemeClr val="accent1"/>
-          </a:effectRef>
-          <a:fontRef idx="minor">
-            <a:schemeClr val="lt1"/>
-          </a:fontRef>
-        </p:style>
-        <p:txBody>
-          <a:bodyPr rtlCol="0" anchor="ctr" wrap="square" lIns="182880" rIns="182880" tIns="164592" bIns="164592"/>
-          <a:lstStyle/>
-          <a:p>
-            <a:pPr algn="ctr"/>
-          </a:p>
-          <a:p>
-            <a:pPr>
-              <a:spcAft>
-                <a:spcPts val="1000"/>
-              </a:spcAft>
-              <a:defRPr sz="1500" b="1">
-                <a:solidFill>
-                  <a:srgbClr val="6D28D9"/>
-                </a:solidFill>
-                <a:latin typeface="IBM Plex Mono"/>
-              </a:defRPr>
-            </a:pPr>
-            <a:r>
-              <a:t>REFERENCES &amp; TECHNICAL RESOURCES</a:t>
-            </a:r>
-          </a:p>
-          <a:p>
-            <a:pPr>
-              <a:spcAft>
-                <a:spcPts val="400"/>
-              </a:spcAft>
-              <a:defRPr sz="1200" b="1">
-                <a:solidFill>
-                  <a:srgbClr val="0F172A"/>
-                </a:solidFill>
-                <a:latin typeface="Arial"/>
-              </a:defRPr>
-            </a:pPr>
-            <a:r>
-              <a:t>Institutional &amp; Academic References:</a:t>
-            </a:r>
-          </a:p>
-          <a:p>
-            <a:pPr>
-              <a:spcAft>
-                <a:spcPts val="600"/>
-              </a:spcAft>
-              <a:defRPr sz="1050" b="0">
-                <a:solidFill>
-                  <a:srgbClr val="334155"/>
-                </a:solidFill>
-                <a:latin typeface="Arial"/>
-              </a:defRPr>
-            </a:pPr>
-            <a:r>
-              <a:t>• VESIT Autonomous Academic Regulations &amp; Syllabus Scheme 2026-27 (Official Institutional Portal: ves.ac.in)</a:t>
-            </a:r>
-          </a:p>
-          <a:p>
-            <a:pPr>
-              <a:spcAft>
-                <a:spcPts val="600"/>
-              </a:spcAft>
-              <a:defRPr sz="1050" b="0">
-                <a:solidFill>
-                  <a:srgbClr val="334155"/>
-                </a:solidFill>
-                <a:latin typeface="Arial"/>
-              </a:defRPr>
-            </a:pPr>
-            <a:r>
-              <a:t>• Mumbai University Credit-Based Grading System (CBGS) 10-Point Grade Distribution &amp; Passing Minimum Norms</a:t>
-            </a:r>
-          </a:p>
-          <a:p>
-            <a:pPr>
-              <a:spcAft>
-                <a:spcPts val="600"/>
-              </a:spcAft>
-              <a:defRPr sz="1050" b="0">
-                <a:solidFill>
-                  <a:srgbClr val="334155"/>
-                </a:solidFill>
-                <a:latin typeface="Arial"/>
-              </a:defRPr>
-            </a:pPr>
-            <a:r>
-              <a:t>• Official VESIT Semester 1 Final Allotment &amp; Roll Call Sheet (2026-27 w.e.f. 21/09/2026)</a:t>
-            </a:r>
-          </a:p>
-          <a:p>
-            <a:pPr>
-              <a:spcAft>
-                <a:spcPts val="1000"/>
-              </a:spcAft>
-              <a:defRPr sz="1050" b="0">
-                <a:solidFill>
-                  <a:srgbClr val="334155"/>
-                </a:solidFill>
-                <a:latin typeface="Arial"/>
-              </a:defRPr>
-            </a:pPr>
-            <a:r>
-              <a:t>• Official VESIT Semester 1 Group A &amp; Group B Timetable and Faculty Abbreviation Master Directory</a:t>
-            </a:r>
-          </a:p>
-          <a:p>
-            <a:pPr>
-              <a:spcAft>
-                <a:spcPts val="400"/>
-              </a:spcAft>
-              <a:defRPr sz="1200" b="1">
-                <a:solidFill>
-                  <a:srgbClr val="0F172A"/>
-                </a:solidFill>
-                <a:latin typeface="Arial"/>
-              </a:defRPr>
-            </a:pPr>
-            <a:r>
-              <a:t>Technologies, APIs &amp; Documentation:</a:t>
-            </a:r>
-          </a:p>
-          <a:p>
-            <a:pPr>
-              <a:spcAft>
-                <a:spcPts val="600"/>
-              </a:spcAft>
-              <a:defRPr sz="1050" b="0">
-                <a:solidFill>
-                  <a:srgbClr val="334155"/>
-                </a:solidFill>
-                <a:latin typeface="Arial"/>
-              </a:defRPr>
-            </a:pPr>
-            <a:r>
-              <a:t>• MiniMoth Developer Platform: Serverless Phone OTP Authentication &amp; JWT Token Rotation API Docs</a:t>
-            </a:r>
-          </a:p>
-          <a:p>
-            <a:pPr>
-              <a:spcAft>
-                <a:spcPts val="600"/>
-              </a:spcAft>
-              <a:defRPr sz="1050" b="0">
-                <a:solidFill>
-                  <a:srgbClr val="334155"/>
-                </a:solidFill>
-                <a:latin typeface="Arial"/>
-              </a:defRPr>
-            </a:pPr>
-            <a:r>
-              <a:t>• Leaflet.js &amp; OpenStreetMap Foundation: Interactive Web Mapping API &amp; Chembur/Kurla Geodata</a:t>
-            </a:r>
-          </a:p>
-          <a:p>
-            <a:pPr>
-              <a:spcAft>
-                <a:spcPts val="200"/>
-              </a:spcAft>
-              <a:defRPr sz="1050" b="0">
-                <a:solidFill>
-                  <a:srgbClr val="334155"/>
-                </a:solidFill>
-                <a:latin typeface="Arial"/>
-              </a:defRPr>
-            </a:pPr>
-            <a:r>
-              <a:t>• React 19 Core Architecture, TypeScript 5.8 Language Specs, and Tailwind CSS v4 Theme Engine</a:t>
-            </a:r>
-          </a:p>
-        </p:txBody>
-      </p:sp>
-    </p:spTree>
-  </p:cSld>
-  <p:clrMapOvr>
-    <a:masterClrMapping/>
-  </p:clrMapOvr>
-</p:sld>
-</file>
-
-<file path=ppt/slides/slide6.xml><?xml version="1.0" encoding="utf-8"?>
-<p:sld xmlns:a="http://schemas.openxmlformats.org/drawingml/2006/main" xmlns:r="http://schemas.openxmlformats.org/officeDocument/2006/relationships" xmlns:mc="http://schemas.openxmlformats.org/markup-compatibility/2006" xmlns:mv="urn:schemas-microsoft-com:mac:vml" xmlns:p="http://schemas.openxmlformats.org/presentationml/2006/main" xmlns:c="http://schemas.openxmlformats.org/drawingml/2006/chart" xmlns:dgm="http://schemas.openxmlformats.org/drawingml/2006/diagram" xmlns:o="urn:schemas-microsoft-com:office:office" xmlns:v="urn:schemas-microsoft-com:vml" xmlns:pvml="urn:schemas-microsoft-com:office:powerpoint" xmlns:com="http://schemas.openxmlformats.org/drawingml/2006/compatibility" xmlns:p14="http://schemas.microsoft.com/office/powerpoint/2010/main" xmlns:p15="http://schemas.microsoft.com/office/powerpoint/2012/main" xmlns:ahyp="http://schemas.microsoft.com/office/drawing/2018/hyperlinkcolor">
-  <p:cSld>
-    <p:bg>
-      <p:bgPr>
-        <a:gradFill>
-          <a:gsLst>
-            <a:gs pos="0">
-              <a:srgbClr val="FDFDFF"/>
-            </a:gs>
-            <a:gs pos="100000">
-              <a:srgbClr val="DBEEEE"/>
-            </a:gs>
-          </a:gsLst>
-          <a:path path="circle">
-            <a:fillToRect b="50%" l="50%" r="50%" t="50%"/>
-          </a:path>
-          <a:tileRect/>
-        </a:gradFill>
-      </p:bgPr>
-    </p:bg>
-    <p:spTree>
-      <p:nvGrpSpPr>
-        <p:cNvPr id="170" name="Shape 170"/>
-        <p:cNvGrpSpPr/>
-        <p:nvPr/>
-      </p:nvGrpSpPr>
-      <p:grpSpPr>
-        <a:xfrm>
-          <a:off x="0" y="0"/>
-          <a:ext cx="0" cy="0"/>
-          <a:chOff x="0" y="0"/>
-          <a:chExt cx="0" cy="0"/>
-        </a:xfrm>
-      </p:grpSpPr>
-      <p:grpSp>
-        <p:nvGrpSpPr>
-          <p:cNvPr id="171" name="Google Shape;171;p18"/>
-          <p:cNvGrpSpPr/>
-          <p:nvPr/>
-        </p:nvGrpSpPr>
-        <p:grpSpPr>
-          <a:xfrm>
-            <a:off x="0" y="9113639"/>
-            <a:ext cx="18288000" cy="1173361"/>
-            <a:chOff x="0" y="-38100"/>
-            <a:chExt cx="4816593" cy="309033"/>
-          </a:xfrm>
-        </p:grpSpPr>
-        <p:sp>
-          <p:nvSpPr>
-            <p:cNvPr id="172" name="Google Shape;172;p18"/>
-            <p:cNvSpPr/>
-            <p:nvPr/>
-          </p:nvSpPr>
-          <p:spPr>
-            <a:xfrm>
-              <a:off x="0" y="0"/>
-              <a:ext cx="4816592" cy="270933"/>
-            </a:xfrm>
-            <a:custGeom>
-              <a:rect b="b" l="l" r="r" t="t"/>
-              <a:pathLst>
-                <a:path extrusionOk="0" h="270933" w="4816592">
-                  <a:moveTo>
-                    <a:pt x="0" y="0"/>
-                  </a:moveTo>
-                  <a:lnTo>
-                    <a:pt x="4816592" y="0"/>
-                  </a:lnTo>
-                  <a:lnTo>
-                    <a:pt x="4816592" y="270933"/>
-                  </a:lnTo>
-                  <a:lnTo>
-                    <a:pt x="0" y="270933"/>
-                  </a:lnTo>
-                  <a:close/>
-                </a:path>
-              </a:pathLst>
-            </a:custGeom>
-            <a:solidFill>
-              <a:srgbClr val="9F2F24"/>
-            </a:solidFill>
-            <a:ln>
-              <a:noFill/>
-            </a:ln>
-          </p:spPr>
-        </p:sp>
-        <p:sp>
-          <p:nvSpPr>
-            <p:cNvPr id="173" name="Google Shape;173;p18"/>
-            <p:cNvSpPr txBox="1"/>
-            <p:nvPr/>
-          </p:nvSpPr>
-          <p:spPr>
-            <a:xfrm>
-              <a:off x="0" y="-38100"/>
-              <a:ext cx="4816593" cy="309033"/>
-            </a:xfrm>
-            <a:prstGeom prst="rect">
-              <a:avLst/>
-            </a:prstGeom>
-            <a:noFill/>
-            <a:ln>
-              <a:noFill/>
-            </a:ln>
-          </p:spPr>
-          <p:txBody>
-            <a:bodyPr anchorCtr="0" anchor="ctr" bIns="50800" lIns="50800" spcFirstLastPara="1" rIns="50800" wrap="square" tIns="50800">
-              <a:noAutofit/>
-            </a:bodyPr>
-            <a:lstStyle/>
-            <a:p>
-              <a:pPr indent="0" lvl="0" marL="0" marR="0" rtl="0" algn="ctr">
-                <a:lnSpc>
-                  <a:spcPct val="147722"/>
-                </a:lnSpc>
-                <a:spcBef>
-                  <a:spcPts val="0"/>
-                </a:spcBef>
-                <a:spcAft>
-                  <a:spcPts val="0"/>
-                </a:spcAft>
-                <a:buNone/>
-              </a:pPr>
-              <a:r>
-                <a:t/>
-              </a:r>
-              <a:endParaRPr b="0" i="0" sz="1800" u="none" cap="none" strike="noStrike">
-                <a:solidFill>
-                  <a:schemeClr val="dk1"/>
-                </a:solidFill>
-                <a:latin typeface="Calibri"/>
-                <a:ea typeface="Calibri"/>
-                <a:cs typeface="Calibri"/>
-                <a:sym typeface="Calibri"/>
-              </a:endParaRPr>
-            </a:p>
-          </p:txBody>
-        </p:sp>
-      </p:grpSp>
-      <p:sp>
-        <p:nvSpPr>
-          <p:cNvPr id="174" name="Google Shape;174;p18"/>
-          <p:cNvSpPr txBox="1"/>
-          <p:nvPr/>
-        </p:nvSpPr>
-        <p:spPr>
-          <a:xfrm>
-            <a:off x="4095304" y="389964"/>
-            <a:ext cx="10097393" cy="1037623"/>
-          </a:xfrm>
-          <a:prstGeom prst="rect">
-            <a:avLst/>
-          </a:prstGeom>
-          <a:noFill/>
-          <a:ln>
-            <a:noFill/>
-          </a:ln>
-        </p:spPr>
-        <p:txBody>
-          <a:bodyPr anchorCtr="0" anchor="t" bIns="0" lIns="0" spcFirstLastPara="1" rIns="0" wrap="square" tIns="0">
-            <a:spAutoFit/>
-          </a:bodyPr>
-          <a:lstStyle/>
-          <a:p>
-            <a:pPr indent="0" lvl="0" marL="0" marR="0" rtl="0" algn="l">
-              <a:lnSpc>
-                <a:spcPct val="140013"/>
-              </a:lnSpc>
-              <a:spcBef>
-                <a:spcPts val="0"/>
-              </a:spcBef>
-              <a:spcAft>
-                <a:spcPts val="0"/>
-              </a:spcAft>
-              <a:buNone/>
-            </a:pPr>
-            <a:r>
-              <a:rPr b="1" i="0" lang="en-US" sz="6023" u="none" cap="none" strike="noStrike">
-                <a:solidFill>
-                  <a:srgbClr val="000000"/>
-                </a:solidFill>
-                <a:latin typeface="IBM Plex Mono"/>
-                <a:ea typeface="IBM Plex Mono"/>
-                <a:cs typeface="IBM Plex Mono"/>
-                <a:sym typeface="IBM Plex Mono"/>
-              </a:rPr>
-              <a:t>IMPORTANT INSTRUCTIONS</a:t>
-            </a:r>
-            <a:endParaRPr/>
-          </a:p>
-        </p:txBody>
-      </p:sp>
-      <p:sp>
-        <p:nvSpPr>
-          <p:cNvPr id="175" name="Google Shape;175;p18"/>
-          <p:cNvSpPr txBox="1"/>
-          <p:nvPr/>
-        </p:nvSpPr>
-        <p:spPr>
-          <a:xfrm>
-            <a:off x="837641" y="2365142"/>
-            <a:ext cx="15699934" cy="3580765"/>
-          </a:xfrm>
-          <a:prstGeom prst="rect">
-            <a:avLst/>
-          </a:prstGeom>
-          <a:noFill/>
-          <a:ln>
-            <a:noFill/>
-          </a:ln>
-        </p:spPr>
-        <p:txBody>
-          <a:bodyPr anchorCtr="0" anchor="t" bIns="0" lIns="0" spcFirstLastPara="1" rIns="0" wrap="square" tIns="0">
-            <a:spAutoFit/>
-          </a:bodyPr>
-          <a:lstStyle/>
-          <a:p>
-            <a:pPr indent="-367030" lvl="1" marL="734059" marR="0" rtl="0" algn="l">
-              <a:lnSpc>
-                <a:spcPct val="140011"/>
-              </a:lnSpc>
-              <a:spcBef>
-                <a:spcPts val="0"/>
-              </a:spcBef>
-              <a:spcAft>
-                <a:spcPts val="0"/>
-              </a:spcAft>
-              <a:buClr>
-                <a:srgbClr val="000000"/>
-              </a:buClr>
-              <a:buSzPts val="3399"/>
-              <a:buFont typeface="Libre Baskerville"/>
-              <a:buAutoNum type="arabicPeriod"/>
-            </a:pPr>
-            <a:r>
-              <a:rPr b="0" i="0" lang="en-US" sz="3399" u="none" cap="none" strike="noStrike">
-                <a:solidFill>
-                  <a:srgbClr val="000000"/>
-                </a:solidFill>
-                <a:latin typeface="Libre Baskerville"/>
-                <a:ea typeface="Libre Baskerville"/>
-                <a:cs typeface="Libre Baskerville"/>
-                <a:sym typeface="Libre Baskerville"/>
-              </a:rPr>
-              <a:t>Maximum 5 slides only (excluding this slide)</a:t>
-            </a:r>
-            <a:endParaRPr/>
-          </a:p>
-          <a:p>
-            <a:pPr indent="-367030" lvl="1" marL="734059" marR="0" rtl="0" algn="l">
-              <a:lnSpc>
-                <a:spcPct val="140011"/>
-              </a:lnSpc>
-              <a:spcBef>
-                <a:spcPts val="0"/>
-              </a:spcBef>
-              <a:spcAft>
-                <a:spcPts val="0"/>
-              </a:spcAft>
-              <a:buClr>
-                <a:srgbClr val="000000"/>
-              </a:buClr>
-              <a:buSzPts val="3399"/>
-              <a:buFont typeface="Libre Baskerville"/>
-              <a:buAutoNum type="arabicPeriod"/>
-            </a:pPr>
-            <a:r>
-              <a:rPr b="0" i="0" lang="en-US" sz="3399" u="none" cap="none" strike="noStrike">
-                <a:solidFill>
-                  <a:srgbClr val="000000"/>
-                </a:solidFill>
-                <a:latin typeface="Libre Baskerville"/>
-                <a:ea typeface="Libre Baskerville"/>
-                <a:cs typeface="Libre Baskerville"/>
-                <a:sym typeface="Libre Baskerville"/>
-              </a:rPr>
-              <a:t>Do not change slide order or headings</a:t>
-            </a:r>
-            <a:endParaRPr/>
-          </a:p>
-          <a:p>
-            <a:pPr indent="-367030" lvl="1" marL="734059" marR="0" rtl="0" algn="l">
-              <a:lnSpc>
-                <a:spcPct val="140011"/>
-              </a:lnSpc>
-              <a:spcBef>
-                <a:spcPts val="0"/>
-              </a:spcBef>
-              <a:spcAft>
-                <a:spcPts val="0"/>
-              </a:spcAft>
-              <a:buClr>
-                <a:srgbClr val="000000"/>
-              </a:buClr>
-              <a:buSzPts val="3399"/>
-              <a:buFont typeface="Libre Baskerville"/>
-              <a:buAutoNum type="arabicPeriod"/>
-            </a:pPr>
-            <a:r>
-              <a:rPr b="0" i="0" lang="en-US" sz="3399" u="none" cap="none" strike="noStrike">
-                <a:solidFill>
-                  <a:srgbClr val="000000"/>
-                </a:solidFill>
-                <a:latin typeface="Libre Baskerville"/>
-                <a:ea typeface="Libre Baskerville"/>
-                <a:cs typeface="Libre Baskerville"/>
-                <a:sym typeface="Libre Baskerville"/>
-              </a:rPr>
-              <a:t>Avoid long paragraphs</a:t>
-            </a:r>
-            <a:endParaRPr/>
-          </a:p>
-          <a:p>
-            <a:pPr indent="-367030" lvl="1" marL="734059" marR="0" rtl="0" algn="l">
-              <a:lnSpc>
-                <a:spcPct val="140011"/>
-              </a:lnSpc>
-              <a:spcBef>
-                <a:spcPts val="0"/>
-              </a:spcBef>
-              <a:spcAft>
-                <a:spcPts val="0"/>
-              </a:spcAft>
-              <a:buClr>
-                <a:srgbClr val="000000"/>
-              </a:buClr>
-              <a:buSzPts val="3399"/>
-              <a:buFont typeface="Libre Baskerville"/>
-              <a:buAutoNum type="arabicPeriod"/>
-            </a:pPr>
-            <a:r>
-              <a:rPr b="0" i="0" lang="en-US" sz="3399" u="none" cap="none" strike="noStrike">
-                <a:solidFill>
-                  <a:srgbClr val="000000"/>
-                </a:solidFill>
-                <a:latin typeface="Libre Baskerville"/>
-                <a:ea typeface="Libre Baskerville"/>
-                <a:cs typeface="Libre Baskerville"/>
-                <a:sym typeface="Libre Baskerville"/>
-              </a:rPr>
-              <a:t>Use bullets, diagrams, images, flowcharts</a:t>
-            </a:r>
-            <a:endParaRPr/>
-          </a:p>
-          <a:p>
-            <a:pPr indent="-367030" lvl="1" marL="734059" marR="0" rtl="0" algn="l">
-              <a:lnSpc>
-                <a:spcPct val="140011"/>
-              </a:lnSpc>
-              <a:spcBef>
-                <a:spcPts val="0"/>
-              </a:spcBef>
-              <a:spcAft>
-                <a:spcPts val="0"/>
-              </a:spcAft>
-              <a:buClr>
-                <a:srgbClr val="000000"/>
-              </a:buClr>
-              <a:buSzPts val="3399"/>
-              <a:buFont typeface="Libre Baskerville"/>
-              <a:buAutoNum type="arabicPeriod"/>
-            </a:pPr>
-            <a:r>
-              <a:rPr b="0" i="0" lang="en-US" sz="3399" u="none" cap="none" strike="noStrike">
-                <a:solidFill>
-                  <a:srgbClr val="000000"/>
-                </a:solidFill>
-                <a:latin typeface="Libre Baskerville"/>
-                <a:ea typeface="Libre Baskerville"/>
-                <a:cs typeface="Libre Baskerville"/>
-                <a:sym typeface="Libre Baskerville"/>
-              </a:rPr>
-              <a:t>PPT must be original work of the team</a:t>
-            </a:r>
-            <a:endParaRPr/>
-          </a:p>
-          <a:p>
-            <a:pPr indent="-367030" lvl="1" marL="734059" marR="0" rtl="0" algn="l">
-              <a:lnSpc>
-                <a:spcPct val="140011"/>
-              </a:lnSpc>
-              <a:spcBef>
-                <a:spcPts val="0"/>
-              </a:spcBef>
-              <a:spcAft>
-                <a:spcPts val="0"/>
-              </a:spcAft>
-              <a:buClr>
-                <a:srgbClr val="000000"/>
-              </a:buClr>
-              <a:buSzPts val="3399"/>
-              <a:buFont typeface="Libre Baskerville"/>
-              <a:buAutoNum type="arabicPeriod"/>
-            </a:pPr>
-            <a:r>
-              <a:rPr b="0" i="0" lang="en-US" sz="3399" u="none" cap="none" strike="noStrike">
-                <a:solidFill>
-                  <a:srgbClr val="000000"/>
-                </a:solidFill>
-                <a:latin typeface="Libre Baskerville"/>
-                <a:ea typeface="Libre Baskerville"/>
-                <a:cs typeface="Libre Baskerville"/>
-                <a:sym typeface="Libre Baskerville"/>
-              </a:rPr>
-              <a:t>File name format: TeamName_Genesis2.0_FE/SE/TE/BE/MCA</a:t>
-            </a:r>
-            <a:endParaRPr/>
-          </a:p>
-        </p:txBody>
-      </p:sp>
-      <p:sp>
-        <p:nvSpPr>
-          <p:cNvPr id="176" name="Google Shape;176;p18"/>
-          <p:cNvSpPr/>
-          <p:nvPr/>
-        </p:nvSpPr>
-        <p:spPr>
-          <a:xfrm>
-            <a:off x="2601885" y="1463560"/>
-            <a:ext cx="13084230" cy="7359879"/>
+            <a:off x="16793950" y="135950"/>
+            <a:ext cx="1259674" cy="1259478"/>
           </a:xfrm>
           <a:custGeom>
             <a:rect b="b" l="l" r="r" t="t"/>
             <a:pathLst>
-              <a:path extrusionOk="0" h="7359879" w="13084230">
+              <a:path extrusionOk="0" h="1259478" w="1259674">
                 <a:moveTo>
                   <a:pt x="0" y="0"/>
                 </a:moveTo>
                 <a:lnTo>
-                  <a:pt x="13084230" y="0"/>
+                  <a:pt x="1259674" y="0"/>
                 </a:lnTo>
                 <a:lnTo>
-                  <a:pt x="13084230" y="7359880"/>
+                  <a:pt x="1259674" y="1259478"/>
                 </a:lnTo>
                 <a:lnTo>
-                  <a:pt x="0" y="7359880"/>
+                  <a:pt x="0" y="1259478"/>
                 </a:lnTo>
                 <a:lnTo>
                   <a:pt x="0" y="0"/>
@@ -16875,11 +15309,11 @@
             </a:pathLst>
           </a:custGeom>
           <a:blipFill rotWithShape="1">
-            <a:blip r:embed="rId3">
-              <a:alphaModFix amt="5000"/>
+            <a:blip r:embed="rId4">
+              <a:alphaModFix/>
             </a:blip>
             <a:stretch>
-              <a:fillRect b="0" l="0" r="0" t="0"/>
+              <a:fillRect b="0" l="0" r="-90299" t="-5830"/>
             </a:stretch>
           </a:blipFill>
           <a:ln>
@@ -16889,30 +15323,30 @@
       </p:sp>
       <p:sp>
         <p:nvSpPr>
-          <p:cNvPr id="177" name="Google Shape;177;p18"/>
+          <p:cNvPr id="170" name="Google Shape;170;p17"/>
           <p:cNvSpPr/>
           <p:nvPr/>
         </p:nvSpPr>
         <p:spPr>
           <a:xfrm>
-            <a:off x="16367044" y="118562"/>
-            <a:ext cx="2229573" cy="1254135"/>
+            <a:off x="5242694" y="1637105"/>
+            <a:ext cx="7187454" cy="7186335"/>
           </a:xfrm>
           <a:custGeom>
             <a:rect b="b" l="l" r="r" t="t"/>
             <a:pathLst>
-              <a:path extrusionOk="0" h="1254135" w="2229573">
+              <a:path extrusionOk="0" h="7186335" w="7187454">
                 <a:moveTo>
                   <a:pt x="0" y="0"/>
                 </a:moveTo>
                 <a:lnTo>
-                  <a:pt x="2229573" y="0"/>
+                  <a:pt x="7187454" y="0"/>
                 </a:lnTo>
                 <a:lnTo>
-                  <a:pt x="2229573" y="1254135"/>
+                  <a:pt x="7187454" y="7186335"/>
                 </a:lnTo>
                 <a:lnTo>
-                  <a:pt x="0" y="1254135"/>
+                  <a:pt x="0" y="7186335"/>
                 </a:lnTo>
                 <a:lnTo>
                   <a:pt x="0" y="0"/>
@@ -16922,11 +15356,11 @@
             </a:pathLst>
           </a:custGeom>
           <a:blipFill rotWithShape="1">
-            <a:blip r:embed="rId3">
-              <a:alphaModFix/>
+            <a:blip r:embed="rId4">
+              <a:alphaModFix amt="5000"/>
             </a:blip>
             <a:stretch>
-              <a:fillRect b="0" l="0" r="0" t="0"/>
+              <a:fillRect b="0" l="0" r="-90299" t="-5830"/>
             </a:stretch>
           </a:blipFill>
           <a:ln>
@@ -16934,206 +15368,6 @@
           </a:ln>
         </p:spPr>
       </p:sp>
-      <p:grpSp>
-        <p:nvGrpSpPr>
-          <p:cNvPr id="178" name="Google Shape;178;p18"/>
-          <p:cNvGrpSpPr/>
-          <p:nvPr/>
-        </p:nvGrpSpPr>
-        <p:grpSpPr>
-          <a:xfrm>
-            <a:off x="191375" y="118562"/>
-            <a:ext cx="1292532" cy="1302817"/>
-            <a:chOff x="0" y="0"/>
-            <a:chExt cx="1723376" cy="1737090"/>
-          </a:xfrm>
-        </p:grpSpPr>
-        <p:grpSp>
-          <p:nvGrpSpPr>
-            <p:cNvPr id="179" name="Google Shape;179;p18"/>
-            <p:cNvGrpSpPr/>
-            <p:nvPr/>
-          </p:nvGrpSpPr>
-          <p:grpSpPr>
-            <a:xfrm>
-              <a:off x="94119" y="59143"/>
-              <a:ext cx="1540538" cy="1540538"/>
-              <a:chOff x="0" y="0"/>
-              <a:chExt cx="812800" cy="812800"/>
-            </a:xfrm>
-          </p:grpSpPr>
-          <p:sp>
-            <p:nvSpPr>
-              <p:cNvPr id="180" name="Google Shape;180;p18"/>
-              <p:cNvSpPr/>
-              <p:nvPr/>
-            </p:nvSpPr>
-            <p:spPr>
-              <a:xfrm>
-                <a:off x="0" y="0"/>
-                <a:ext cx="812800" cy="812800"/>
-              </a:xfrm>
-              <a:custGeom>
-                <a:rect b="b" l="l" r="r" t="t"/>
-                <a:pathLst>
-                  <a:path extrusionOk="0" h="812800" w="812800">
-                    <a:moveTo>
-                      <a:pt x="406400" y="0"/>
-                    </a:moveTo>
-                    <a:cubicBezTo>
-                      <a:pt x="181951" y="0"/>
-                      <a:pt x="0" y="181951"/>
-                      <a:pt x="0" y="406400"/>
-                    </a:cubicBezTo>
-                    <a:cubicBezTo>
-                      <a:pt x="0" y="630849"/>
-                      <a:pt x="181951" y="812800"/>
-                      <a:pt x="406400" y="812800"/>
-                    </a:cubicBezTo>
-                    <a:cubicBezTo>
-                      <a:pt x="630849" y="812800"/>
-                      <a:pt x="812800" y="630849"/>
-                      <a:pt x="812800" y="406400"/>
-                    </a:cubicBezTo>
-                    <a:cubicBezTo>
-                      <a:pt x="812800" y="181951"/>
-                      <a:pt x="630849" y="0"/>
-                      <a:pt x="406400" y="0"/>
-                    </a:cubicBezTo>
-                    <a:close/>
-                  </a:path>
-                </a:pathLst>
-              </a:custGeom>
-              <a:solidFill>
-                <a:srgbClr val="1A1D20"/>
-              </a:solidFill>
-              <a:ln>
-                <a:noFill/>
-              </a:ln>
-            </p:spPr>
-            <p:txBody>
-              <a:bodyPr anchorCtr="0" anchor="ctr" bIns="91425" lIns="91425" spcFirstLastPara="1" rIns="91425" wrap="square" tIns="91425">
-                <a:noAutofit/>
-              </a:bodyPr>
-              <a:lstStyle/>
-              <a:p>
-                <a:pPr indent="0" lvl="0" marL="0" rtl="0" algn="l">
-                  <a:spcBef>
-                    <a:spcPts val="0"/>
-                  </a:spcBef>
-                  <a:spcAft>
-                    <a:spcPts val="0"/>
-                  </a:spcAft>
-                  <a:buNone/>
-                </a:pPr>
-                <a:r>
-                  <a:t/>
-                </a:r>
-                <a:endParaRPr/>
-              </a:p>
-            </p:txBody>
-          </p:sp>
-          <p:sp>
-            <p:nvSpPr>
-              <p:cNvPr id="181" name="Google Shape;181;p18"/>
-              <p:cNvSpPr txBox="1"/>
-              <p:nvPr/>
-            </p:nvSpPr>
-            <p:spPr>
-              <a:xfrm>
-                <a:off x="76200" y="47625"/>
-                <a:ext cx="660400" cy="688975"/>
-              </a:xfrm>
-              <a:prstGeom prst="rect">
-                <a:avLst/>
-              </a:prstGeom>
-              <a:noFill/>
-              <a:ln>
-                <a:noFill/>
-              </a:ln>
-            </p:spPr>
-            <p:txBody>
-              <a:bodyPr anchorCtr="0" anchor="ctr" bIns="25450" lIns="25450" spcFirstLastPara="1" rIns="25450" wrap="square" tIns="25450">
-                <a:noAutofit/>
-              </a:bodyPr>
-              <a:lstStyle/>
-              <a:p>
-                <a:pPr indent="0" lvl="0" marL="0" marR="0" rtl="0" algn="ctr">
-                  <a:lnSpc>
-                    <a:spcPct val="108833"/>
-                  </a:lnSpc>
-                  <a:spcBef>
-                    <a:spcPts val="0"/>
-                  </a:spcBef>
-                  <a:spcAft>
-                    <a:spcPts val="0"/>
-                  </a:spcAft>
-                  <a:buNone/>
-                </a:pPr>
-                <a:r>
-                  <a:t/>
-                </a:r>
-                <a:endParaRPr b="0" i="0" sz="1800" u="none" cap="none" strike="noStrike">
-                  <a:solidFill>
-                    <a:schemeClr val="dk1"/>
-                  </a:solidFill>
-                  <a:latin typeface="Calibri"/>
-                  <a:ea typeface="Calibri"/>
-                  <a:cs typeface="Calibri"/>
-                  <a:sym typeface="Calibri"/>
-                </a:endParaRPr>
-              </a:p>
-            </p:txBody>
-          </p:sp>
-        </p:grpSp>
-        <p:sp>
-          <p:nvSpPr>
-            <p:cNvPr id="182" name="Google Shape;182;p18"/>
-            <p:cNvSpPr/>
-            <p:nvPr/>
-          </p:nvSpPr>
-          <p:spPr>
-            <a:xfrm>
-              <a:off x="0" y="0"/>
-              <a:ext cx="1723376" cy="1737090"/>
-            </a:xfrm>
-            <a:custGeom>
-              <a:rect b="b" l="l" r="r" t="t"/>
-              <a:pathLst>
-                <a:path extrusionOk="0" h="1737090" w="1723376">
-                  <a:moveTo>
-                    <a:pt x="0" y="0"/>
-                  </a:moveTo>
-                  <a:lnTo>
-                    <a:pt x="1723376" y="0"/>
-                  </a:lnTo>
-                  <a:lnTo>
-                    <a:pt x="1723376" y="1737090"/>
-                  </a:lnTo>
-                  <a:lnTo>
-                    <a:pt x="0" y="1737090"/>
-                  </a:lnTo>
-                  <a:lnTo>
-                    <a:pt x="0" y="0"/>
-                  </a:lnTo>
-                  <a:close/>
-                </a:path>
-              </a:pathLst>
-            </a:custGeom>
-            <a:blipFill rotWithShape="1">
-              <a:blip r:embed="rId4">
-                <a:alphaModFix/>
-              </a:blip>
-              <a:stretch>
-                <a:fillRect b="0" l="0" r="0" t="0"/>
-              </a:stretch>
-            </a:blipFill>
-            <a:ln>
-              <a:noFill/>
-            </a:ln>
-          </p:spPr>
-        </p:sp>
-      </p:grpSp>
     </p:spTree>
   </p:cSld>
   <p:clrMapOvr>
